--- a/skill/flaesh-campus/assets/template/flaesh-campus-template.pptx
+++ b/skill/flaesh-campus/assets/template/flaesh-campus-template.pptx
@@ -2578,45 +2578,7 @@
       </p:pic>
       <p:sp>
         <p:nvSpPr>
-          <p:cNvPr id="5" name="zone-ring"/>
-          <p:cNvSpPr/>
-          <p:nvPr/>
-        </p:nvSpPr>
-        <p:spPr>
-          <a:xfrm>
-            <a:off x="9931400" y="4597400"/>
-            <a:ext cx="1905000" cy="1905000"/>
-          </a:xfrm>
-          <a:prstGeom prst="ellipse">
-            <a:avLst/>
-          </a:prstGeom>
-          <a:solidFill>
-            <a:srgbClr val="FFFFFF"/>
-          </a:solidFill>
-          <a:ln w="25400">
-            <a:solidFill>
-              <a:srgbClr val="00A5FF"/>
-            </a:solidFill>
-          </a:ln>
-          <a:effectLst>
-            <a:glow rad="292100">
-              <a:srgbClr val="00A5FF">
-                <a:alpha val="45000"/>
-              </a:srgbClr>
-            </a:glow>
-          </a:effectLst>
-        </p:spPr>
-        <p:txBody>
-          <a:bodyPr rtlCol="0" anchor="ctr"/>
-          <a:lstStyle/>
-          <a:p>
-            <a:pPr algn="ctr"/>
-          </a:p>
-        </p:txBody>
-      </p:sp>
-      <p:sp>
-        <p:nvSpPr>
-          <p:cNvPr id="6" name="Episode"/>
+          <p:cNvPr id="5" name="Episode"/>
           <p:cNvSpPr>
             <a:spLocks noGrp="1"/>
           </p:cNvSpPr>
@@ -2670,7 +2632,7 @@
       </p:sp>
       <p:sp>
         <p:nvSpPr>
-          <p:cNvPr id="7" name="Kicker"/>
+          <p:cNvPr id="6" name="Kicker"/>
           <p:cNvSpPr>
             <a:spLocks noGrp="1"/>
           </p:cNvSpPr>
@@ -2724,7 +2686,7 @@
       </p:sp>
       <p:sp>
         <p:nvSpPr>
-          <p:cNvPr id="8" name="Title"/>
+          <p:cNvPr id="7" name="Title"/>
           <p:cNvSpPr>
             <a:spLocks noGrp="1"/>
           </p:cNvSpPr>
@@ -2899,45 +2861,7 @@
       </p:pic>
       <p:sp>
         <p:nvSpPr>
-          <p:cNvPr id="5" name="zone-ring"/>
-          <p:cNvSpPr/>
-          <p:nvPr/>
-        </p:nvSpPr>
-        <p:spPr>
-          <a:xfrm>
-            <a:off x="9931400" y="4597400"/>
-            <a:ext cx="1905000" cy="1905000"/>
-          </a:xfrm>
-          <a:prstGeom prst="ellipse">
-            <a:avLst/>
-          </a:prstGeom>
-          <a:solidFill>
-            <a:srgbClr val="FFFFFF"/>
-          </a:solidFill>
-          <a:ln w="25400">
-            <a:solidFill>
-              <a:srgbClr val="00A5FF"/>
-            </a:solidFill>
-          </a:ln>
-          <a:effectLst>
-            <a:glow rad="292100">
-              <a:srgbClr val="00A5FF">
-                <a:alpha val="45000"/>
-              </a:srgbClr>
-            </a:glow>
-          </a:effectLst>
-        </p:spPr>
-        <p:txBody>
-          <a:bodyPr rtlCol="0" anchor="ctr"/>
-          <a:lstStyle/>
-          <a:p>
-            <a:pPr algn="ctr"/>
-          </a:p>
-        </p:txBody>
-      </p:sp>
-      <p:sp>
-        <p:nvSpPr>
-          <p:cNvPr id="6" name="Episode"/>
+          <p:cNvPr id="5" name="Episode"/>
           <p:cNvSpPr>
             <a:spLocks noGrp="1"/>
           </p:cNvSpPr>
@@ -2991,7 +2915,7 @@
       </p:sp>
       <p:sp>
         <p:nvSpPr>
-          <p:cNvPr id="7" name="Kicker"/>
+          <p:cNvPr id="6" name="Kicker"/>
           <p:cNvSpPr>
             <a:spLocks noGrp="1"/>
           </p:cNvSpPr>
@@ -3045,7 +2969,7 @@
       </p:sp>
       <p:sp>
         <p:nvSpPr>
-          <p:cNvPr id="8" name="Title"/>
+          <p:cNvPr id="7" name="Title"/>
           <p:cNvSpPr>
             <a:spLocks noGrp="1"/>
           </p:cNvSpPr>
@@ -3220,45 +3144,7 @@
       </p:pic>
       <p:sp>
         <p:nvSpPr>
-          <p:cNvPr id="5" name="zone-ring"/>
-          <p:cNvSpPr/>
-          <p:nvPr/>
-        </p:nvSpPr>
-        <p:spPr>
-          <a:xfrm>
-            <a:off x="9931400" y="4597400"/>
-            <a:ext cx="1905000" cy="1905000"/>
-          </a:xfrm>
-          <a:prstGeom prst="ellipse">
-            <a:avLst/>
-          </a:prstGeom>
-          <a:solidFill>
-            <a:srgbClr val="FFFFFF"/>
-          </a:solidFill>
-          <a:ln w="25400">
-            <a:solidFill>
-              <a:srgbClr val="00A5FF"/>
-            </a:solidFill>
-          </a:ln>
-          <a:effectLst>
-            <a:glow rad="292100">
-              <a:srgbClr val="00A5FF">
-                <a:alpha val="45000"/>
-              </a:srgbClr>
-            </a:glow>
-          </a:effectLst>
-        </p:spPr>
-        <p:txBody>
-          <a:bodyPr rtlCol="0" anchor="ctr"/>
-          <a:lstStyle/>
-          <a:p>
-            <a:pPr algn="ctr"/>
-          </a:p>
-        </p:txBody>
-      </p:sp>
-      <p:sp>
-        <p:nvSpPr>
-          <p:cNvPr id="6" name="Episode"/>
+          <p:cNvPr id="5" name="Episode"/>
           <p:cNvSpPr>
             <a:spLocks noGrp="1"/>
           </p:cNvSpPr>
@@ -3312,7 +3198,7 @@
       </p:sp>
       <p:sp>
         <p:nvSpPr>
-          <p:cNvPr id="7" name="Kicker"/>
+          <p:cNvPr id="6" name="Kicker"/>
           <p:cNvSpPr>
             <a:spLocks noGrp="1"/>
           </p:cNvSpPr>
@@ -3366,7 +3252,7 @@
       </p:sp>
       <p:sp>
         <p:nvSpPr>
-          <p:cNvPr id="8" name="Title"/>
+          <p:cNvPr id="7" name="Title"/>
           <p:cNvSpPr>
             <a:spLocks noGrp="1"/>
           </p:cNvSpPr>
@@ -3420,7 +3306,7 @@
       </p:sp>
       <p:sp>
         <p:nvSpPr>
-          <p:cNvPr id="9" name="Points"/>
+          <p:cNvPr id="8" name="Points"/>
           <p:cNvSpPr>
             <a:spLocks noGrp="1"/>
           </p:cNvSpPr>
@@ -3622,45 +3508,7 @@
       </p:pic>
       <p:sp>
         <p:nvSpPr>
-          <p:cNvPr id="5" name="zone-ring"/>
-          <p:cNvSpPr/>
-          <p:nvPr/>
-        </p:nvSpPr>
-        <p:spPr>
-          <a:xfrm>
-            <a:off x="9931400" y="4597400"/>
-            <a:ext cx="1905000" cy="1905000"/>
-          </a:xfrm>
-          <a:prstGeom prst="ellipse">
-            <a:avLst/>
-          </a:prstGeom>
-          <a:solidFill>
-            <a:srgbClr val="FFFFFF"/>
-          </a:solidFill>
-          <a:ln w="25400">
-            <a:solidFill>
-              <a:srgbClr val="00A5FF"/>
-            </a:solidFill>
-          </a:ln>
-          <a:effectLst>
-            <a:glow rad="292100">
-              <a:srgbClr val="00A5FF">
-                <a:alpha val="45000"/>
-              </a:srgbClr>
-            </a:glow>
-          </a:effectLst>
-        </p:spPr>
-        <p:txBody>
-          <a:bodyPr rtlCol="0" anchor="ctr"/>
-          <a:lstStyle/>
-          <a:p>
-            <a:pPr algn="ctr"/>
-          </a:p>
-        </p:txBody>
-      </p:sp>
-      <p:sp>
-        <p:nvSpPr>
-          <p:cNvPr id="6" name="Episode"/>
+          <p:cNvPr id="5" name="Episode"/>
           <p:cNvSpPr>
             <a:spLocks noGrp="1"/>
           </p:cNvSpPr>
@@ -3714,7 +3562,7 @@
       </p:sp>
       <p:sp>
         <p:nvSpPr>
-          <p:cNvPr id="7" name="Kicker"/>
+          <p:cNvPr id="6" name="Kicker"/>
           <p:cNvSpPr>
             <a:spLocks noGrp="1"/>
           </p:cNvSpPr>
@@ -3768,7 +3616,7 @@
       </p:sp>
       <p:sp>
         <p:nvSpPr>
-          <p:cNvPr id="8" name="Title"/>
+          <p:cNvPr id="7" name="Title"/>
           <p:cNvSpPr>
             <a:spLocks noGrp="1"/>
           </p:cNvSpPr>
@@ -4342,45 +4190,7 @@
       </p:pic>
       <p:sp>
         <p:nvSpPr>
-          <p:cNvPr id="5" name="zone-ring"/>
-          <p:cNvSpPr/>
-          <p:nvPr/>
-        </p:nvSpPr>
-        <p:spPr>
-          <a:xfrm>
-            <a:off x="9931400" y="4597400"/>
-            <a:ext cx="1905000" cy="1905000"/>
-          </a:xfrm>
-          <a:prstGeom prst="ellipse">
-            <a:avLst/>
-          </a:prstGeom>
-          <a:solidFill>
-            <a:srgbClr val="FFFFFF"/>
-          </a:solidFill>
-          <a:ln w="25400">
-            <a:solidFill>
-              <a:srgbClr val="00A5FF"/>
-            </a:solidFill>
-          </a:ln>
-          <a:effectLst>
-            <a:glow rad="292100">
-              <a:srgbClr val="00A5FF">
-                <a:alpha val="45000"/>
-              </a:srgbClr>
-            </a:glow>
-          </a:effectLst>
-        </p:spPr>
-        <p:txBody>
-          <a:bodyPr rtlCol="0" anchor="ctr"/>
-          <a:lstStyle/>
-          <a:p>
-            <a:pPr algn="ctr"/>
-          </a:p>
-        </p:txBody>
-      </p:sp>
-      <p:sp>
-        <p:nvSpPr>
-          <p:cNvPr id="6" name="Episode"/>
+          <p:cNvPr id="5" name="Episode"/>
           <p:cNvSpPr>
             <a:spLocks noGrp="1"/>
           </p:cNvSpPr>
@@ -4434,7 +4244,7 @@
       </p:sp>
       <p:sp>
         <p:nvSpPr>
-          <p:cNvPr id="7" name="Kicker"/>
+          <p:cNvPr id="6" name="Kicker"/>
           <p:cNvSpPr>
             <a:spLocks noGrp="1"/>
           </p:cNvSpPr>
@@ -4488,7 +4298,7 @@
       </p:sp>
       <p:sp>
         <p:nvSpPr>
-          <p:cNvPr id="8" name="Title"/>
+          <p:cNvPr id="7" name="Title"/>
           <p:cNvSpPr>
             <a:spLocks noGrp="1"/>
           </p:cNvSpPr>
@@ -4542,7 +4352,7 @@
       </p:sp>
       <p:sp>
         <p:nvSpPr>
-          <p:cNvPr id="9" name="PhotoBefore"/>
+          <p:cNvPr id="8" name="PhotoBefore"/>
           <p:cNvSpPr>
             <a:spLocks noGrp="1"/>
           </p:cNvSpPr>
@@ -4598,7 +4408,7 @@
       </p:sp>
       <p:sp>
         <p:nvSpPr>
-          <p:cNvPr id="10" name="PhotoAfter"/>
+          <p:cNvPr id="9" name="PhotoAfter"/>
           <p:cNvSpPr>
             <a:spLocks noGrp="1"/>
           </p:cNvSpPr>
@@ -4654,7 +4464,7 @@
       </p:sp>
       <p:sp>
         <p:nvSpPr>
-          <p:cNvPr id="11" name="LabelBefore"/>
+          <p:cNvPr id="10" name="LabelBefore"/>
           <p:cNvSpPr>
             <a:spLocks noGrp="1"/>
           </p:cNvSpPr>
@@ -4708,7 +4518,7 @@
       </p:sp>
       <p:sp>
         <p:nvSpPr>
-          <p:cNvPr id="12" name="LabelAfter"/>
+          <p:cNvPr id="11" name="LabelAfter"/>
           <p:cNvSpPr>
             <a:spLocks noGrp="1"/>
           </p:cNvSpPr>
@@ -4883,45 +4693,7 @@
       </p:pic>
       <p:sp>
         <p:nvSpPr>
-          <p:cNvPr id="5" name="zone-ring"/>
-          <p:cNvSpPr/>
-          <p:nvPr/>
-        </p:nvSpPr>
-        <p:spPr>
-          <a:xfrm>
-            <a:off x="9931400" y="4597400"/>
-            <a:ext cx="1905000" cy="1905000"/>
-          </a:xfrm>
-          <a:prstGeom prst="ellipse">
-            <a:avLst/>
-          </a:prstGeom>
-          <a:solidFill>
-            <a:srgbClr val="FFFFFF"/>
-          </a:solidFill>
-          <a:ln w="25400">
-            <a:solidFill>
-              <a:srgbClr val="00A5FF"/>
-            </a:solidFill>
-          </a:ln>
-          <a:effectLst>
-            <a:glow rad="292100">
-              <a:srgbClr val="00A5FF">
-                <a:alpha val="45000"/>
-              </a:srgbClr>
-            </a:glow>
-          </a:effectLst>
-        </p:spPr>
-        <p:txBody>
-          <a:bodyPr rtlCol="0" anchor="ctr"/>
-          <a:lstStyle/>
-          <a:p>
-            <a:pPr algn="ctr"/>
-          </a:p>
-        </p:txBody>
-      </p:sp>
-      <p:sp>
-        <p:nvSpPr>
-          <p:cNvPr id="6" name="Episode"/>
+          <p:cNvPr id="5" name="Episode"/>
           <p:cNvSpPr>
             <a:spLocks noGrp="1"/>
           </p:cNvSpPr>
@@ -4975,7 +4747,7 @@
       </p:sp>
       <p:sp>
         <p:nvSpPr>
-          <p:cNvPr id="7" name="Kicker"/>
+          <p:cNvPr id="6" name="Kicker"/>
           <p:cNvSpPr>
             <a:spLocks noGrp="1"/>
           </p:cNvSpPr>
@@ -5029,7 +4801,7 @@
       </p:sp>
       <p:sp>
         <p:nvSpPr>
-          <p:cNvPr id="8" name="Title"/>
+          <p:cNvPr id="7" name="Title"/>
           <p:cNvSpPr>
             <a:spLocks noGrp="1"/>
           </p:cNvSpPr>
@@ -5083,7 +4855,7 @@
       </p:sp>
       <p:sp>
         <p:nvSpPr>
-          <p:cNvPr id="9" name="Photo"/>
+          <p:cNvPr id="8" name="Photo"/>
           <p:cNvSpPr>
             <a:spLocks noGrp="1"/>
           </p:cNvSpPr>
@@ -5260,45 +5032,7 @@
       </p:pic>
       <p:sp>
         <p:nvSpPr>
-          <p:cNvPr id="5" name="zone-ring"/>
-          <p:cNvSpPr/>
-          <p:nvPr/>
-        </p:nvSpPr>
-        <p:spPr>
-          <a:xfrm>
-            <a:off x="9931400" y="4597400"/>
-            <a:ext cx="1905000" cy="1905000"/>
-          </a:xfrm>
-          <a:prstGeom prst="ellipse">
-            <a:avLst/>
-          </a:prstGeom>
-          <a:solidFill>
-            <a:srgbClr val="FFFFFF"/>
-          </a:solidFill>
-          <a:ln w="25400">
-            <a:solidFill>
-              <a:srgbClr val="00A5FF"/>
-            </a:solidFill>
-          </a:ln>
-          <a:effectLst>
-            <a:glow rad="292100">
-              <a:srgbClr val="00A5FF">
-                <a:alpha val="45000"/>
-              </a:srgbClr>
-            </a:glow>
-          </a:effectLst>
-        </p:spPr>
-        <p:txBody>
-          <a:bodyPr rtlCol="0" anchor="ctr"/>
-          <a:lstStyle/>
-          <a:p>
-            <a:pPr algn="ctr"/>
-          </a:p>
-        </p:txBody>
-      </p:sp>
-      <p:sp>
-        <p:nvSpPr>
-          <p:cNvPr id="6" name="Episode"/>
+          <p:cNvPr id="5" name="Episode"/>
           <p:cNvSpPr>
             <a:spLocks noGrp="1"/>
           </p:cNvSpPr>
@@ -5352,7 +5086,7 @@
       </p:sp>
       <p:sp>
         <p:nvSpPr>
-          <p:cNvPr id="7" name="Kicker"/>
+          <p:cNvPr id="6" name="Kicker"/>
           <p:cNvSpPr>
             <a:spLocks noGrp="1"/>
           </p:cNvSpPr>
@@ -5406,7 +5140,7 @@
       </p:sp>
       <p:sp>
         <p:nvSpPr>
-          <p:cNvPr id="8" name="Title"/>
+          <p:cNvPr id="7" name="Title"/>
           <p:cNvSpPr>
             <a:spLocks noGrp="1"/>
           </p:cNvSpPr>
@@ -5460,7 +5194,7 @@
       </p:sp>
       <p:sp>
         <p:nvSpPr>
-          <p:cNvPr id="9" name="Story"/>
+          <p:cNvPr id="8" name="Story"/>
           <p:cNvSpPr>
             <a:spLocks noGrp="1"/>
           </p:cNvSpPr>
@@ -5635,45 +5369,7 @@
       </p:pic>
       <p:sp>
         <p:nvSpPr>
-          <p:cNvPr id="5" name="zone-ring"/>
-          <p:cNvSpPr/>
-          <p:nvPr/>
-        </p:nvSpPr>
-        <p:spPr>
-          <a:xfrm>
-            <a:off x="9931400" y="4597400"/>
-            <a:ext cx="1905000" cy="1905000"/>
-          </a:xfrm>
-          <a:prstGeom prst="ellipse">
-            <a:avLst/>
-          </a:prstGeom>
-          <a:solidFill>
-            <a:srgbClr val="232C31"/>
-          </a:solidFill>
-          <a:ln w="25400">
-            <a:solidFill>
-              <a:srgbClr val="00A5FF"/>
-            </a:solidFill>
-          </a:ln>
-          <a:effectLst>
-            <a:glow rad="381000">
-              <a:srgbClr val="00A5FF">
-                <a:alpha val="55000"/>
-              </a:srgbClr>
-            </a:glow>
-          </a:effectLst>
-        </p:spPr>
-        <p:txBody>
-          <a:bodyPr rtlCol="0" anchor="ctr"/>
-          <a:lstStyle/>
-          <a:p>
-            <a:pPr algn="ctr"/>
-          </a:p>
-        </p:txBody>
-      </p:sp>
-      <p:sp>
-        <p:nvSpPr>
-          <p:cNvPr id="6" name="Episode"/>
+          <p:cNvPr id="5" name="Episode"/>
           <p:cNvSpPr>
             <a:spLocks noGrp="1"/>
           </p:cNvSpPr>
@@ -5727,7 +5423,7 @@
       </p:sp>
       <p:sp>
         <p:nvSpPr>
-          <p:cNvPr id="7" name="Kicker"/>
+          <p:cNvPr id="6" name="Kicker"/>
           <p:cNvSpPr>
             <a:spLocks noGrp="1"/>
           </p:cNvSpPr>
@@ -5781,7 +5477,7 @@
       </p:sp>
       <p:sp>
         <p:nvSpPr>
-          <p:cNvPr id="8" name="Question"/>
+          <p:cNvPr id="7" name="Question"/>
           <p:cNvSpPr>
             <a:spLocks noGrp="1"/>
           </p:cNvSpPr>
@@ -6004,45 +5700,7 @@
       </p:pic>
       <p:sp>
         <p:nvSpPr>
-          <p:cNvPr id="6" name="zone-ring"/>
-          <p:cNvSpPr/>
-          <p:nvPr/>
-        </p:nvSpPr>
-        <p:spPr>
-          <a:xfrm>
-            <a:off x="9931400" y="4597400"/>
-            <a:ext cx="1905000" cy="1905000"/>
-          </a:xfrm>
-          <a:prstGeom prst="ellipse">
-            <a:avLst/>
-          </a:prstGeom>
-          <a:solidFill>
-            <a:srgbClr val="232C31"/>
-          </a:solidFill>
-          <a:ln w="25400">
-            <a:solidFill>
-              <a:srgbClr val="00A5FF"/>
-            </a:solidFill>
-          </a:ln>
-          <a:effectLst>
-            <a:glow rad="381000">
-              <a:srgbClr val="00A5FF">
-                <a:alpha val="55000"/>
-              </a:srgbClr>
-            </a:glow>
-          </a:effectLst>
-        </p:spPr>
-        <p:txBody>
-          <a:bodyPr rtlCol="0" anchor="ctr"/>
-          <a:lstStyle/>
-          <a:p>
-            <a:pPr algn="ctr"/>
-          </a:p>
-        </p:txBody>
-      </p:sp>
-      <p:sp>
-        <p:nvSpPr>
-          <p:cNvPr id="7" name="Episode"/>
+          <p:cNvPr id="6" name="Episode"/>
           <p:cNvSpPr>
             <a:spLocks noGrp="1"/>
           </p:cNvSpPr>
@@ -6096,7 +5754,7 @@
       </p:sp>
       <p:sp>
         <p:nvSpPr>
-          <p:cNvPr id="8" name="Number"/>
+          <p:cNvPr id="7" name="Number"/>
           <p:cNvSpPr>
             <a:spLocks noGrp="1"/>
           </p:cNvSpPr>
@@ -6160,7 +5818,7 @@
       </p:sp>
       <p:sp>
         <p:nvSpPr>
-          <p:cNvPr id="9" name="Kicker"/>
+          <p:cNvPr id="8" name="Kicker"/>
           <p:cNvSpPr>
             <a:spLocks noGrp="1"/>
           </p:cNvSpPr>
@@ -6214,7 +5872,7 @@
       </p:sp>
       <p:sp>
         <p:nvSpPr>
-          <p:cNvPr id="10" name="Title"/>
+          <p:cNvPr id="9" name="Title"/>
           <p:cNvSpPr>
             <a:spLocks noGrp="1"/>
           </p:cNvSpPr>
@@ -6271,7 +5929,7 @@
       </p:sp>
       <p:sp>
         <p:nvSpPr>
-          <p:cNvPr id="11" name="Line"/>
+          <p:cNvPr id="10" name="Line"/>
           <p:cNvSpPr>
             <a:spLocks noGrp="1"/>
           </p:cNvSpPr>
@@ -6446,45 +6104,7 @@
       </p:pic>
       <p:sp>
         <p:nvSpPr>
-          <p:cNvPr id="5" name="zone-ring"/>
-          <p:cNvSpPr/>
-          <p:nvPr/>
-        </p:nvSpPr>
-        <p:spPr>
-          <a:xfrm>
-            <a:off x="9931400" y="4597400"/>
-            <a:ext cx="1905000" cy="1905000"/>
-          </a:xfrm>
-          <a:prstGeom prst="ellipse">
-            <a:avLst/>
-          </a:prstGeom>
-          <a:solidFill>
-            <a:srgbClr val="232C31"/>
-          </a:solidFill>
-          <a:ln w="25400">
-            <a:solidFill>
-              <a:srgbClr val="00A5FF"/>
-            </a:solidFill>
-          </a:ln>
-          <a:effectLst>
-            <a:glow rad="381000">
-              <a:srgbClr val="00A5FF">
-                <a:alpha val="55000"/>
-              </a:srgbClr>
-            </a:glow>
-          </a:effectLst>
-        </p:spPr>
-        <p:txBody>
-          <a:bodyPr rtlCol="0" anchor="ctr"/>
-          <a:lstStyle/>
-          <a:p>
-            <a:pPr algn="ctr"/>
-          </a:p>
-        </p:txBody>
-      </p:sp>
-      <p:sp>
-        <p:nvSpPr>
-          <p:cNvPr id="6" name="truth-card"/>
+          <p:cNvPr id="5" name="truth-card"/>
           <p:cNvSpPr/>
           <p:nvPr/>
         </p:nvSpPr>
@@ -6515,7 +6135,7 @@
       </p:sp>
       <p:sp>
         <p:nvSpPr>
-          <p:cNvPr id="7" name="answer-card"/>
+          <p:cNvPr id="6" name="answer-card"/>
           <p:cNvSpPr/>
           <p:nvPr/>
         </p:nvSpPr>
@@ -6555,7 +6175,7 @@
       </p:sp>
       <p:sp>
         <p:nvSpPr>
-          <p:cNvPr id="8" name="Episode"/>
+          <p:cNvPr id="7" name="Episode"/>
           <p:cNvSpPr>
             <a:spLocks noGrp="1"/>
           </p:cNvSpPr>
@@ -6609,7 +6229,7 @@
       </p:sp>
       <p:sp>
         <p:nvSpPr>
-          <p:cNvPr id="9" name="Kicker"/>
+          <p:cNvPr id="8" name="Kicker"/>
           <p:cNvSpPr>
             <a:spLocks noGrp="1"/>
           </p:cNvSpPr>
@@ -6663,7 +6283,7 @@
       </p:sp>
       <p:sp>
         <p:nvSpPr>
-          <p:cNvPr id="10" name="Quote"/>
+          <p:cNvPr id="9" name="Quote"/>
           <p:cNvSpPr>
             <a:spLocks noGrp="1"/>
           </p:cNvSpPr>
@@ -6717,7 +6337,7 @@
       </p:sp>
       <p:sp>
         <p:nvSpPr>
-          <p:cNvPr id="11" name="TruthLabel"/>
+          <p:cNvPr id="10" name="TruthLabel"/>
           <p:cNvSpPr>
             <a:spLocks noGrp="1"/>
           </p:cNvSpPr>
@@ -6771,7 +6391,7 @@
       </p:sp>
       <p:sp>
         <p:nvSpPr>
-          <p:cNvPr id="12" name="TruthText"/>
+          <p:cNvPr id="11" name="TruthText"/>
           <p:cNvSpPr>
             <a:spLocks noGrp="1"/>
           </p:cNvSpPr>
@@ -6825,7 +6445,7 @@
       </p:sp>
       <p:sp>
         <p:nvSpPr>
-          <p:cNvPr id="13" name="AnswerLabel"/>
+          <p:cNvPr id="12" name="AnswerLabel"/>
           <p:cNvSpPr>
             <a:spLocks noGrp="1"/>
           </p:cNvSpPr>
@@ -6879,7 +6499,7 @@
       </p:sp>
       <p:sp>
         <p:nvSpPr>
-          <p:cNvPr id="14" name="AnswerText"/>
+          <p:cNvPr id="13" name="AnswerText"/>
           <p:cNvSpPr>
             <a:spLocks noGrp="1"/>
           </p:cNvSpPr>
@@ -7054,45 +6674,7 @@
       </p:pic>
       <p:sp>
         <p:nvSpPr>
-          <p:cNvPr id="5" name="zone-ring"/>
-          <p:cNvSpPr/>
-          <p:nvPr/>
-        </p:nvSpPr>
-        <p:spPr>
-          <a:xfrm>
-            <a:off x="9931400" y="4597400"/>
-            <a:ext cx="1905000" cy="1905000"/>
-          </a:xfrm>
-          <a:prstGeom prst="ellipse">
-            <a:avLst/>
-          </a:prstGeom>
-          <a:solidFill>
-            <a:srgbClr val="232C31"/>
-          </a:solidFill>
-          <a:ln w="25400">
-            <a:solidFill>
-              <a:srgbClr val="00A5FF"/>
-            </a:solidFill>
-          </a:ln>
-          <a:effectLst>
-            <a:glow rad="381000">
-              <a:srgbClr val="00A5FF">
-                <a:alpha val="55000"/>
-              </a:srgbClr>
-            </a:glow>
-          </a:effectLst>
-        </p:spPr>
-        <p:txBody>
-          <a:bodyPr rtlCol="0" anchor="ctr"/>
-          <a:lstStyle/>
-          <a:p>
-            <a:pPr algn="ctr"/>
-          </a:p>
-        </p:txBody>
-      </p:sp>
-      <p:sp>
-        <p:nvSpPr>
-          <p:cNvPr id="6" name="next-card"/>
+          <p:cNvPr id="5" name="next-card"/>
           <p:cNvSpPr/>
           <p:nvPr/>
         </p:nvSpPr>
@@ -7132,7 +6714,7 @@
       </p:sp>
       <p:sp>
         <p:nvSpPr>
-          <p:cNvPr id="7" name="Episode"/>
+          <p:cNvPr id="6" name="Episode"/>
           <p:cNvSpPr>
             <a:spLocks noGrp="1"/>
           </p:cNvSpPr>
@@ -7186,7 +6768,7 @@
       </p:sp>
       <p:sp>
         <p:nvSpPr>
-          <p:cNvPr id="8" name="Kicker"/>
+          <p:cNvPr id="7" name="Kicker"/>
           <p:cNvSpPr>
             <a:spLocks noGrp="1"/>
           </p:cNvSpPr>
@@ -7240,7 +6822,7 @@
       </p:sp>
       <p:sp>
         <p:nvSpPr>
-          <p:cNvPr id="9" name="Title"/>
+          <p:cNvPr id="8" name="Title"/>
           <p:cNvSpPr>
             <a:spLocks noGrp="1"/>
           </p:cNvSpPr>
@@ -7294,7 +6876,7 @@
       </p:sp>
       <p:sp>
         <p:nvSpPr>
-          <p:cNvPr id="10" name="NextLabel"/>
+          <p:cNvPr id="9" name="NextLabel"/>
           <p:cNvSpPr>
             <a:spLocks noGrp="1"/>
           </p:cNvSpPr>
@@ -7348,7 +6930,7 @@
       </p:sp>
       <p:sp>
         <p:nvSpPr>
-          <p:cNvPr id="11" name="NextTitle"/>
+          <p:cNvPr id="10" name="NextTitle"/>
           <p:cNvSpPr>
             <a:spLocks noGrp="1"/>
           </p:cNvSpPr>
@@ -7402,7 +6984,7 @@
       </p:sp>
       <p:sp>
         <p:nvSpPr>
-          <p:cNvPr id="12" name="NextText"/>
+          <p:cNvPr id="11" name="NextText"/>
           <p:cNvSpPr>
             <a:spLocks noGrp="1"/>
           </p:cNvSpPr>
@@ -7577,45 +7159,7 @@
       </p:pic>
       <p:sp>
         <p:nvSpPr>
-          <p:cNvPr id="5" name="zone-ring"/>
-          <p:cNvSpPr/>
-          <p:nvPr/>
-        </p:nvSpPr>
-        <p:spPr>
-          <a:xfrm>
-            <a:off x="9931400" y="4597400"/>
-            <a:ext cx="1905000" cy="1905000"/>
-          </a:xfrm>
-          <a:prstGeom prst="ellipse">
-            <a:avLst/>
-          </a:prstGeom>
-          <a:solidFill>
-            <a:srgbClr val="FFFFFF"/>
-          </a:solidFill>
-          <a:ln w="25400">
-            <a:solidFill>
-              <a:srgbClr val="00A5FF"/>
-            </a:solidFill>
-          </a:ln>
-          <a:effectLst>
-            <a:glow rad="292100">
-              <a:srgbClr val="00A5FF">
-                <a:alpha val="45000"/>
-              </a:srgbClr>
-            </a:glow>
-          </a:effectLst>
-        </p:spPr>
-        <p:txBody>
-          <a:bodyPr rtlCol="0" anchor="ctr"/>
-          <a:lstStyle/>
-          <a:p>
-            <a:pPr algn="ctr"/>
-          </a:p>
-        </p:txBody>
-      </p:sp>
-      <p:sp>
-        <p:nvSpPr>
-          <p:cNvPr id="6" name="Episode"/>
+          <p:cNvPr id="5" name="Episode"/>
           <p:cNvSpPr>
             <a:spLocks noGrp="1"/>
           </p:cNvSpPr>
@@ -7669,7 +7213,7 @@
       </p:sp>
       <p:sp>
         <p:nvSpPr>
-          <p:cNvPr id="7" name="Kicker"/>
+          <p:cNvPr id="6" name="Kicker"/>
           <p:cNvSpPr>
             <a:spLocks noGrp="1"/>
           </p:cNvSpPr>
@@ -7723,7 +7267,7 @@
       </p:sp>
       <p:sp>
         <p:nvSpPr>
-          <p:cNvPr id="8" name="Title"/>
+          <p:cNvPr id="7" name="Title"/>
           <p:cNvSpPr>
             <a:spLocks noGrp="1"/>
           </p:cNvSpPr>
@@ -7777,7 +7321,7 @@
       </p:sp>
       <p:sp>
         <p:nvSpPr>
-          <p:cNvPr id="9" name="Points"/>
+          <p:cNvPr id="8" name="Points"/>
           <p:cNvSpPr>
             <a:spLocks noGrp="1"/>
           </p:cNvSpPr>
@@ -7979,45 +7523,7 @@
       </p:pic>
       <p:sp>
         <p:nvSpPr>
-          <p:cNvPr id="5" name="zone-ring"/>
-          <p:cNvSpPr/>
-          <p:nvPr/>
-        </p:nvSpPr>
-        <p:spPr>
-          <a:xfrm>
-            <a:off x="9931400" y="4597400"/>
-            <a:ext cx="1905000" cy="1905000"/>
-          </a:xfrm>
-          <a:prstGeom prst="ellipse">
-            <a:avLst/>
-          </a:prstGeom>
-          <a:solidFill>
-            <a:srgbClr val="FFFFFF"/>
-          </a:solidFill>
-          <a:ln w="25400">
-            <a:solidFill>
-              <a:srgbClr val="00A5FF"/>
-            </a:solidFill>
-          </a:ln>
-          <a:effectLst>
-            <a:glow rad="292100">
-              <a:srgbClr val="00A5FF">
-                <a:alpha val="45000"/>
-              </a:srgbClr>
-            </a:glow>
-          </a:effectLst>
-        </p:spPr>
-        <p:txBody>
-          <a:bodyPr rtlCol="0" anchor="ctr"/>
-          <a:lstStyle/>
-          <a:p>
-            <a:pPr algn="ctr"/>
-          </a:p>
-        </p:txBody>
-      </p:sp>
-      <p:sp>
-        <p:nvSpPr>
-          <p:cNvPr id="6" name="Episode"/>
+          <p:cNvPr id="5" name="Episode"/>
           <p:cNvSpPr>
             <a:spLocks noGrp="1"/>
           </p:cNvSpPr>
@@ -8071,7 +7577,7 @@
       </p:sp>
       <p:sp>
         <p:nvSpPr>
-          <p:cNvPr id="7" name="Kicker"/>
+          <p:cNvPr id="6" name="Kicker"/>
           <p:cNvSpPr>
             <a:spLocks noGrp="1"/>
           </p:cNvSpPr>
@@ -8125,7 +7631,7 @@
       </p:sp>
       <p:sp>
         <p:nvSpPr>
-          <p:cNvPr id="8" name="Title"/>
+          <p:cNvPr id="7" name="Title"/>
           <p:cNvSpPr>
             <a:spLocks noGrp="1"/>
           </p:cNvSpPr>
@@ -8179,7 +7685,7 @@
       </p:sp>
       <p:sp>
         <p:nvSpPr>
-          <p:cNvPr id="9" name="Points"/>
+          <p:cNvPr id="8" name="Points"/>
           <p:cNvSpPr>
             <a:spLocks noGrp="1"/>
           </p:cNvSpPr>
@@ -8260,7 +7766,7 @@
       </p:sp>
       <p:sp>
         <p:nvSpPr>
-          <p:cNvPr id="10" name="Photo"/>
+          <p:cNvPr id="9" name="Photo"/>
           <p:cNvSpPr>
             <a:spLocks noGrp="1"/>
           </p:cNvSpPr>
@@ -8316,7 +7822,7 @@
       </p:sp>
       <p:sp>
         <p:nvSpPr>
-          <p:cNvPr id="11" name="Caption"/>
+          <p:cNvPr id="10" name="Caption"/>
           <p:cNvSpPr>
             <a:spLocks noGrp="1"/>
           </p:cNvSpPr>
@@ -8491,45 +7997,7 @@
       </p:pic>
       <p:sp>
         <p:nvSpPr>
-          <p:cNvPr id="5" name="zone-ring"/>
-          <p:cNvSpPr/>
-          <p:nvPr/>
-        </p:nvSpPr>
-        <p:spPr>
-          <a:xfrm>
-            <a:off x="9931400" y="4597400"/>
-            <a:ext cx="1905000" cy="1905000"/>
-          </a:xfrm>
-          <a:prstGeom prst="ellipse">
-            <a:avLst/>
-          </a:prstGeom>
-          <a:solidFill>
-            <a:srgbClr val="FFFFFF"/>
-          </a:solidFill>
-          <a:ln w="25400">
-            <a:solidFill>
-              <a:srgbClr val="00A5FF"/>
-            </a:solidFill>
-          </a:ln>
-          <a:effectLst>
-            <a:glow rad="292100">
-              <a:srgbClr val="00A5FF">
-                <a:alpha val="45000"/>
-              </a:srgbClr>
-            </a:glow>
-          </a:effectLst>
-        </p:spPr>
-        <p:txBody>
-          <a:bodyPr rtlCol="0" anchor="ctr"/>
-          <a:lstStyle/>
-          <a:p>
-            <a:pPr algn="ctr"/>
-          </a:p>
-        </p:txBody>
-      </p:sp>
-      <p:sp>
-        <p:nvSpPr>
-          <p:cNvPr id="6" name="Episode"/>
+          <p:cNvPr id="5" name="Episode"/>
           <p:cNvSpPr>
             <a:spLocks noGrp="1"/>
           </p:cNvSpPr>
@@ -8583,7 +8051,7 @@
       </p:sp>
       <p:sp>
         <p:nvSpPr>
-          <p:cNvPr id="7" name="Kicker"/>
+          <p:cNvPr id="6" name="Kicker"/>
           <p:cNvSpPr>
             <a:spLocks noGrp="1"/>
           </p:cNvSpPr>
@@ -8637,7 +8105,7 @@
       </p:sp>
       <p:sp>
         <p:nvSpPr>
-          <p:cNvPr id="8" name="Title"/>
+          <p:cNvPr id="7" name="Title"/>
           <p:cNvSpPr>
             <a:spLocks noGrp="1"/>
           </p:cNvSpPr>
@@ -8691,7 +8159,7 @@
       </p:sp>
       <p:sp>
         <p:nvSpPr>
-          <p:cNvPr id="9" name="Points"/>
+          <p:cNvPr id="8" name="Points"/>
           <p:cNvSpPr>
             <a:spLocks noGrp="1"/>
           </p:cNvSpPr>
@@ -8893,45 +8361,7 @@
       </p:pic>
       <p:sp>
         <p:nvSpPr>
-          <p:cNvPr id="5" name="zone-ring"/>
-          <p:cNvSpPr/>
-          <p:nvPr/>
-        </p:nvSpPr>
-        <p:spPr>
-          <a:xfrm>
-            <a:off x="9931400" y="4597400"/>
-            <a:ext cx="1905000" cy="1905000"/>
-          </a:xfrm>
-          <a:prstGeom prst="ellipse">
-            <a:avLst/>
-          </a:prstGeom>
-          <a:solidFill>
-            <a:srgbClr val="FFFFFF"/>
-          </a:solidFill>
-          <a:ln w="25400">
-            <a:solidFill>
-              <a:srgbClr val="00A5FF"/>
-            </a:solidFill>
-          </a:ln>
-          <a:effectLst>
-            <a:glow rad="292100">
-              <a:srgbClr val="00A5FF">
-                <a:alpha val="45000"/>
-              </a:srgbClr>
-            </a:glow>
-          </a:effectLst>
-        </p:spPr>
-        <p:txBody>
-          <a:bodyPr rtlCol="0" anchor="ctr"/>
-          <a:lstStyle/>
-          <a:p>
-            <a:pPr algn="ctr"/>
-          </a:p>
-        </p:txBody>
-      </p:sp>
-      <p:sp>
-        <p:nvSpPr>
-          <p:cNvPr id="6" name="Episode"/>
+          <p:cNvPr id="5" name="Episode"/>
           <p:cNvSpPr>
             <a:spLocks noGrp="1"/>
           </p:cNvSpPr>
@@ -8985,7 +8415,7 @@
       </p:sp>
       <p:sp>
         <p:nvSpPr>
-          <p:cNvPr id="7" name="Kicker"/>
+          <p:cNvPr id="6" name="Kicker"/>
           <p:cNvSpPr>
             <a:spLocks noGrp="1"/>
           </p:cNvSpPr>
@@ -9039,7 +8469,7 @@
       </p:sp>
       <p:sp>
         <p:nvSpPr>
-          <p:cNvPr id="8" name="Big"/>
+          <p:cNvPr id="7" name="Big"/>
           <p:cNvSpPr>
             <a:spLocks noGrp="1"/>
           </p:cNvSpPr>
@@ -9096,7 +8526,7 @@
       </p:sp>
       <p:sp>
         <p:nvSpPr>
-          <p:cNvPr id="9" name="Statement"/>
+          <p:cNvPr id="8" name="Statement"/>
           <p:cNvSpPr>
             <a:spLocks noGrp="1"/>
           </p:cNvSpPr>
@@ -9150,7 +8580,7 @@
       </p:sp>
       <p:sp>
         <p:nvSpPr>
-          <p:cNvPr id="10" name="Text"/>
+          <p:cNvPr id="9" name="Text"/>
           <p:cNvSpPr>
             <a:spLocks noGrp="1"/>
           </p:cNvSpPr>
@@ -9325,45 +8755,7 @@
       </p:pic>
       <p:sp>
         <p:nvSpPr>
-          <p:cNvPr id="5" name="zone-ring"/>
-          <p:cNvSpPr/>
-          <p:nvPr/>
-        </p:nvSpPr>
-        <p:spPr>
-          <a:xfrm>
-            <a:off x="9931400" y="4597400"/>
-            <a:ext cx="1905000" cy="1905000"/>
-          </a:xfrm>
-          <a:prstGeom prst="ellipse">
-            <a:avLst/>
-          </a:prstGeom>
-          <a:solidFill>
-            <a:srgbClr val="FFFFFF"/>
-          </a:solidFill>
-          <a:ln w="25400">
-            <a:solidFill>
-              <a:srgbClr val="00A5FF"/>
-            </a:solidFill>
-          </a:ln>
-          <a:effectLst>
-            <a:glow rad="292100">
-              <a:srgbClr val="00A5FF">
-                <a:alpha val="45000"/>
-              </a:srgbClr>
-            </a:glow>
-          </a:effectLst>
-        </p:spPr>
-        <p:txBody>
-          <a:bodyPr rtlCol="0" anchor="ctr"/>
-          <a:lstStyle/>
-          <a:p>
-            <a:pPr algn="ctr"/>
-          </a:p>
-        </p:txBody>
-      </p:sp>
-      <p:sp>
-        <p:nvSpPr>
-          <p:cNvPr id="6" name="Episode"/>
+          <p:cNvPr id="5" name="Episode"/>
           <p:cNvSpPr>
             <a:spLocks noGrp="1"/>
           </p:cNvSpPr>
@@ -9417,7 +8809,7 @@
       </p:sp>
       <p:sp>
         <p:nvSpPr>
-          <p:cNvPr id="7" name="Kicker"/>
+          <p:cNvPr id="6" name="Kicker"/>
           <p:cNvSpPr>
             <a:spLocks noGrp="1"/>
           </p:cNvSpPr>
@@ -9471,7 +8863,7 @@
       </p:sp>
       <p:sp>
         <p:nvSpPr>
-          <p:cNvPr id="8" name="Title"/>
+          <p:cNvPr id="7" name="Title"/>
           <p:cNvSpPr>
             <a:spLocks noGrp="1"/>
           </p:cNvSpPr>
@@ -15208,45 +14600,7 @@
       </p:sp>
       <p:sp>
         <p:nvSpPr>
-          <p:cNvPr id="11" name="zone-ring-top"/>
-          <p:cNvSpPr/>
-          <p:nvPr/>
-        </p:nvSpPr>
-        <p:spPr>
-          <a:xfrm>
-            <a:off x="9931400" y="4597400"/>
-            <a:ext cx="1905000" cy="1905000"/>
-          </a:xfrm>
-          <a:prstGeom prst="ellipse">
-            <a:avLst/>
-          </a:prstGeom>
-          <a:solidFill>
-            <a:srgbClr val="232C31"/>
-          </a:solidFill>
-          <a:ln w="25400">
-            <a:solidFill>
-              <a:srgbClr val="00A5FF"/>
-            </a:solidFill>
-          </a:ln>
-          <a:effectLst>
-            <a:glow rad="381000">
-              <a:srgbClr val="00A5FF">
-                <a:alpha val="55000"/>
-              </a:srgbClr>
-            </a:glow>
-          </a:effectLst>
-        </p:spPr>
-        <p:txBody>
-          <a:bodyPr rtlCol="0" anchor="ctr"/>
-          <a:lstStyle/>
-          <a:p>
-            <a:pPr algn="ctr"/>
-          </a:p>
-        </p:txBody>
-      </p:sp>
-      <p:sp>
-        <p:nvSpPr>
-          <p:cNvPr id="12" name="rail-line"/>
+          <p:cNvPr id="11" name="rail-line"/>
           <p:cNvSpPr/>
           <p:nvPr/>
         </p:nvSpPr>
@@ -15275,7 +14629,7 @@
       </p:sp>
       <p:sp>
         <p:nvSpPr>
-          <p:cNvPr id="13" name="rail-dot-1"/>
+          <p:cNvPr id="12" name="rail-dot-1"/>
           <p:cNvSpPr/>
           <p:nvPr/>
         </p:nvSpPr>
@@ -15306,7 +14660,7 @@
       </p:sp>
       <p:sp>
         <p:nvSpPr>
-          <p:cNvPr id="14" name="rail-num-1"/>
+          <p:cNvPr id="13" name="rail-num-1"/>
           <p:cNvSpPr txBox="1"/>
           <p:nvPr/>
         </p:nvSpPr>
@@ -15341,7 +14695,7 @@
       </p:sp>
       <p:sp>
         <p:nvSpPr>
-          <p:cNvPr id="15" name="rail-dot-2"/>
+          <p:cNvPr id="14" name="rail-dot-2"/>
           <p:cNvSpPr/>
           <p:nvPr/>
         </p:nvSpPr>
@@ -15372,7 +14726,7 @@
       </p:sp>
       <p:sp>
         <p:nvSpPr>
-          <p:cNvPr id="16" name="rail-num-2"/>
+          <p:cNvPr id="15" name="rail-num-2"/>
           <p:cNvSpPr txBox="1"/>
           <p:nvPr/>
         </p:nvSpPr>
@@ -15407,7 +14761,7 @@
       </p:sp>
       <p:sp>
         <p:nvSpPr>
-          <p:cNvPr id="17" name="rail-dot-3"/>
+          <p:cNvPr id="16" name="rail-dot-3"/>
           <p:cNvSpPr/>
           <p:nvPr/>
         </p:nvSpPr>
@@ -15438,7 +14792,7 @@
       </p:sp>
       <p:sp>
         <p:nvSpPr>
-          <p:cNvPr id="18" name="rail-num-3"/>
+          <p:cNvPr id="17" name="rail-num-3"/>
           <p:cNvSpPr txBox="1"/>
           <p:nvPr/>
         </p:nvSpPr>
@@ -15473,7 +14827,7 @@
       </p:sp>
       <p:sp>
         <p:nvSpPr>
-          <p:cNvPr id="19" name="rail-dot-4"/>
+          <p:cNvPr id="18" name="rail-dot-4"/>
           <p:cNvSpPr/>
           <p:nvPr/>
         </p:nvSpPr>
@@ -15504,7 +14858,7 @@
       </p:sp>
       <p:sp>
         <p:nvSpPr>
-          <p:cNvPr id="20" name="rail-num-4"/>
+          <p:cNvPr id="19" name="rail-num-4"/>
           <p:cNvSpPr txBox="1"/>
           <p:nvPr/>
         </p:nvSpPr>
@@ -15539,7 +14893,7 @@
       </p:sp>
       <p:sp>
         <p:nvSpPr>
-          <p:cNvPr id="21" name="rail-dot-5"/>
+          <p:cNvPr id="20" name="rail-dot-5"/>
           <p:cNvSpPr/>
           <p:nvPr/>
         </p:nvSpPr>
@@ -15570,7 +14924,7 @@
       </p:sp>
       <p:sp>
         <p:nvSpPr>
-          <p:cNvPr id="22" name="rail-num-5"/>
+          <p:cNvPr id="21" name="rail-num-5"/>
           <p:cNvSpPr txBox="1"/>
           <p:nvPr/>
         </p:nvSpPr>

--- a/skill/flaesh-campus/assets/template/flaesh-campus-template.pptx
+++ b/skill/flaesh-campus/assets/template/flaesh-campus-template.pptx
@@ -24,6 +24,7 @@
     <p:sldId id="272" r:id="rId24"/>
     <p:sldId id="273" r:id="rId25"/>
     <p:sldId id="274" r:id="rId26"/>
+    <p:sldId id="275" r:id="rId27"/>
   </p:sldIdLst>
   <p:sldSz cx="12192000" cy="6858000" type="screen4x3"/>
   <p:notesSz cx="6858000" cy="9144000"/>
@@ -660,7 +661,7 @@
           <a:lstStyle/>
           <a:p>
             <a:r>
-              <a:t>11 Compare (compare). Two columns, 1–4 items each, rows aligned. Style myth_fact (fact side highlighted) or do_dont (do side highlighted).</a:t>
+              <a:t>10 Steps with photos (steps + photo). 2–4 photos (16:9) in a row, step number on the photo, title below (max. two lines), optional caption. 'start' continues the numbering across slides.</a:t>
             </a:r>
           </a:p>
         </p:txBody>
@@ -730,7 +731,7 @@
           <a:lstStyle/>
           <a:p>
             <a:r>
-              <a:t>12 Scale (scale). A scale of 2–16 chips (e.g. shade guide, optional highlight) or a timeline of 2–6 points, optional caption, 1–2 points below.</a:t>
+              <a:t>11 Compare (compare). Two columns, 1–4 items each, rows aligned. Style myth_fact (fact side highlighted) or do_dont (do side highlighted).</a:t>
             </a:r>
           </a:p>
         </p:txBody>
@@ -800,7 +801,7 @@
           <a:lstStyle/>
           <a:p>
             <a:r>
-              <a:t>13 Summary (summary). Up to 5 items with check mark, title and text (two columns).</a:t>
+              <a:t>12 Scale (scale). A scale of 2–16 chips (e.g. shade guide, optional highlight) or a timeline of 2–6 points, optional caption, 1–2 points below.</a:t>
             </a:r>
           </a:p>
         </p:txBody>
@@ -870,7 +871,7 @@
           <a:lstStyle/>
           <a:p>
             <a:r>
-              <a:t>14 Photo (photo). Full-bleed photo right of the rail, kicker, title and caption in a dark band. The video circle stays on top.</a:t>
+              <a:t>13 Summary (summary). Up to 5 items with check mark, title and text (two columns).</a:t>
             </a:r>
           </a:p>
         </p:txBody>
@@ -940,7 +941,7 @@
           <a:lstStyle/>
           <a:p>
             <a:r>
-              <a:t>15 Before / After (before_after). Two photos (3:2) with labels, e.g. the shade value.</a:t>
+              <a:t>14 Photo (photo). Full-bleed photo right of the rail, kicker, title and caption in a dark band. The video circle stays on top.</a:t>
             </a:r>
           </a:p>
         </p:txBody>
@@ -1010,7 +1011,7 @@
           <a:lstStyle/>
           <a:p>
             <a:r>
-              <a:t>16 Photo Annotated (photo_annotated). Photo with up to 5 numbered markers (x/y from 0 to 1) and a legend on the right.</a:t>
+              <a:t>15 Before / After (before_after). Two photos (3:2) with labels, e.g. the shade value.</a:t>
             </a:r>
           </a:p>
         </p:txBody>
@@ -1080,7 +1081,7 @@
           <a:lstStyle/>
           <a:p>
             <a:r>
-              <a:t>17 Case (case). Case story (up to three lines) and up to 5 findings, each with its cause in one line.</a:t>
+              <a:t>16 Photo Annotated (photo_annotated). Photo with up to 5 numbered markers (x/y from 0 to 1) and a legend on the right.</a:t>
             </a:r>
           </a:p>
         </p:txBody>
@@ -1150,7 +1151,7 @@
           <a:lstStyle/>
           <a:p>
             <a:r>
-              <a:t>18 Quiz (quiz). Question with three answers; the build adds the answer slide with the highlighted option and the explanation.</a:t>
+              <a:t>17 Case (case). Case story (up to three lines) and up to 5 findings, each with its cause in one line.</a:t>
             </a:r>
           </a:p>
         </p:txBody>
@@ -1220,7 +1221,7 @@
           <a:lstStyle/>
           <a:p>
             <a:r>
-              <a:t>The barrier covered the cervical enamel — the gel never touched it. Re-isolate correctly, then apply fresh 1 mm gel.</a:t>
+              <a:t>18 Quiz (quiz). Question with three answers; the build adds the answer slide with the highlighted option and the explanation.</a:t>
             </a:r>
           </a:p>
         </p:txBody>
@@ -1291,6 +1292,76 @@
           <a:p>
             <a:r>
               <a:t>02 Chapter (chapter). Big chapter number, chapter name from the episode, one sentence. Long names wrap to two lines; the sentence moves down.</a:t>
+            </a:r>
+          </a:p>
+        </p:txBody>
+      </p:sp>
+      <p:sp>
+        <p:nvSpPr>
+          <p:cNvPr id="4" name="Slide Number Placeholder 3"/>
+          <p:cNvSpPr>
+            <a:spLocks noGrp="1"/>
+          </p:cNvSpPr>
+          <p:nvPr>
+            <p:ph type="sldNum" idx="5" sz="quarter"/>
+          </p:nvPr>
+        </p:nvSpPr>
+        <p:spPr/>
+      </p:sp>
+    </p:spTree>
+  </p:cSld>
+  <p:clrMapOvr>
+    <a:masterClrMapping/>
+  </p:clrMapOvr>
+</p:notes>
+</file>
+
+<file path=ppt/notesSlides/notesSlide20.xml><?xml version="1.0" encoding="utf-8"?>
+<p:notes xmlns:a="http://schemas.openxmlformats.org/drawingml/2006/main" xmlns:p="http://schemas.openxmlformats.org/presentationml/2006/main" xmlns:r="http://schemas.openxmlformats.org/officeDocument/2006/relationships">
+  <p:cSld>
+    <p:spTree>
+      <p:nvGrpSpPr>
+        <p:cNvPr id="1" name=""/>
+        <p:cNvGrpSpPr/>
+        <p:nvPr/>
+      </p:nvGrpSpPr>
+      <p:grpSpPr>
+        <a:xfrm>
+          <a:off x="0" y="0"/>
+          <a:ext cx="0" cy="0"/>
+          <a:chOff x="0" y="0"/>
+          <a:chExt cx="0" cy="0"/>
+        </a:xfrm>
+      </p:grpSpPr>
+      <p:sp>
+        <p:nvSpPr>
+          <p:cNvPr id="2" name="Slide Image Placeholder 1"/>
+          <p:cNvSpPr>
+            <a:spLocks noGrp="1"/>
+          </p:cNvSpPr>
+          <p:nvPr>
+            <p:ph type="sldImg" idx="2"/>
+          </p:nvPr>
+        </p:nvSpPr>
+        <p:spPr/>
+      </p:sp>
+      <p:sp>
+        <p:nvSpPr>
+          <p:cNvPr id="3" name="Notes Placeholder 2"/>
+          <p:cNvSpPr>
+            <a:spLocks noGrp="1"/>
+          </p:cNvSpPr>
+          <p:nvPr>
+            <p:ph type="body" idx="3" sz="quarter"/>
+          </p:nvPr>
+        </p:nvSpPr>
+        <p:spPr/>
+        <p:txBody>
+          <a:bodyPr/>
+          <a:lstStyle/>
+          <a:p>
+            <a:r>
+              <a:t>The barrier covered the cervical enamel — the gel never touched it. Re-isolate correctly, then apply fresh 1 mm gel.</a:t>
             </a:r>
           </a:p>
         </p:txBody>
@@ -9449,6 +9520,7 @@
         </p:blipFill>
         <p:spPr>
           <a:prstGeom prst="ellipse"/>
+          <a:noFill/>
           <a:ln w="38100">
             <a:solidFill>
               <a:srgbClr val="00A5FF"/>
@@ -10387,6 +10459,816 @@
 </file>
 
 <file path=ppt/slides/slide11.xml><?xml version="1.0" encoding="utf-8"?>
+<p:sld xmlns:a="http://schemas.openxmlformats.org/drawingml/2006/main" xmlns:p="http://schemas.openxmlformats.org/presentationml/2006/main" xmlns:r="http://schemas.openxmlformats.org/officeDocument/2006/relationships">
+  <p:cSld>
+    <p:spTree>
+      <p:nvGrpSpPr>
+        <p:cNvPr id="1" name=""/>
+        <p:cNvGrpSpPr/>
+        <p:nvPr/>
+      </p:nvGrpSpPr>
+      <p:grpSpPr/>
+      <p:sp>
+        <p:nvSpPr>
+          <p:cNvPr id="2" name="Text Placeholder 1"/>
+          <p:cNvSpPr>
+            <a:spLocks noGrp="1"/>
+          </p:cNvSpPr>
+          <p:nvPr>
+            <p:ph type="body" idx="10"/>
+          </p:nvPr>
+        </p:nvSpPr>
+        <p:spPr/>
+        <p:txBody>
+          <a:bodyPr/>
+          <a:lstStyle/>
+          <a:p>
+            <a:r>
+              <a:t>02</a:t>
+            </a:r>
+          </a:p>
+        </p:txBody>
+      </p:sp>
+      <p:sp>
+        <p:nvSpPr>
+          <p:cNvPr id="3" name="Text Placeholder 2"/>
+          <p:cNvSpPr>
+            <a:spLocks noGrp="1"/>
+          </p:cNvSpPr>
+          <p:nvPr>
+            <p:ph type="body" idx="11"/>
+          </p:nvPr>
+        </p:nvSpPr>
+        <p:spPr/>
+        <p:txBody>
+          <a:bodyPr/>
+          <a:lstStyle/>
+          <a:p>
+            <a:r>
+              <a:t>Layout 10 · steps with photos</a:t>
+            </a:r>
+          </a:p>
+        </p:txBody>
+      </p:sp>
+      <p:sp>
+        <p:nvSpPr>
+          <p:cNvPr id="4" name="Title 3"/>
+          <p:cNvSpPr>
+            <a:spLocks noGrp="1"/>
+          </p:cNvSpPr>
+          <p:nvPr>
+            <p:ph type="title"/>
+          </p:nvPr>
+        </p:nvSpPr>
+        <p:spPr/>
+        <p:txBody>
+          <a:bodyPr/>
+          <a:lstStyle/>
+          <a:p>
+            <a:r>
+              <a:t>Apply &amp; Activate</a:t>
+            </a:r>
+          </a:p>
+        </p:txBody>
+      </p:sp>
+      <p:pic>
+        <p:nvPicPr>
+          <p:cNvPr id="5" name="step-photo-1" descr="06-apply-gel.jpg"/>
+          <p:cNvPicPr>
+            <a:picLocks noChangeAspect="1"/>
+          </p:cNvPicPr>
+          <p:nvPr/>
+        </p:nvPicPr>
+        <p:blipFill>
+          <a:blip r:embed="rId2"/>
+          <a:srcRect/>
+          <a:stretch>
+            <a:fillRect/>
+          </a:stretch>
+        </p:blipFill>
+        <p:spPr>
+          <a:xfrm>
+            <a:off x="1524000" y="1905000"/>
+            <a:ext cx="3200400" cy="1800225"/>
+          </a:xfrm>
+          <a:prstGeom prst="rect">
+            <a:avLst/>
+          </a:prstGeom>
+        </p:spPr>
+      </p:pic>
+      <p:sp>
+        <p:nvSpPr>
+          <p:cNvPr id="6" name="step-num-1"/>
+          <p:cNvSpPr/>
+          <p:nvPr/>
+        </p:nvSpPr>
+        <p:spPr>
+          <a:xfrm>
+            <a:off x="1625600" y="2006600"/>
+            <a:ext cx="304800" cy="304800"/>
+          </a:xfrm>
+          <a:prstGeom prst="ellipse">
+            <a:avLst/>
+          </a:prstGeom>
+          <a:solidFill>
+            <a:srgbClr val="00A5FF"/>
+          </a:solidFill>
+          <a:ln>
+            <a:noFill/>
+          </a:ln>
+        </p:spPr>
+        <p:txBody>
+          <a:bodyPr rtlCol="0" anchor="ctr" wrap="square" lIns="0" rIns="0" tIns="0" bIns="0">
+            <a:noAutofit/>
+          </a:bodyPr>
+          <a:lstStyle/>
+          <a:p>
+            <a:pPr algn="ctr"/>
+            <a:r>
+              <a:rPr sz="1600" b="0" i="0">
+                <a:solidFill>
+                  <a:srgbClr val="FFFFFF"/>
+                </a:solidFill>
+                <a:latin typeface="Corporate S"/>
+              </a:rPr>
+              <a:t>6</a:t>
+            </a:r>
+          </a:p>
+        </p:txBody>
+      </p:sp>
+      <p:sp>
+        <p:nvSpPr>
+          <p:cNvPr id="7" name="step-title-1"/>
+          <p:cNvSpPr txBox="1"/>
+          <p:nvPr/>
+        </p:nvSpPr>
+        <p:spPr>
+          <a:xfrm>
+            <a:off x="1524000" y="3806825"/>
+            <a:ext cx="3200400" cy="635000"/>
+          </a:xfrm>
+          <a:prstGeom prst="rect">
+            <a:avLst/>
+          </a:prstGeom>
+          <a:noFill/>
+        </p:spPr>
+        <p:txBody>
+          <a:bodyPr wrap="square" lIns="0" rIns="0" tIns="0" bIns="0" anchor="t">
+            <a:noAutofit/>
+          </a:bodyPr>
+          <a:lstStyle/>
+          <a:p>
+            <a:pPr algn="l"/>
+            <a:r>
+              <a:rPr sz="2100" b="0" i="0">
+                <a:solidFill>
+                  <a:srgbClr val="5D6C73"/>
+                </a:solidFill>
+                <a:latin typeface="Corporate S"/>
+              </a:rPr>
+              <a:t>Apply the gel, 1 mm thick</a:t>
+            </a:r>
+          </a:p>
+        </p:txBody>
+      </p:sp>
+      <p:pic>
+        <p:nvPicPr>
+          <p:cNvPr id="8" name="step-photo-2" descr="07-adjust-lamp.jpg"/>
+          <p:cNvPicPr>
+            <a:picLocks noChangeAspect="1"/>
+          </p:cNvPicPr>
+          <p:nvPr/>
+        </p:nvPicPr>
+        <p:blipFill>
+          <a:blip r:embed="rId3"/>
+          <a:srcRect/>
+          <a:stretch>
+            <a:fillRect/>
+          </a:stretch>
+        </p:blipFill>
+        <p:spPr>
+          <a:xfrm>
+            <a:off x="4876800" y="1905000"/>
+            <a:ext cx="3200400" cy="1800225"/>
+          </a:xfrm>
+          <a:prstGeom prst="rect">
+            <a:avLst/>
+          </a:prstGeom>
+        </p:spPr>
+      </p:pic>
+      <p:sp>
+        <p:nvSpPr>
+          <p:cNvPr id="9" name="step-num-2"/>
+          <p:cNvSpPr/>
+          <p:nvPr/>
+        </p:nvSpPr>
+        <p:spPr>
+          <a:xfrm>
+            <a:off x="4978400" y="2006600"/>
+            <a:ext cx="304800" cy="304800"/>
+          </a:xfrm>
+          <a:prstGeom prst="ellipse">
+            <a:avLst/>
+          </a:prstGeom>
+          <a:solidFill>
+            <a:srgbClr val="00A5FF"/>
+          </a:solidFill>
+          <a:ln>
+            <a:noFill/>
+          </a:ln>
+        </p:spPr>
+        <p:txBody>
+          <a:bodyPr rtlCol="0" anchor="ctr" wrap="square" lIns="0" rIns="0" tIns="0" bIns="0">
+            <a:noAutofit/>
+          </a:bodyPr>
+          <a:lstStyle/>
+          <a:p>
+            <a:pPr algn="ctr"/>
+            <a:r>
+              <a:rPr sz="1600" b="0" i="0">
+                <a:solidFill>
+                  <a:srgbClr val="FFFFFF"/>
+                </a:solidFill>
+                <a:latin typeface="Corporate S"/>
+              </a:rPr>
+              <a:t>7</a:t>
+            </a:r>
+          </a:p>
+        </p:txBody>
+      </p:sp>
+      <p:sp>
+        <p:nvSpPr>
+          <p:cNvPr id="10" name="step-title-2"/>
+          <p:cNvSpPr txBox="1"/>
+          <p:nvPr/>
+        </p:nvSpPr>
+        <p:spPr>
+          <a:xfrm>
+            <a:off x="4876800" y="3806825"/>
+            <a:ext cx="3200400" cy="635000"/>
+          </a:xfrm>
+          <a:prstGeom prst="rect">
+            <a:avLst/>
+          </a:prstGeom>
+          <a:noFill/>
+        </p:spPr>
+        <p:txBody>
+          <a:bodyPr wrap="square" lIns="0" rIns="0" tIns="0" bIns="0" anchor="t">
+            <a:noAutofit/>
+          </a:bodyPr>
+          <a:lstStyle/>
+          <a:p>
+            <a:pPr algn="l"/>
+            <a:r>
+              <a:rPr sz="2100" b="0" i="0">
+                <a:solidFill>
+                  <a:srgbClr val="5D6C73"/>
+                </a:solidFill>
+                <a:latin typeface="Corporate S"/>
+              </a:rPr>
+              <a:t>Adjust the lamp, start 15 min</a:t>
+            </a:r>
+          </a:p>
+        </p:txBody>
+      </p:sp>
+      <p:pic>
+        <p:nvPicPr>
+          <p:cNvPr id="11" name="step-photo-3" descr="08-suction-gel.jpg"/>
+          <p:cNvPicPr>
+            <a:picLocks noChangeAspect="1"/>
+          </p:cNvPicPr>
+          <p:nvPr/>
+        </p:nvPicPr>
+        <p:blipFill>
+          <a:blip r:embed="rId4"/>
+          <a:srcRect/>
+          <a:stretch>
+            <a:fillRect/>
+          </a:stretch>
+        </p:blipFill>
+        <p:spPr>
+          <a:xfrm>
+            <a:off x="8229600" y="1905000"/>
+            <a:ext cx="3200400" cy="1800225"/>
+          </a:xfrm>
+          <a:prstGeom prst="rect">
+            <a:avLst/>
+          </a:prstGeom>
+        </p:spPr>
+      </p:pic>
+      <p:sp>
+        <p:nvSpPr>
+          <p:cNvPr id="12" name="step-num-3"/>
+          <p:cNvSpPr/>
+          <p:nvPr/>
+        </p:nvSpPr>
+        <p:spPr>
+          <a:xfrm>
+            <a:off x="8331200" y="2006600"/>
+            <a:ext cx="304800" cy="304800"/>
+          </a:xfrm>
+          <a:prstGeom prst="ellipse">
+            <a:avLst/>
+          </a:prstGeom>
+          <a:solidFill>
+            <a:srgbClr val="00A5FF"/>
+          </a:solidFill>
+          <a:ln>
+            <a:noFill/>
+          </a:ln>
+        </p:spPr>
+        <p:txBody>
+          <a:bodyPr rtlCol="0" anchor="ctr" wrap="square" lIns="0" rIns="0" tIns="0" bIns="0">
+            <a:noAutofit/>
+          </a:bodyPr>
+          <a:lstStyle/>
+          <a:p>
+            <a:pPr algn="ctr"/>
+            <a:r>
+              <a:rPr sz="1600" b="0" i="0">
+                <a:solidFill>
+                  <a:srgbClr val="FFFFFF"/>
+                </a:solidFill>
+                <a:latin typeface="Corporate S"/>
+              </a:rPr>
+              <a:t>8</a:t>
+            </a:r>
+          </a:p>
+        </p:txBody>
+      </p:sp>
+      <p:sp>
+        <p:nvSpPr>
+          <p:cNvPr id="13" name="step-title-3"/>
+          <p:cNvSpPr txBox="1"/>
+          <p:nvPr/>
+        </p:nvSpPr>
+        <p:spPr>
+          <a:xfrm>
+            <a:off x="8229600" y="3806825"/>
+            <a:ext cx="3200400" cy="635000"/>
+          </a:xfrm>
+          <a:prstGeom prst="rect">
+            <a:avLst/>
+          </a:prstGeom>
+          <a:noFill/>
+        </p:spPr>
+        <p:txBody>
+          <a:bodyPr wrap="square" lIns="0" rIns="0" tIns="0" bIns="0" anchor="t">
+            <a:noAutofit/>
+          </a:bodyPr>
+          <a:lstStyle/>
+          <a:p>
+            <a:pPr algn="l"/>
+            <a:r>
+              <a:rPr sz="2100" b="0" i="0">
+                <a:solidFill>
+                  <a:srgbClr val="5D6C73"/>
+                </a:solidFill>
+                <a:latin typeface="Corporate S"/>
+              </a:rPr>
+              <a:t>Suction off the gel — no rinsing</a:t>
+            </a:r>
+          </a:p>
+        </p:txBody>
+      </p:sp>
+      <p:sp>
+        <p:nvSpPr>
+          <p:cNvPr id="14" name="steps-caption"/>
+          <p:cNvSpPr txBox="1"/>
+          <p:nvPr/>
+        </p:nvSpPr>
+        <p:spPr>
+          <a:xfrm>
+            <a:off x="1524000" y="4695825"/>
+            <a:ext cx="8001000" cy="508000"/>
+          </a:xfrm>
+          <a:prstGeom prst="rect">
+            <a:avLst/>
+          </a:prstGeom>
+          <a:noFill/>
+        </p:spPr>
+        <p:txBody>
+          <a:bodyPr wrap="square" lIns="0" rIns="0" tIns="0" bIns="0" anchor="t">
+            <a:noAutofit/>
+          </a:bodyPr>
+          <a:lstStyle/>
+          <a:p>
+            <a:pPr algn="l"/>
+            <a:r>
+              <a:rPr sz="1700" b="0" i="0">
+                <a:solidFill>
+                  <a:srgbClr val="7D8B91"/>
+                </a:solidFill>
+                <a:latin typeface="Corporate S"/>
+              </a:rPr>
+              <a:t>Repeat 3× (max 4×) — fresh gel each cycle, suction only, never rinse.</a:t>
+            </a:r>
+          </a:p>
+        </p:txBody>
+      </p:sp>
+      <p:sp>
+        <p:nvSpPr>
+          <p:cNvPr id="15" name="rail-line"/>
+          <p:cNvSpPr/>
+          <p:nvPr/>
+        </p:nvSpPr>
+        <p:spPr>
+          <a:xfrm>
+            <a:off x="425450" y="2000250"/>
+            <a:ext cx="12700" cy="2641600"/>
+          </a:xfrm>
+          <a:prstGeom prst="rect">
+            <a:avLst/>
+          </a:prstGeom>
+          <a:solidFill>
+            <a:srgbClr val="3D4B52"/>
+          </a:solidFill>
+          <a:ln>
+            <a:noFill/>
+          </a:ln>
+        </p:spPr>
+        <p:txBody>
+          <a:bodyPr rtlCol="0" anchor="ctr"/>
+          <a:lstStyle/>
+          <a:p>
+            <a:pPr algn="ctr"/>
+          </a:p>
+        </p:txBody>
+      </p:sp>
+      <p:sp>
+        <p:nvSpPr>
+          <p:cNvPr id="16" name="rail-dot-1"/>
+          <p:cNvSpPr/>
+          <p:nvPr/>
+        </p:nvSpPr>
+        <p:spPr>
+          <a:xfrm>
+            <a:off x="381000" y="1949450"/>
+            <a:ext cx="101600" cy="101600"/>
+          </a:xfrm>
+          <a:prstGeom prst="ellipse">
+            <a:avLst/>
+          </a:prstGeom>
+          <a:solidFill>
+            <a:srgbClr val="1F272B"/>
+          </a:solidFill>
+          <a:ln w="19050">
+            <a:solidFill>
+              <a:srgbClr val="56666E"/>
+            </a:solidFill>
+          </a:ln>
+        </p:spPr>
+        <p:txBody>
+          <a:bodyPr rtlCol="0" anchor="ctr"/>
+          <a:lstStyle/>
+          <a:p>
+            <a:pPr algn="ctr"/>
+          </a:p>
+        </p:txBody>
+      </p:sp>
+      <p:sp>
+        <p:nvSpPr>
+          <p:cNvPr id="17" name="rail-num-1"/>
+          <p:cNvSpPr txBox="1"/>
+          <p:nvPr/>
+        </p:nvSpPr>
+        <p:spPr>
+          <a:xfrm>
+            <a:off x="635000" y="1898650"/>
+            <a:ext cx="254000" cy="203200"/>
+          </a:xfrm>
+          <a:prstGeom prst="rect">
+            <a:avLst/>
+          </a:prstGeom>
+          <a:noFill/>
+        </p:spPr>
+        <p:txBody>
+          <a:bodyPr wrap="square" lIns="0" rIns="0" tIns="0" bIns="0" anchor="ctr">
+            <a:noAutofit/>
+          </a:bodyPr>
+          <a:lstStyle/>
+          <a:p>
+            <a:pPr algn="l"/>
+            <a:r>
+              <a:rPr sz="1300" b="0" i="0">
+                <a:solidFill>
+                  <a:srgbClr val="56666E"/>
+                </a:solidFill>
+                <a:latin typeface="Corporate S"/>
+              </a:rPr>
+              <a:t>1</a:t>
+            </a:r>
+          </a:p>
+        </p:txBody>
+      </p:sp>
+      <p:sp>
+        <p:nvSpPr>
+          <p:cNvPr id="18" name="rail-dot-2"/>
+          <p:cNvSpPr/>
+          <p:nvPr/>
+        </p:nvSpPr>
+        <p:spPr>
+          <a:xfrm>
+            <a:off x="381000" y="2609850"/>
+            <a:ext cx="101600" cy="101600"/>
+          </a:xfrm>
+          <a:prstGeom prst="ellipse">
+            <a:avLst/>
+          </a:prstGeom>
+          <a:solidFill>
+            <a:srgbClr val="1F272B"/>
+          </a:solidFill>
+          <a:ln w="19050">
+            <a:solidFill>
+              <a:srgbClr val="56666E"/>
+            </a:solidFill>
+          </a:ln>
+        </p:spPr>
+        <p:txBody>
+          <a:bodyPr rtlCol="0" anchor="ctr"/>
+          <a:lstStyle/>
+          <a:p>
+            <a:pPr algn="ctr"/>
+          </a:p>
+        </p:txBody>
+      </p:sp>
+      <p:sp>
+        <p:nvSpPr>
+          <p:cNvPr id="19" name="rail-num-2"/>
+          <p:cNvSpPr txBox="1"/>
+          <p:nvPr/>
+        </p:nvSpPr>
+        <p:spPr>
+          <a:xfrm>
+            <a:off x="635000" y="2559050"/>
+            <a:ext cx="254000" cy="203200"/>
+          </a:xfrm>
+          <a:prstGeom prst="rect">
+            <a:avLst/>
+          </a:prstGeom>
+          <a:noFill/>
+        </p:spPr>
+        <p:txBody>
+          <a:bodyPr wrap="square" lIns="0" rIns="0" tIns="0" bIns="0" anchor="ctr">
+            <a:noAutofit/>
+          </a:bodyPr>
+          <a:lstStyle/>
+          <a:p>
+            <a:pPr algn="l"/>
+            <a:r>
+              <a:rPr sz="1300" b="0" i="0">
+                <a:solidFill>
+                  <a:srgbClr val="56666E"/>
+                </a:solidFill>
+                <a:latin typeface="Corporate S"/>
+              </a:rPr>
+              <a:t>2</a:t>
+            </a:r>
+          </a:p>
+        </p:txBody>
+      </p:sp>
+      <p:sp>
+        <p:nvSpPr>
+          <p:cNvPr id="20" name="rail-dot-3"/>
+          <p:cNvSpPr/>
+          <p:nvPr/>
+        </p:nvSpPr>
+        <p:spPr>
+          <a:xfrm>
+            <a:off x="381000" y="3270250"/>
+            <a:ext cx="101600" cy="101600"/>
+          </a:xfrm>
+          <a:prstGeom prst="ellipse">
+            <a:avLst/>
+          </a:prstGeom>
+          <a:solidFill>
+            <a:srgbClr val="1F272B"/>
+          </a:solidFill>
+          <a:ln w="19050">
+            <a:solidFill>
+              <a:srgbClr val="56666E"/>
+            </a:solidFill>
+          </a:ln>
+        </p:spPr>
+        <p:txBody>
+          <a:bodyPr rtlCol="0" anchor="ctr"/>
+          <a:lstStyle/>
+          <a:p>
+            <a:pPr algn="ctr"/>
+          </a:p>
+        </p:txBody>
+      </p:sp>
+      <p:sp>
+        <p:nvSpPr>
+          <p:cNvPr id="21" name="rail-num-3"/>
+          <p:cNvSpPr txBox="1"/>
+          <p:nvPr/>
+        </p:nvSpPr>
+        <p:spPr>
+          <a:xfrm>
+            <a:off x="635000" y="3219450"/>
+            <a:ext cx="254000" cy="203200"/>
+          </a:xfrm>
+          <a:prstGeom prst="rect">
+            <a:avLst/>
+          </a:prstGeom>
+          <a:noFill/>
+        </p:spPr>
+        <p:txBody>
+          <a:bodyPr wrap="square" lIns="0" rIns="0" tIns="0" bIns="0" anchor="ctr">
+            <a:noAutofit/>
+          </a:bodyPr>
+          <a:lstStyle/>
+          <a:p>
+            <a:pPr algn="l"/>
+            <a:r>
+              <a:rPr sz="1300" b="0" i="0">
+                <a:solidFill>
+                  <a:srgbClr val="56666E"/>
+                </a:solidFill>
+                <a:latin typeface="Corporate S"/>
+              </a:rPr>
+              <a:t>3</a:t>
+            </a:r>
+          </a:p>
+        </p:txBody>
+      </p:sp>
+      <p:sp>
+        <p:nvSpPr>
+          <p:cNvPr id="22" name="rail-dot-4"/>
+          <p:cNvSpPr/>
+          <p:nvPr/>
+        </p:nvSpPr>
+        <p:spPr>
+          <a:xfrm>
+            <a:off x="381000" y="3930650"/>
+            <a:ext cx="101600" cy="101600"/>
+          </a:xfrm>
+          <a:prstGeom prst="ellipse">
+            <a:avLst/>
+          </a:prstGeom>
+          <a:solidFill>
+            <a:srgbClr val="1F272B"/>
+          </a:solidFill>
+          <a:ln w="19050">
+            <a:solidFill>
+              <a:srgbClr val="56666E"/>
+            </a:solidFill>
+          </a:ln>
+        </p:spPr>
+        <p:txBody>
+          <a:bodyPr rtlCol="0" anchor="ctr"/>
+          <a:lstStyle/>
+          <a:p>
+            <a:pPr algn="ctr"/>
+          </a:p>
+        </p:txBody>
+      </p:sp>
+      <p:sp>
+        <p:nvSpPr>
+          <p:cNvPr id="23" name="rail-num-4"/>
+          <p:cNvSpPr txBox="1"/>
+          <p:nvPr/>
+        </p:nvSpPr>
+        <p:spPr>
+          <a:xfrm>
+            <a:off x="635000" y="3879850"/>
+            <a:ext cx="254000" cy="203200"/>
+          </a:xfrm>
+          <a:prstGeom prst="rect">
+            <a:avLst/>
+          </a:prstGeom>
+          <a:noFill/>
+        </p:spPr>
+        <p:txBody>
+          <a:bodyPr wrap="square" lIns="0" rIns="0" tIns="0" bIns="0" anchor="ctr">
+            <a:noAutofit/>
+          </a:bodyPr>
+          <a:lstStyle/>
+          <a:p>
+            <a:pPr algn="l"/>
+            <a:r>
+              <a:rPr sz="1300" b="0" i="0">
+                <a:solidFill>
+                  <a:srgbClr val="56666E"/>
+                </a:solidFill>
+                <a:latin typeface="Corporate S"/>
+              </a:rPr>
+              <a:t>4</a:t>
+            </a:r>
+          </a:p>
+        </p:txBody>
+      </p:sp>
+      <p:sp>
+        <p:nvSpPr>
+          <p:cNvPr id="24" name="rail-dot-5"/>
+          <p:cNvSpPr/>
+          <p:nvPr/>
+        </p:nvSpPr>
+        <p:spPr>
+          <a:xfrm>
+            <a:off x="381000" y="4591050"/>
+            <a:ext cx="101600" cy="101600"/>
+          </a:xfrm>
+          <a:prstGeom prst="ellipse">
+            <a:avLst/>
+          </a:prstGeom>
+          <a:solidFill>
+            <a:srgbClr val="1F272B"/>
+          </a:solidFill>
+          <a:ln w="19050">
+            <a:solidFill>
+              <a:srgbClr val="56666E"/>
+            </a:solidFill>
+          </a:ln>
+        </p:spPr>
+        <p:txBody>
+          <a:bodyPr rtlCol="0" anchor="ctr"/>
+          <a:lstStyle/>
+          <a:p>
+            <a:pPr algn="ctr"/>
+          </a:p>
+        </p:txBody>
+      </p:sp>
+      <p:sp>
+        <p:nvSpPr>
+          <p:cNvPr id="25" name="rail-num-5"/>
+          <p:cNvSpPr txBox="1"/>
+          <p:nvPr/>
+        </p:nvSpPr>
+        <p:spPr>
+          <a:xfrm>
+            <a:off x="635000" y="4540250"/>
+            <a:ext cx="254000" cy="203200"/>
+          </a:xfrm>
+          <a:prstGeom prst="rect">
+            <a:avLst/>
+          </a:prstGeom>
+          <a:noFill/>
+        </p:spPr>
+        <p:txBody>
+          <a:bodyPr wrap="square" lIns="0" rIns="0" tIns="0" bIns="0" anchor="ctr">
+            <a:noAutofit/>
+          </a:bodyPr>
+          <a:lstStyle/>
+          <a:p>
+            <a:pPr algn="l"/>
+            <a:r>
+              <a:rPr sz="1300" b="0" i="0">
+                <a:solidFill>
+                  <a:srgbClr val="56666E"/>
+                </a:solidFill>
+                <a:latin typeface="Corporate S"/>
+              </a:rPr>
+              <a:t>5</a:t>
+            </a:r>
+          </a:p>
+        </p:txBody>
+      </p:sp>
+      <p:sp>
+        <p:nvSpPr>
+          <p:cNvPr id="26" name="footer"/>
+          <p:cNvSpPr txBox="1"/>
+          <p:nvPr/>
+        </p:nvSpPr>
+        <p:spPr>
+          <a:xfrm>
+            <a:off x="1524000" y="6413500"/>
+            <a:ext cx="7620000" cy="190500"/>
+          </a:xfrm>
+          <a:prstGeom prst="rect">
+            <a:avLst/>
+          </a:prstGeom>
+          <a:noFill/>
+        </p:spPr>
+        <p:txBody>
+          <a:bodyPr wrap="square" lIns="0" rIns="0" tIns="0" bIns="0" anchor="t">
+            <a:noAutofit/>
+          </a:bodyPr>
+          <a:lstStyle/>
+          <a:p>
+            <a:pPr algn="l"/>
+            <a:r>
+              <a:rPr sz="1100" b="0" i="0" cap="all" spc="176">
+                <a:solidFill>
+                  <a:srgbClr val="ABB7BE"/>
+                </a:solidFill>
+                <a:latin typeface="Corporate S"/>
+              </a:rPr>
+              <a:t>IN-OFFICE WHITENING WORKFLOW · 11</a:t>
+            </a:r>
+          </a:p>
+        </p:txBody>
+      </p:sp>
+    </p:spTree>
+  </p:cSld>
+  <p:clrMapOvr>
+    <a:masterClrMapping/>
+  </p:clrMapOvr>
+</p:sld>
+</file>
+
+<file path=ppt/slides/slide12.xml><?xml version="1.0" encoding="utf-8"?>
 <p:sld xmlns:a="http://schemas.openxmlformats.org/drawingml/2006/main" xmlns:p="http://schemas.openxmlformats.org/presentationml/2006/main" xmlns:r="http://schemas.openxmlformats.org/officeDocument/2006/relationships">
   <p:cSld>
     <p:spTree>
@@ -11652,7 +12534,7 @@
                 </a:solidFill>
                 <a:latin typeface="Corporate S"/>
               </a:rPr>
-              <a:t>IN-OFFICE WHITENING WORKFLOW · 11</a:t>
+              <a:t>IN-OFFICE WHITENING WORKFLOW · 12</a:t>
             </a:r>
           </a:p>
         </p:txBody>
@@ -11665,7 +12547,7 @@
 </p:sld>
 </file>
 
-<file path=ppt/slides/slide12.xml><?xml version="1.0" encoding="utf-8"?>
+<file path=ppt/slides/slide13.xml><?xml version="1.0" encoding="utf-8"?>
 <p:sld xmlns:a="http://schemas.openxmlformats.org/drawingml/2006/main" xmlns:p="http://schemas.openxmlformats.org/presentationml/2006/main" xmlns:r="http://schemas.openxmlformats.org/officeDocument/2006/relationships">
   <p:cSld>
     <p:spTree>
@@ -12969,7 +13851,7 @@
                 </a:solidFill>
                 <a:latin typeface="Corporate S"/>
               </a:rPr>
-              <a:t>IN-OFFICE WHITENING WORKFLOW · 12</a:t>
+              <a:t>IN-OFFICE WHITENING WORKFLOW · 13</a:t>
             </a:r>
           </a:p>
         </p:txBody>
@@ -12982,7 +13864,7 @@
 </p:sld>
 </file>
 
-<file path=ppt/slides/slide13.xml><?xml version="1.0" encoding="utf-8"?>
+<file path=ppt/slides/slide14.xml><?xml version="1.0" encoding="utf-8"?>
 <p:sld xmlns:a="http://schemas.openxmlformats.org/drawingml/2006/main" xmlns:p="http://schemas.openxmlformats.org/presentationml/2006/main" xmlns:r="http://schemas.openxmlformats.org/officeDocument/2006/relationships">
   <p:cSld>
     <p:spTree>
@@ -14364,595 +15246,7 @@
                 </a:solidFill>
                 <a:latin typeface="Corporate S"/>
               </a:rPr>
-              <a:t>IN-OFFICE WHITENING WORKFLOW · 13</a:t>
-            </a:r>
-          </a:p>
-        </p:txBody>
-      </p:sp>
-    </p:spTree>
-  </p:cSld>
-  <p:clrMapOvr>
-    <a:masterClrMapping/>
-  </p:clrMapOvr>
-</p:sld>
-</file>
-
-<file path=ppt/slides/slide14.xml><?xml version="1.0" encoding="utf-8"?>
-<p:sld xmlns:a="http://schemas.openxmlformats.org/drawingml/2006/main" xmlns:p="http://schemas.openxmlformats.org/presentationml/2006/main" xmlns:r="http://schemas.openxmlformats.org/officeDocument/2006/relationships">
-  <p:cSld>
-    <p:spTree>
-      <p:nvGrpSpPr>
-        <p:cNvPr id="1" name=""/>
-        <p:cNvGrpSpPr/>
-        <p:nvPr/>
-      </p:nvGrpSpPr>
-      <p:grpSpPr/>
-      <p:sp>
-        <p:nvSpPr>
-          <p:cNvPr id="2" name="Text Placeholder 1"/>
-          <p:cNvSpPr>
-            <a:spLocks noGrp="1"/>
-          </p:cNvSpPr>
-          <p:nvPr>
-            <p:ph type="body" idx="10"/>
-          </p:nvPr>
-        </p:nvSpPr>
-        <p:spPr/>
-        <p:txBody>
-          <a:bodyPr/>
-          <a:lstStyle/>
-          <a:p>
-            <a:r>
-              <a:t>02</a:t>
-            </a:r>
-          </a:p>
-        </p:txBody>
-      </p:sp>
-      <p:sp>
-        <p:nvSpPr>
-          <p:cNvPr id="7" name="brief-card"/>
-          <p:cNvSpPr/>
-          <p:nvPr/>
-        </p:nvSpPr>
-        <p:spPr>
-          <a:xfrm>
-            <a:off x="952500" y="0"/>
-            <a:ext cx="11239500" cy="6858000"/>
-          </a:xfrm>
-          <a:prstGeom prst="rect">
-            <a:avLst/>
-          </a:prstGeom>
-          <a:solidFill>
-            <a:srgbClr val="DEE7EC"/>
-          </a:solidFill>
-          <a:ln w="12700">
-            <a:solidFill>
-              <a:srgbClr val="ABB7BE"/>
-            </a:solidFill>
-            <a:prstDash val="dash"/>
-          </a:ln>
-        </p:spPr>
-        <p:txBody>
-          <a:bodyPr rtlCol="0" anchor="ctr"/>
-          <a:lstStyle/>
-          <a:p>
-            <a:pPr algn="ctr"/>
-          </a:p>
-        </p:txBody>
-      </p:sp>
-      <p:sp>
-        <p:nvSpPr>
-          <p:cNvPr id="8" name="brief-icon"/>
-          <p:cNvSpPr/>
-          <p:nvPr/>
-        </p:nvSpPr>
-        <p:spPr>
-          <a:xfrm>
-            <a:off x="6369050" y="2933700"/>
-            <a:ext cx="406400" cy="292100"/>
-          </a:xfrm>
-          <a:prstGeom prst="roundRect">
-            <a:avLst>
-              <a:gd name="adj" fmla="val 17391"/>
-            </a:avLst>
-          </a:prstGeom>
-          <a:solidFill>
-            <a:srgbClr val="ABB7BE"/>
-          </a:solidFill>
-          <a:ln>
-            <a:noFill/>
-          </a:ln>
-        </p:spPr>
-        <p:txBody>
-          <a:bodyPr rtlCol="0" anchor="ctr"/>
-          <a:lstStyle/>
-          <a:p>
-            <a:pPr algn="ctr"/>
-          </a:p>
-        </p:txBody>
-      </p:sp>
-      <p:sp>
-        <p:nvSpPr>
-          <p:cNvPr id="9" name="brief-icon-lens"/>
-          <p:cNvSpPr/>
-          <p:nvPr/>
-        </p:nvSpPr>
-        <p:spPr>
-          <a:xfrm>
-            <a:off x="6496050" y="3003550"/>
-            <a:ext cx="152400" cy="152400"/>
-          </a:xfrm>
-          <a:prstGeom prst="ellipse">
-            <a:avLst/>
-          </a:prstGeom>
-          <a:solidFill>
-            <a:srgbClr val="DEE7EC"/>
-          </a:solidFill>
-          <a:ln>
-            <a:noFill/>
-          </a:ln>
-        </p:spPr>
-        <p:txBody>
-          <a:bodyPr rtlCol="0" anchor="ctr"/>
-          <a:lstStyle/>
-          <a:p>
-            <a:pPr algn="ctr"/>
-          </a:p>
-        </p:txBody>
-      </p:sp>
-      <p:sp>
-        <p:nvSpPr>
-          <p:cNvPr id="10" name="brief-text"/>
-          <p:cNvSpPr txBox="1"/>
-          <p:nvPr/>
-        </p:nvSpPr>
-        <p:spPr>
-          <a:xfrm>
-            <a:off x="1206500" y="3327400"/>
-            <a:ext cx="10731500" cy="762000"/>
-          </a:xfrm>
-          <a:prstGeom prst="rect">
-            <a:avLst/>
-          </a:prstGeom>
-          <a:noFill/>
-        </p:spPr>
-        <p:txBody>
-          <a:bodyPr wrap="square" lIns="0" rIns="0" tIns="0" bIns="0" anchor="t">
-            <a:noAutofit/>
-          </a:bodyPr>
-          <a:lstStyle/>
-          <a:p>
-            <a:pPr algn="ctr"/>
-            <a:r>
-              <a:rPr sz="1700" b="0" i="0">
-                <a:solidFill>
-                  <a:srgbClr val="5D6C73"/>
-                </a:solidFill>
-                <a:latin typeface="Corporate S"/>
-              </a:rPr>
-              <a:t>Isolation complete: lips protected, retractor docked, gingiva barrier cured</a:t>
-            </a:r>
-          </a:p>
-        </p:txBody>
-      </p:sp>
-      <p:sp>
-        <p:nvSpPr>
-          <p:cNvPr id="4" name="Text Placeholder 3"/>
-          <p:cNvSpPr>
-            <a:spLocks noGrp="1"/>
-          </p:cNvSpPr>
-          <p:nvPr>
-            <p:ph type="body" idx="11"/>
-          </p:nvPr>
-        </p:nvSpPr>
-        <p:spPr/>
-        <p:txBody>
-          <a:bodyPr/>
-          <a:lstStyle/>
-          <a:p>
-            <a:r>
-              <a:t>Layout 14 · photo</a:t>
-            </a:r>
-          </a:p>
-        </p:txBody>
-      </p:sp>
-      <p:sp>
-        <p:nvSpPr>
-          <p:cNvPr id="5" name="Title 4"/>
-          <p:cNvSpPr>
-            <a:spLocks noGrp="1"/>
-          </p:cNvSpPr>
-          <p:nvPr>
-            <p:ph type="title"/>
-          </p:nvPr>
-        </p:nvSpPr>
-        <p:spPr/>
-        <p:txBody>
-          <a:bodyPr/>
-          <a:lstStyle/>
-          <a:p>
-            <a:r>
-              <a:t>Prepare &amp; Protect</a:t>
-            </a:r>
-          </a:p>
-        </p:txBody>
-      </p:sp>
-      <p:sp>
-        <p:nvSpPr>
-          <p:cNvPr id="6" name="Text Placeholder 5"/>
-          <p:cNvSpPr>
-            <a:spLocks noGrp="1"/>
-          </p:cNvSpPr>
-          <p:nvPr>
-            <p:ph type="body" idx="27"/>
-          </p:nvPr>
-        </p:nvSpPr>
-        <p:spPr/>
-        <p:txBody>
-          <a:bodyPr/>
-          <a:lstStyle/>
-          <a:p>
-            <a:r>
-              <a:t>Clean, isolate and seal the soft tissue before any gel — the barrier is the treatment.</a:t>
-            </a:r>
-          </a:p>
-        </p:txBody>
-      </p:sp>
-      <p:sp>
-        <p:nvSpPr>
-          <p:cNvPr id="11" name="rail-line"/>
-          <p:cNvSpPr/>
-          <p:nvPr/>
-        </p:nvSpPr>
-        <p:spPr>
-          <a:xfrm>
-            <a:off x="425450" y="2000250"/>
-            <a:ext cx="12700" cy="2641600"/>
-          </a:xfrm>
-          <a:prstGeom prst="rect">
-            <a:avLst/>
-          </a:prstGeom>
-          <a:solidFill>
-            <a:srgbClr val="3D4B52"/>
-          </a:solidFill>
-          <a:ln>
-            <a:noFill/>
-          </a:ln>
-        </p:spPr>
-        <p:txBody>
-          <a:bodyPr rtlCol="0" anchor="ctr"/>
-          <a:lstStyle/>
-          <a:p>
-            <a:pPr algn="ctr"/>
-          </a:p>
-        </p:txBody>
-      </p:sp>
-      <p:sp>
-        <p:nvSpPr>
-          <p:cNvPr id="12" name="rail-dot-1"/>
-          <p:cNvSpPr/>
-          <p:nvPr/>
-        </p:nvSpPr>
-        <p:spPr>
-          <a:xfrm>
-            <a:off x="381000" y="1949450"/>
-            <a:ext cx="101600" cy="101600"/>
-          </a:xfrm>
-          <a:prstGeom prst="ellipse">
-            <a:avLst/>
-          </a:prstGeom>
-          <a:solidFill>
-            <a:srgbClr val="192024"/>
-          </a:solidFill>
-          <a:ln w="19050">
-            <a:solidFill>
-              <a:srgbClr val="56666E"/>
-            </a:solidFill>
-          </a:ln>
-        </p:spPr>
-        <p:txBody>
-          <a:bodyPr rtlCol="0" anchor="ctr"/>
-          <a:lstStyle/>
-          <a:p>
-            <a:pPr algn="ctr"/>
-          </a:p>
-        </p:txBody>
-      </p:sp>
-      <p:sp>
-        <p:nvSpPr>
-          <p:cNvPr id="13" name="rail-num-1"/>
-          <p:cNvSpPr txBox="1"/>
-          <p:nvPr/>
-        </p:nvSpPr>
-        <p:spPr>
-          <a:xfrm>
-            <a:off x="635000" y="1898650"/>
-            <a:ext cx="254000" cy="203200"/>
-          </a:xfrm>
-          <a:prstGeom prst="rect">
-            <a:avLst/>
-          </a:prstGeom>
-          <a:noFill/>
-        </p:spPr>
-        <p:txBody>
-          <a:bodyPr wrap="square" lIns="0" rIns="0" tIns="0" bIns="0" anchor="ctr">
-            <a:noAutofit/>
-          </a:bodyPr>
-          <a:lstStyle/>
-          <a:p>
-            <a:pPr algn="l"/>
-            <a:r>
-              <a:rPr sz="1300" b="0" i="0">
-                <a:solidFill>
-                  <a:srgbClr val="56666E"/>
-                </a:solidFill>
-                <a:latin typeface="Corporate S"/>
-              </a:rPr>
-              <a:t>1</a:t>
-            </a:r>
-          </a:p>
-        </p:txBody>
-      </p:sp>
-      <p:sp>
-        <p:nvSpPr>
-          <p:cNvPr id="14" name="rail-dot-2"/>
-          <p:cNvSpPr/>
-          <p:nvPr/>
-        </p:nvSpPr>
-        <p:spPr>
-          <a:xfrm>
-            <a:off x="381000" y="2609850"/>
-            <a:ext cx="101600" cy="101600"/>
-          </a:xfrm>
-          <a:prstGeom prst="ellipse">
-            <a:avLst/>
-          </a:prstGeom>
-          <a:solidFill>
-            <a:srgbClr val="192024"/>
-          </a:solidFill>
-          <a:ln w="19050">
-            <a:solidFill>
-              <a:srgbClr val="56666E"/>
-            </a:solidFill>
-          </a:ln>
-        </p:spPr>
-        <p:txBody>
-          <a:bodyPr rtlCol="0" anchor="ctr"/>
-          <a:lstStyle/>
-          <a:p>
-            <a:pPr algn="ctr"/>
-          </a:p>
-        </p:txBody>
-      </p:sp>
-      <p:sp>
-        <p:nvSpPr>
-          <p:cNvPr id="15" name="rail-num-2"/>
-          <p:cNvSpPr txBox="1"/>
-          <p:nvPr/>
-        </p:nvSpPr>
-        <p:spPr>
-          <a:xfrm>
-            <a:off x="635000" y="2559050"/>
-            <a:ext cx="254000" cy="203200"/>
-          </a:xfrm>
-          <a:prstGeom prst="rect">
-            <a:avLst/>
-          </a:prstGeom>
-          <a:noFill/>
-        </p:spPr>
-        <p:txBody>
-          <a:bodyPr wrap="square" lIns="0" rIns="0" tIns="0" bIns="0" anchor="ctr">
-            <a:noAutofit/>
-          </a:bodyPr>
-          <a:lstStyle/>
-          <a:p>
-            <a:pPr algn="l"/>
-            <a:r>
-              <a:rPr sz="1300" b="0" i="0">
-                <a:solidFill>
-                  <a:srgbClr val="56666E"/>
-                </a:solidFill>
-                <a:latin typeface="Corporate S"/>
-              </a:rPr>
-              <a:t>2</a:t>
-            </a:r>
-          </a:p>
-        </p:txBody>
-      </p:sp>
-      <p:sp>
-        <p:nvSpPr>
-          <p:cNvPr id="16" name="rail-dot-3"/>
-          <p:cNvSpPr/>
-          <p:nvPr/>
-        </p:nvSpPr>
-        <p:spPr>
-          <a:xfrm>
-            <a:off x="381000" y="3270250"/>
-            <a:ext cx="101600" cy="101600"/>
-          </a:xfrm>
-          <a:prstGeom prst="ellipse">
-            <a:avLst/>
-          </a:prstGeom>
-          <a:solidFill>
-            <a:srgbClr val="192024"/>
-          </a:solidFill>
-          <a:ln w="19050">
-            <a:solidFill>
-              <a:srgbClr val="56666E"/>
-            </a:solidFill>
-          </a:ln>
-        </p:spPr>
-        <p:txBody>
-          <a:bodyPr rtlCol="0" anchor="ctr"/>
-          <a:lstStyle/>
-          <a:p>
-            <a:pPr algn="ctr"/>
-          </a:p>
-        </p:txBody>
-      </p:sp>
-      <p:sp>
-        <p:nvSpPr>
-          <p:cNvPr id="17" name="rail-num-3"/>
-          <p:cNvSpPr txBox="1"/>
-          <p:nvPr/>
-        </p:nvSpPr>
-        <p:spPr>
-          <a:xfrm>
-            <a:off x="635000" y="3219450"/>
-            <a:ext cx="254000" cy="203200"/>
-          </a:xfrm>
-          <a:prstGeom prst="rect">
-            <a:avLst/>
-          </a:prstGeom>
-          <a:noFill/>
-        </p:spPr>
-        <p:txBody>
-          <a:bodyPr wrap="square" lIns="0" rIns="0" tIns="0" bIns="0" anchor="ctr">
-            <a:noAutofit/>
-          </a:bodyPr>
-          <a:lstStyle/>
-          <a:p>
-            <a:pPr algn="l"/>
-            <a:r>
-              <a:rPr sz="1300" b="0" i="0">
-                <a:solidFill>
-                  <a:srgbClr val="56666E"/>
-                </a:solidFill>
-                <a:latin typeface="Corporate S"/>
-              </a:rPr>
-              <a:t>3</a:t>
-            </a:r>
-          </a:p>
-        </p:txBody>
-      </p:sp>
-      <p:sp>
-        <p:nvSpPr>
-          <p:cNvPr id="18" name="rail-dot-4"/>
-          <p:cNvSpPr/>
-          <p:nvPr/>
-        </p:nvSpPr>
-        <p:spPr>
-          <a:xfrm>
-            <a:off x="381000" y="3930650"/>
-            <a:ext cx="101600" cy="101600"/>
-          </a:xfrm>
-          <a:prstGeom prst="ellipse">
-            <a:avLst/>
-          </a:prstGeom>
-          <a:solidFill>
-            <a:srgbClr val="192024"/>
-          </a:solidFill>
-          <a:ln w="19050">
-            <a:solidFill>
-              <a:srgbClr val="56666E"/>
-            </a:solidFill>
-          </a:ln>
-        </p:spPr>
-        <p:txBody>
-          <a:bodyPr rtlCol="0" anchor="ctr"/>
-          <a:lstStyle/>
-          <a:p>
-            <a:pPr algn="ctr"/>
-          </a:p>
-        </p:txBody>
-      </p:sp>
-      <p:sp>
-        <p:nvSpPr>
-          <p:cNvPr id="19" name="rail-num-4"/>
-          <p:cNvSpPr txBox="1"/>
-          <p:nvPr/>
-        </p:nvSpPr>
-        <p:spPr>
-          <a:xfrm>
-            <a:off x="635000" y="3879850"/>
-            <a:ext cx="254000" cy="203200"/>
-          </a:xfrm>
-          <a:prstGeom prst="rect">
-            <a:avLst/>
-          </a:prstGeom>
-          <a:noFill/>
-        </p:spPr>
-        <p:txBody>
-          <a:bodyPr wrap="square" lIns="0" rIns="0" tIns="0" bIns="0" anchor="ctr">
-            <a:noAutofit/>
-          </a:bodyPr>
-          <a:lstStyle/>
-          <a:p>
-            <a:pPr algn="l"/>
-            <a:r>
-              <a:rPr sz="1300" b="0" i="0">
-                <a:solidFill>
-                  <a:srgbClr val="56666E"/>
-                </a:solidFill>
-                <a:latin typeface="Corporate S"/>
-              </a:rPr>
-              <a:t>4</a:t>
-            </a:r>
-          </a:p>
-        </p:txBody>
-      </p:sp>
-      <p:sp>
-        <p:nvSpPr>
-          <p:cNvPr id="20" name="rail-dot-5"/>
-          <p:cNvSpPr/>
-          <p:nvPr/>
-        </p:nvSpPr>
-        <p:spPr>
-          <a:xfrm>
-            <a:off x="381000" y="4591050"/>
-            <a:ext cx="101600" cy="101600"/>
-          </a:xfrm>
-          <a:prstGeom prst="ellipse">
-            <a:avLst/>
-          </a:prstGeom>
-          <a:solidFill>
-            <a:srgbClr val="192024"/>
-          </a:solidFill>
-          <a:ln w="19050">
-            <a:solidFill>
-              <a:srgbClr val="56666E"/>
-            </a:solidFill>
-          </a:ln>
-        </p:spPr>
-        <p:txBody>
-          <a:bodyPr rtlCol="0" anchor="ctr"/>
-          <a:lstStyle/>
-          <a:p>
-            <a:pPr algn="ctr"/>
-          </a:p>
-        </p:txBody>
-      </p:sp>
-      <p:sp>
-        <p:nvSpPr>
-          <p:cNvPr id="21" name="rail-num-5"/>
-          <p:cNvSpPr txBox="1"/>
-          <p:nvPr/>
-        </p:nvSpPr>
-        <p:spPr>
-          <a:xfrm>
-            <a:off x="635000" y="4540250"/>
-            <a:ext cx="254000" cy="203200"/>
-          </a:xfrm>
-          <a:prstGeom prst="rect">
-            <a:avLst/>
-          </a:prstGeom>
-          <a:noFill/>
-        </p:spPr>
-        <p:txBody>
-          <a:bodyPr wrap="square" lIns="0" rIns="0" tIns="0" bIns="0" anchor="ctr">
-            <a:noAutofit/>
-          </a:bodyPr>
-          <a:lstStyle/>
-          <a:p>
-            <a:pPr algn="l"/>
-            <a:r>
-              <a:rPr sz="1300" b="0" i="0">
-                <a:solidFill>
-                  <a:srgbClr val="56666E"/>
-                </a:solidFill>
-                <a:latin typeface="Corporate S"/>
-              </a:rPr>
-              <a:t>5</a:t>
+              <a:t>IN-OFFICE WHITENING WORKFLOW · 14</a:t>
             </a:r>
           </a:p>
         </p:txBody>
@@ -14996,9 +15290,30 @@
           </a:p>
         </p:txBody>
       </p:sp>
-      <p:sp>
-        <p:nvSpPr>
-          <p:cNvPr id="3" name="Text Placeholder 2"/>
+      <p:pic>
+        <p:nvPicPr>
+          <p:cNvPr id="3" name="Picture Placeholder 2" descr="07-adjust-lamp.jpg"/>
+          <p:cNvPicPr>
+            <a:picLocks noGrp="1" noChangeAspect="1"/>
+          </p:cNvPicPr>
+          <p:nvPr>
+            <p:ph type="pic" idx="15"/>
+          </p:nvPr>
+        </p:nvPicPr>
+        <p:blipFill>
+          <a:blip r:embed="rId2"/>
+          <a:srcRect l="3906" r="3906"/>
+          <a:stretch>
+            <a:fillRect/>
+          </a:stretch>
+        </p:blipFill>
+        <p:spPr>
+          <a:noFill/>
+        </p:spPr>
+      </p:pic>
+      <p:sp>
+        <p:nvSpPr>
+          <p:cNvPr id="4" name="Text Placeholder 3"/>
           <p:cNvSpPr>
             <a:spLocks noGrp="1"/>
           </p:cNvSpPr>
@@ -15012,14 +15327,14 @@
           <a:lstStyle/>
           <a:p>
             <a:r>
-              <a:t>Layout 15 · before_after</a:t>
-            </a:r>
-          </a:p>
-        </p:txBody>
-      </p:sp>
-      <p:sp>
-        <p:nvSpPr>
-          <p:cNvPr id="4" name="Title 3"/>
+              <a:t>Layout 14 · photo</a:t>
+            </a:r>
+          </a:p>
+        </p:txBody>
+      </p:sp>
+      <p:sp>
+        <p:nvSpPr>
+          <p:cNvPr id="5" name="Title 4"/>
           <p:cNvSpPr>
             <a:spLocks noGrp="1"/>
           </p:cNvSpPr>
@@ -15033,273 +15348,19 @@
           <a:lstStyle/>
           <a:p>
             <a:r>
-              <a:t>Identical Setup, Before and After</a:t>
-            </a:r>
-          </a:p>
-        </p:txBody>
-      </p:sp>
-      <p:sp>
-        <p:nvSpPr>
-          <p:cNvPr id="9" name="brief-card"/>
-          <p:cNvSpPr/>
-          <p:nvPr/>
-        </p:nvSpPr>
-        <p:spPr>
-          <a:xfrm>
-            <a:off x="1524000" y="2095500"/>
-            <a:ext cx="3810000" cy="2540000"/>
-          </a:xfrm>
-          <a:prstGeom prst="rect">
-            <a:avLst/>
-          </a:prstGeom>
-          <a:solidFill>
-            <a:srgbClr val="DEE7EC"/>
-          </a:solidFill>
-          <a:ln w="12700">
-            <a:solidFill>
-              <a:srgbClr val="ABB7BE"/>
-            </a:solidFill>
-            <a:prstDash val="dash"/>
-          </a:ln>
-        </p:spPr>
-        <p:txBody>
-          <a:bodyPr rtlCol="0" anchor="ctr"/>
-          <a:lstStyle/>
-          <a:p>
-            <a:pPr algn="ctr"/>
-          </a:p>
-        </p:txBody>
-      </p:sp>
-      <p:sp>
-        <p:nvSpPr>
-          <p:cNvPr id="10" name="brief-icon"/>
-          <p:cNvSpPr/>
-          <p:nvPr/>
-        </p:nvSpPr>
-        <p:spPr>
-          <a:xfrm>
-            <a:off x="3225800" y="2870200"/>
-            <a:ext cx="406400" cy="292100"/>
-          </a:xfrm>
-          <a:prstGeom prst="roundRect">
-            <a:avLst>
-              <a:gd name="adj" fmla="val 17391"/>
-            </a:avLst>
-          </a:prstGeom>
-          <a:solidFill>
-            <a:srgbClr val="ABB7BE"/>
-          </a:solidFill>
-          <a:ln>
-            <a:noFill/>
-          </a:ln>
-        </p:spPr>
-        <p:txBody>
-          <a:bodyPr rtlCol="0" anchor="ctr"/>
-          <a:lstStyle/>
-          <a:p>
-            <a:pPr algn="ctr"/>
-          </a:p>
-        </p:txBody>
-      </p:sp>
-      <p:sp>
-        <p:nvSpPr>
-          <p:cNvPr id="11" name="brief-icon-lens"/>
-          <p:cNvSpPr/>
-          <p:nvPr/>
-        </p:nvSpPr>
-        <p:spPr>
-          <a:xfrm>
-            <a:off x="3352800" y="2940050"/>
-            <a:ext cx="152400" cy="152400"/>
-          </a:xfrm>
-          <a:prstGeom prst="ellipse">
-            <a:avLst/>
-          </a:prstGeom>
-          <a:solidFill>
-            <a:srgbClr val="DEE7EC"/>
-          </a:solidFill>
-          <a:ln>
-            <a:noFill/>
-          </a:ln>
-        </p:spPr>
-        <p:txBody>
-          <a:bodyPr rtlCol="0" anchor="ctr"/>
-          <a:lstStyle/>
-          <a:p>
-            <a:pPr algn="ctr"/>
-          </a:p>
-        </p:txBody>
-      </p:sp>
-      <p:sp>
-        <p:nvSpPr>
-          <p:cNvPr id="12" name="brief-text"/>
-          <p:cNvSpPr txBox="1"/>
-          <p:nvPr/>
-        </p:nvSpPr>
-        <p:spPr>
-          <a:xfrm>
-            <a:off x="1778000" y="3263900"/>
-            <a:ext cx="3302000" cy="762000"/>
-          </a:xfrm>
-          <a:prstGeom prst="rect">
-            <a:avLst/>
-          </a:prstGeom>
-          <a:noFill/>
-        </p:spPr>
-        <p:txBody>
-          <a:bodyPr wrap="square" lIns="0" rIns="0" tIns="0" bIns="0" anchor="t">
-            <a:noAutofit/>
-          </a:bodyPr>
-          <a:lstStyle/>
-          <a:p>
-            <a:pPr algn="ctr"/>
-            <a:r>
-              <a:rPr sz="1700" b="0" i="0">
-                <a:solidFill>
-                  <a:srgbClr val="5D6C73"/>
-                </a:solidFill>
-                <a:latin typeface="Corporate S"/>
-              </a:rPr>
-              <a:t>Baseline shade, identical setup</a:t>
-            </a:r>
-          </a:p>
-        </p:txBody>
-      </p:sp>
-      <p:sp>
-        <p:nvSpPr>
-          <p:cNvPr id="13" name="brief-card"/>
-          <p:cNvSpPr/>
-          <p:nvPr/>
-        </p:nvSpPr>
-        <p:spPr>
-          <a:xfrm>
-            <a:off x="5715000" y="2095500"/>
-            <a:ext cx="3810000" cy="2540000"/>
-          </a:xfrm>
-          <a:prstGeom prst="rect">
-            <a:avLst/>
-          </a:prstGeom>
-          <a:solidFill>
-            <a:srgbClr val="DEE7EC"/>
-          </a:solidFill>
-          <a:ln w="12700">
-            <a:solidFill>
-              <a:srgbClr val="ABB7BE"/>
-            </a:solidFill>
-            <a:prstDash val="dash"/>
-          </a:ln>
-        </p:spPr>
-        <p:txBody>
-          <a:bodyPr rtlCol="0" anchor="ctr"/>
-          <a:lstStyle/>
-          <a:p>
-            <a:pPr algn="ctr"/>
-          </a:p>
-        </p:txBody>
-      </p:sp>
-      <p:sp>
-        <p:nvSpPr>
-          <p:cNvPr id="14" name="brief-icon"/>
-          <p:cNvSpPr/>
-          <p:nvPr/>
-        </p:nvSpPr>
-        <p:spPr>
-          <a:xfrm>
-            <a:off x="7416800" y="2870200"/>
-            <a:ext cx="406400" cy="292100"/>
-          </a:xfrm>
-          <a:prstGeom prst="roundRect">
-            <a:avLst>
-              <a:gd name="adj" fmla="val 17391"/>
-            </a:avLst>
-          </a:prstGeom>
-          <a:solidFill>
-            <a:srgbClr val="ABB7BE"/>
-          </a:solidFill>
-          <a:ln>
-            <a:noFill/>
-          </a:ln>
-        </p:spPr>
-        <p:txBody>
-          <a:bodyPr rtlCol="0" anchor="ctr"/>
-          <a:lstStyle/>
-          <a:p>
-            <a:pPr algn="ctr"/>
-          </a:p>
-        </p:txBody>
-      </p:sp>
-      <p:sp>
-        <p:nvSpPr>
-          <p:cNvPr id="15" name="brief-icon-lens"/>
-          <p:cNvSpPr/>
-          <p:nvPr/>
-        </p:nvSpPr>
-        <p:spPr>
-          <a:xfrm>
-            <a:off x="7543800" y="2940050"/>
-            <a:ext cx="152400" cy="152400"/>
-          </a:xfrm>
-          <a:prstGeom prst="ellipse">
-            <a:avLst/>
-          </a:prstGeom>
-          <a:solidFill>
-            <a:srgbClr val="DEE7EC"/>
-          </a:solidFill>
-          <a:ln>
-            <a:noFill/>
-          </a:ln>
-        </p:spPr>
-        <p:txBody>
-          <a:bodyPr rtlCol="0" anchor="ctr"/>
-          <a:lstStyle/>
-          <a:p>
-            <a:pPr algn="ctr"/>
-          </a:p>
-        </p:txBody>
-      </p:sp>
-      <p:sp>
-        <p:nvSpPr>
-          <p:cNvPr id="16" name="brief-text"/>
-          <p:cNvSpPr txBox="1"/>
-          <p:nvPr/>
-        </p:nvSpPr>
-        <p:spPr>
-          <a:xfrm>
-            <a:off x="5969000" y="3263900"/>
-            <a:ext cx="3302000" cy="762000"/>
-          </a:xfrm>
-          <a:prstGeom prst="rect">
-            <a:avLst/>
-          </a:prstGeom>
-          <a:noFill/>
-        </p:spPr>
-        <p:txBody>
-          <a:bodyPr wrap="square" lIns="0" rIns="0" tIns="0" bIns="0" anchor="t">
-            <a:noAutofit/>
-          </a:bodyPr>
-          <a:lstStyle/>
-          <a:p>
-            <a:pPr algn="ctr"/>
-            <a:r>
-              <a:rPr sz="1700" b="0" i="0">
-                <a:solidFill>
-                  <a:srgbClr val="5D6C73"/>
-                </a:solidFill>
-                <a:latin typeface="Corporate S"/>
-              </a:rPr>
-              <a:t>Final shade, identical setup</a:t>
-            </a:r>
-          </a:p>
-        </p:txBody>
-      </p:sp>
-      <p:sp>
-        <p:nvSpPr>
-          <p:cNvPr id="7" name="Text Placeholder 6"/>
+              <a:t>Apply &amp; Activate</a:t>
+            </a:r>
+          </a:p>
+        </p:txBody>
+      </p:sp>
+      <p:sp>
+        <p:nvSpPr>
+          <p:cNvPr id="6" name="Text Placeholder 5"/>
           <p:cNvSpPr>
             <a:spLocks noGrp="1"/>
           </p:cNvSpPr>
           <p:nvPr>
-            <p:ph type="body" idx="33"/>
+            <p:ph type="body" idx="27"/>
           </p:nvPr>
         </p:nvSpPr>
         <p:spPr/>
@@ -15308,35 +15369,14 @@
           <a:lstStyle/>
           <a:p>
             <a:r>
-              <a:t>Before · baseline shade</a:t>
-            </a:r>
-          </a:p>
-        </p:txBody>
-      </p:sp>
-      <p:sp>
-        <p:nvSpPr>
-          <p:cNvPr id="8" name="Text Placeholder 7"/>
-          <p:cNvSpPr>
-            <a:spLocks noGrp="1"/>
-          </p:cNvSpPr>
-          <p:nvPr>
-            <p:ph type="body" idx="34"/>
-          </p:nvPr>
-        </p:nvSpPr>
-        <p:spPr/>
-        <p:txBody>
-          <a:bodyPr/>
-          <a:lstStyle/>
-          <a:p>
-            <a:r>
-              <a:t>After · final shade</a:t>
-            </a:r>
-          </a:p>
-        </p:txBody>
-      </p:sp>
-      <p:sp>
-        <p:nvSpPr>
-          <p:cNvPr id="17" name="rail-line"/>
+              <a:t>Repeat 3× (max 4×) — fresh gel each cycle, suction only, never rinse.</a:t>
+            </a:r>
+          </a:p>
+        </p:txBody>
+      </p:sp>
+      <p:sp>
+        <p:nvSpPr>
+          <p:cNvPr id="7" name="rail-line"/>
           <p:cNvSpPr/>
           <p:nvPr/>
         </p:nvSpPr>
@@ -15365,7 +15405,7 @@
       </p:sp>
       <p:sp>
         <p:nvSpPr>
-          <p:cNvPr id="18" name="rail-dot-1"/>
+          <p:cNvPr id="8" name="rail-dot-1"/>
           <p:cNvSpPr/>
           <p:nvPr/>
         </p:nvSpPr>
@@ -15378,7 +15418,7 @@
             <a:avLst/>
           </a:prstGeom>
           <a:solidFill>
-            <a:srgbClr val="1F272B"/>
+            <a:srgbClr val="192024"/>
           </a:solidFill>
           <a:ln w="19050">
             <a:solidFill>
@@ -15396,7 +15436,7 @@
       </p:sp>
       <p:sp>
         <p:nvSpPr>
-          <p:cNvPr id="19" name="rail-num-1"/>
+          <p:cNvPr id="9" name="rail-num-1"/>
           <p:cNvSpPr txBox="1"/>
           <p:nvPr/>
         </p:nvSpPr>
@@ -15431,7 +15471,7 @@
       </p:sp>
       <p:sp>
         <p:nvSpPr>
-          <p:cNvPr id="20" name="rail-dot-2"/>
+          <p:cNvPr id="10" name="rail-dot-2"/>
           <p:cNvSpPr/>
           <p:nvPr/>
         </p:nvSpPr>
@@ -15444,7 +15484,7 @@
             <a:avLst/>
           </a:prstGeom>
           <a:solidFill>
-            <a:srgbClr val="1F272B"/>
+            <a:srgbClr val="192024"/>
           </a:solidFill>
           <a:ln w="19050">
             <a:solidFill>
@@ -15462,7 +15502,7 @@
       </p:sp>
       <p:sp>
         <p:nvSpPr>
-          <p:cNvPr id="21" name="rail-num-2"/>
+          <p:cNvPr id="11" name="rail-num-2"/>
           <p:cNvSpPr txBox="1"/>
           <p:nvPr/>
         </p:nvSpPr>
@@ -15497,7 +15537,7 @@
       </p:sp>
       <p:sp>
         <p:nvSpPr>
-          <p:cNvPr id="22" name="rail-dot-3"/>
+          <p:cNvPr id="12" name="rail-dot-3"/>
           <p:cNvSpPr/>
           <p:nvPr/>
         </p:nvSpPr>
@@ -15510,7 +15550,7 @@
             <a:avLst/>
           </a:prstGeom>
           <a:solidFill>
-            <a:srgbClr val="1F272B"/>
+            <a:srgbClr val="192024"/>
           </a:solidFill>
           <a:ln w="19050">
             <a:solidFill>
@@ -15528,7 +15568,7 @@
       </p:sp>
       <p:sp>
         <p:nvSpPr>
-          <p:cNvPr id="23" name="rail-num-3"/>
+          <p:cNvPr id="13" name="rail-num-3"/>
           <p:cNvSpPr txBox="1"/>
           <p:nvPr/>
         </p:nvSpPr>
@@ -15563,7 +15603,7 @@
       </p:sp>
       <p:sp>
         <p:nvSpPr>
-          <p:cNvPr id="24" name="rail-dot-4"/>
+          <p:cNvPr id="14" name="rail-dot-4"/>
           <p:cNvSpPr/>
           <p:nvPr/>
         </p:nvSpPr>
@@ -15576,7 +15616,7 @@
             <a:avLst/>
           </a:prstGeom>
           <a:solidFill>
-            <a:srgbClr val="1F272B"/>
+            <a:srgbClr val="192024"/>
           </a:solidFill>
           <a:ln w="19050">
             <a:solidFill>
@@ -15594,7 +15634,7 @@
       </p:sp>
       <p:sp>
         <p:nvSpPr>
-          <p:cNvPr id="25" name="rail-num-4"/>
+          <p:cNvPr id="15" name="rail-num-4"/>
           <p:cNvSpPr txBox="1"/>
           <p:nvPr/>
         </p:nvSpPr>
@@ -15629,7 +15669,7 @@
       </p:sp>
       <p:sp>
         <p:nvSpPr>
-          <p:cNvPr id="26" name="rail-dot-5"/>
+          <p:cNvPr id="16" name="rail-dot-5"/>
           <p:cNvSpPr/>
           <p:nvPr/>
         </p:nvSpPr>
@@ -15642,7 +15682,7 @@
             <a:avLst/>
           </a:prstGeom>
           <a:solidFill>
-            <a:srgbClr val="1F272B"/>
+            <a:srgbClr val="192024"/>
           </a:solidFill>
           <a:ln w="19050">
             <a:solidFill>
@@ -15660,7 +15700,7 @@
       </p:sp>
       <p:sp>
         <p:nvSpPr>
-          <p:cNvPr id="27" name="rail-num-5"/>
+          <p:cNvPr id="17" name="rail-num-5"/>
           <p:cNvSpPr txBox="1"/>
           <p:nvPr/>
         </p:nvSpPr>
@@ -15689,41 +15729,6 @@
                 <a:latin typeface="Corporate S"/>
               </a:rPr>
               <a:t>5</a:t>
-            </a:r>
-          </a:p>
-        </p:txBody>
-      </p:sp>
-      <p:sp>
-        <p:nvSpPr>
-          <p:cNvPr id="28" name="footer"/>
-          <p:cNvSpPr txBox="1"/>
-          <p:nvPr/>
-        </p:nvSpPr>
-        <p:spPr>
-          <a:xfrm>
-            <a:off x="1524000" y="6413500"/>
-            <a:ext cx="7620000" cy="190500"/>
-          </a:xfrm>
-          <a:prstGeom prst="rect">
-            <a:avLst/>
-          </a:prstGeom>
-          <a:noFill/>
-        </p:spPr>
-        <p:txBody>
-          <a:bodyPr wrap="square" lIns="0" rIns="0" tIns="0" bIns="0" anchor="t">
-            <a:noAutofit/>
-          </a:bodyPr>
-          <a:lstStyle/>
-          <a:p>
-            <a:pPr algn="l"/>
-            <a:r>
-              <a:rPr sz="1100" b="0" i="0" cap="all" spc="176">
-                <a:solidFill>
-                  <a:srgbClr val="ABB7BE"/>
-                </a:solidFill>
-                <a:latin typeface="Corporate S"/>
-              </a:rPr>
-              <a:t>IN-OFFICE WHITENING WORKFLOW · 15</a:t>
             </a:r>
           </a:p>
         </p:txBody>
@@ -15783,7 +15788,7 @@
           <a:lstStyle/>
           <a:p>
             <a:r>
-              <a:t>Layout 16 · photo_annotated</a:t>
+              <a:t>Layout 15 · before_after</a:t>
             </a:r>
           </a:p>
         </p:txBody>
@@ -15804,637 +15809,98 @@
           <a:lstStyle/>
           <a:p>
             <a:r>
-              <a:t>The Isolation Setup</a:t>
-            </a:r>
-          </a:p>
-        </p:txBody>
-      </p:sp>
-      <p:sp>
-        <p:nvSpPr>
-          <p:cNvPr id="5" name="brief-card"/>
-          <p:cNvSpPr/>
-          <p:nvPr/>
-        </p:nvSpPr>
-        <p:spPr>
-          <a:xfrm>
-            <a:off x="1524000" y="1905000"/>
-            <a:ext cx="5715000" cy="3810000"/>
-          </a:xfrm>
-          <a:prstGeom prst="rect">
-            <a:avLst/>
-          </a:prstGeom>
-          <a:solidFill>
-            <a:srgbClr val="DEE7EC"/>
-          </a:solidFill>
-          <a:ln w="12700">
-            <a:solidFill>
-              <a:srgbClr val="ABB7BE"/>
-            </a:solidFill>
-            <a:prstDash val="dash"/>
-          </a:ln>
-        </p:spPr>
-        <p:txBody>
-          <a:bodyPr rtlCol="0" anchor="ctr"/>
-          <a:lstStyle/>
-          <a:p>
-            <a:pPr algn="ctr"/>
-          </a:p>
-        </p:txBody>
-      </p:sp>
-      <p:sp>
-        <p:nvSpPr>
-          <p:cNvPr id="6" name="brief-icon"/>
-          <p:cNvSpPr/>
-          <p:nvPr/>
-        </p:nvSpPr>
-        <p:spPr>
-          <a:xfrm>
-            <a:off x="4178300" y="3314700"/>
-            <a:ext cx="406400" cy="292100"/>
-          </a:xfrm>
-          <a:prstGeom prst="roundRect">
-            <a:avLst>
-              <a:gd name="adj" fmla="val 17391"/>
-            </a:avLst>
-          </a:prstGeom>
-          <a:solidFill>
-            <a:srgbClr val="ABB7BE"/>
-          </a:solidFill>
-          <a:ln>
-            <a:noFill/>
-          </a:ln>
-        </p:spPr>
-        <p:txBody>
-          <a:bodyPr rtlCol="0" anchor="ctr"/>
-          <a:lstStyle/>
-          <a:p>
-            <a:pPr algn="ctr"/>
-          </a:p>
-        </p:txBody>
-      </p:sp>
-      <p:sp>
-        <p:nvSpPr>
-          <p:cNvPr id="7" name="brief-icon-lens"/>
-          <p:cNvSpPr/>
-          <p:nvPr/>
-        </p:nvSpPr>
-        <p:spPr>
-          <a:xfrm>
-            <a:off x="4305300" y="3384550"/>
-            <a:ext cx="152400" cy="152400"/>
-          </a:xfrm>
-          <a:prstGeom prst="ellipse">
-            <a:avLst/>
-          </a:prstGeom>
-          <a:solidFill>
-            <a:srgbClr val="DEE7EC"/>
-          </a:solidFill>
-          <a:ln>
-            <a:noFill/>
-          </a:ln>
-        </p:spPr>
-        <p:txBody>
-          <a:bodyPr rtlCol="0" anchor="ctr"/>
-          <a:lstStyle/>
-          <a:p>
-            <a:pPr algn="ctr"/>
-          </a:p>
-        </p:txBody>
-      </p:sp>
-      <p:sp>
-        <p:nvSpPr>
-          <p:cNvPr id="8" name="brief-text"/>
-          <p:cNvSpPr txBox="1"/>
-          <p:nvPr/>
-        </p:nvSpPr>
-        <p:spPr>
-          <a:xfrm>
-            <a:off x="1778000" y="3708400"/>
-            <a:ext cx="5207000" cy="762000"/>
-          </a:xfrm>
-          <a:prstGeom prst="rect">
-            <a:avLst/>
-          </a:prstGeom>
-          <a:noFill/>
-        </p:spPr>
-        <p:txBody>
-          <a:bodyPr wrap="square" lIns="0" rIns="0" tIns="0" bIns="0" anchor="t">
-            <a:noAutofit/>
-          </a:bodyPr>
-          <a:lstStyle/>
-          <a:p>
-            <a:pPr algn="ctr"/>
-            <a:r>
-              <a:rPr sz="1700" b="0" i="0">
-                <a:solidFill>
-                  <a:srgbClr val="5D6C73"/>
-                </a:solidFill>
-                <a:latin typeface="Corporate S"/>
-              </a:rPr>
-              <a:t>Isolation setup</a:t>
-            </a:r>
-          </a:p>
-        </p:txBody>
-      </p:sp>
-      <p:sp>
-        <p:nvSpPr>
-          <p:cNvPr id="9" name="marker-1"/>
-          <p:cNvSpPr/>
-          <p:nvPr/>
-        </p:nvSpPr>
-        <p:spPr>
-          <a:xfrm>
-            <a:off x="4229100" y="2438400"/>
-            <a:ext cx="304800" cy="304800"/>
-          </a:xfrm>
-          <a:prstGeom prst="ellipse">
-            <a:avLst/>
-          </a:prstGeom>
-          <a:solidFill>
-            <a:srgbClr val="00A5FF"/>
-          </a:solidFill>
-          <a:ln w="19050">
-            <a:solidFill>
-              <a:srgbClr val="FFFFFF"/>
-            </a:solidFill>
-          </a:ln>
-          <a:effectLst>
-            <a:glow rad="127000">
-              <a:srgbClr val="00A5FF">
-                <a:alpha val="70000"/>
-              </a:srgbClr>
-            </a:glow>
-          </a:effectLst>
-        </p:spPr>
-        <p:txBody>
-          <a:bodyPr rtlCol="0" anchor="ctr" wrap="square" lIns="0" rIns="0" tIns="0" bIns="0">
-            <a:noAutofit/>
-          </a:bodyPr>
-          <a:lstStyle/>
-          <a:p>
-            <a:pPr algn="ctr"/>
-            <a:r>
-              <a:rPr sz="1800" b="0" i="0">
-                <a:solidFill>
-                  <a:srgbClr val="FFFFFF"/>
-                </a:solidFill>
-                <a:latin typeface="Corporate S"/>
-              </a:rPr>
-              <a:t>1</a:t>
-            </a:r>
-          </a:p>
-        </p:txBody>
-      </p:sp>
-      <p:sp>
-        <p:nvSpPr>
-          <p:cNvPr id="10" name="legend-num-1"/>
-          <p:cNvSpPr/>
-          <p:nvPr/>
-        </p:nvSpPr>
-        <p:spPr>
-          <a:xfrm>
-            <a:off x="7620000" y="2082800"/>
-            <a:ext cx="279400" cy="279400"/>
-          </a:xfrm>
-          <a:prstGeom prst="ellipse">
-            <a:avLst/>
-          </a:prstGeom>
-          <a:solidFill>
-            <a:srgbClr val="00A5FF"/>
-          </a:solidFill>
-          <a:ln>
-            <a:noFill/>
-          </a:ln>
-        </p:spPr>
-        <p:txBody>
-          <a:bodyPr rtlCol="0" anchor="ctr" wrap="square" lIns="0" rIns="0" tIns="0" bIns="0">
-            <a:noAutofit/>
-          </a:bodyPr>
-          <a:lstStyle/>
-          <a:p>
-            <a:pPr algn="ctr"/>
-            <a:r>
-              <a:rPr sz="1600" b="0" i="0">
-                <a:solidFill>
-                  <a:srgbClr val="FFFFFF"/>
-                </a:solidFill>
-                <a:latin typeface="Corporate S"/>
-              </a:rPr>
-              <a:t>1</a:t>
-            </a:r>
-          </a:p>
-        </p:txBody>
-      </p:sp>
-      <p:sp>
-        <p:nvSpPr>
-          <p:cNvPr id="11" name="legend-1"/>
-          <p:cNvSpPr txBox="1"/>
-          <p:nvPr/>
-        </p:nvSpPr>
-        <p:spPr>
-          <a:xfrm>
-            <a:off x="8026400" y="2032000"/>
-            <a:ext cx="3149600" cy="381000"/>
-          </a:xfrm>
-          <a:prstGeom prst="rect">
-            <a:avLst/>
-          </a:prstGeom>
-          <a:noFill/>
-        </p:spPr>
-        <p:txBody>
-          <a:bodyPr wrap="square" lIns="0" rIns="0" tIns="0" bIns="0" anchor="ctr">
-            <a:noAutofit/>
-          </a:bodyPr>
-          <a:lstStyle/>
-          <a:p>
-            <a:pPr algn="l"/>
-            <a:r>
-              <a:rPr sz="1700" b="0" i="0">
-                <a:solidFill>
-                  <a:srgbClr val="333333"/>
-                </a:solidFill>
-                <a:latin typeface="Corporate S"/>
-              </a:rPr>
-              <a:t>Filtered goggles</a:t>
-            </a:r>
-          </a:p>
-        </p:txBody>
-      </p:sp>
-      <p:sp>
-        <p:nvSpPr>
-          <p:cNvPr id="12" name="marker-2"/>
-          <p:cNvSpPr/>
-          <p:nvPr/>
-        </p:nvSpPr>
-        <p:spPr>
-          <a:xfrm>
-            <a:off x="3200400" y="3657600"/>
-            <a:ext cx="304800" cy="304800"/>
-          </a:xfrm>
-          <a:prstGeom prst="ellipse">
-            <a:avLst/>
-          </a:prstGeom>
-          <a:solidFill>
-            <a:srgbClr val="00A5FF"/>
-          </a:solidFill>
-          <a:ln w="19050">
-            <a:solidFill>
-              <a:srgbClr val="FFFFFF"/>
-            </a:solidFill>
-          </a:ln>
-          <a:effectLst>
-            <a:glow rad="127000">
-              <a:srgbClr val="00A5FF">
-                <a:alpha val="70000"/>
-              </a:srgbClr>
-            </a:glow>
-          </a:effectLst>
-        </p:spPr>
-        <p:txBody>
-          <a:bodyPr rtlCol="0" anchor="ctr" wrap="square" lIns="0" rIns="0" tIns="0" bIns="0">
-            <a:noAutofit/>
-          </a:bodyPr>
-          <a:lstStyle/>
-          <a:p>
-            <a:pPr algn="ctr"/>
-            <a:r>
-              <a:rPr sz="1800" b="0" i="0">
-                <a:solidFill>
-                  <a:srgbClr val="FFFFFF"/>
-                </a:solidFill>
-                <a:latin typeface="Corporate S"/>
-              </a:rPr>
-              <a:t>2</a:t>
-            </a:r>
-          </a:p>
-        </p:txBody>
-      </p:sp>
-      <p:sp>
-        <p:nvSpPr>
-          <p:cNvPr id="13" name="legend-num-2"/>
-          <p:cNvSpPr/>
-          <p:nvPr/>
-        </p:nvSpPr>
-        <p:spPr>
-          <a:xfrm>
-            <a:off x="7620000" y="2565400"/>
-            <a:ext cx="279400" cy="279400"/>
-          </a:xfrm>
-          <a:prstGeom prst="ellipse">
-            <a:avLst/>
-          </a:prstGeom>
-          <a:solidFill>
-            <a:srgbClr val="00A5FF"/>
-          </a:solidFill>
-          <a:ln>
-            <a:noFill/>
-          </a:ln>
-        </p:spPr>
-        <p:txBody>
-          <a:bodyPr rtlCol="0" anchor="ctr" wrap="square" lIns="0" rIns="0" tIns="0" bIns="0">
-            <a:noAutofit/>
-          </a:bodyPr>
-          <a:lstStyle/>
-          <a:p>
-            <a:pPr algn="ctr"/>
-            <a:r>
-              <a:rPr sz="1600" b="0" i="0">
-                <a:solidFill>
-                  <a:srgbClr val="FFFFFF"/>
-                </a:solidFill>
-                <a:latin typeface="Corporate S"/>
-              </a:rPr>
-              <a:t>2</a:t>
-            </a:r>
-          </a:p>
-        </p:txBody>
-      </p:sp>
-      <p:sp>
-        <p:nvSpPr>
-          <p:cNvPr id="14" name="legend-2"/>
-          <p:cNvSpPr txBox="1"/>
-          <p:nvPr/>
-        </p:nvSpPr>
-        <p:spPr>
-          <a:xfrm>
-            <a:off x="8026400" y="2514600"/>
-            <a:ext cx="3149600" cy="381000"/>
-          </a:xfrm>
-          <a:prstGeom prst="rect">
-            <a:avLst/>
-          </a:prstGeom>
-          <a:noFill/>
-        </p:spPr>
-        <p:txBody>
-          <a:bodyPr wrap="square" lIns="0" rIns="0" tIns="0" bIns="0" anchor="ctr">
-            <a:noAutofit/>
-          </a:bodyPr>
-          <a:lstStyle/>
-          <a:p>
-            <a:pPr algn="l"/>
-            <a:r>
-              <a:rPr sz="1700" b="0" i="0">
-                <a:solidFill>
-                  <a:srgbClr val="333333"/>
-                </a:solidFill>
-                <a:latin typeface="Corporate S"/>
-              </a:rPr>
-              <a:t>Retractor docked on the lamp</a:t>
-            </a:r>
-          </a:p>
-        </p:txBody>
-      </p:sp>
-      <p:sp>
-        <p:nvSpPr>
-          <p:cNvPr id="15" name="marker-3"/>
-          <p:cNvSpPr/>
-          <p:nvPr/>
-        </p:nvSpPr>
-        <p:spPr>
-          <a:xfrm>
-            <a:off x="5257800" y="4114800"/>
-            <a:ext cx="304800" cy="304800"/>
-          </a:xfrm>
-          <a:prstGeom prst="ellipse">
-            <a:avLst/>
-          </a:prstGeom>
-          <a:solidFill>
-            <a:srgbClr val="00A5FF"/>
-          </a:solidFill>
-          <a:ln w="19050">
-            <a:solidFill>
-              <a:srgbClr val="FFFFFF"/>
-            </a:solidFill>
-          </a:ln>
-          <a:effectLst>
-            <a:glow rad="127000">
-              <a:srgbClr val="00A5FF">
-                <a:alpha val="70000"/>
-              </a:srgbClr>
-            </a:glow>
-          </a:effectLst>
-        </p:spPr>
-        <p:txBody>
-          <a:bodyPr rtlCol="0" anchor="ctr" wrap="square" lIns="0" rIns="0" tIns="0" bIns="0">
-            <a:noAutofit/>
-          </a:bodyPr>
-          <a:lstStyle/>
-          <a:p>
-            <a:pPr algn="ctr"/>
-            <a:r>
-              <a:rPr sz="1800" b="0" i="0">
-                <a:solidFill>
-                  <a:srgbClr val="FFFFFF"/>
-                </a:solidFill>
-                <a:latin typeface="Corporate S"/>
-              </a:rPr>
-              <a:t>3</a:t>
-            </a:r>
-          </a:p>
-        </p:txBody>
-      </p:sp>
-      <p:sp>
-        <p:nvSpPr>
-          <p:cNvPr id="16" name="legend-num-3"/>
-          <p:cNvSpPr/>
-          <p:nvPr/>
-        </p:nvSpPr>
-        <p:spPr>
-          <a:xfrm>
-            <a:off x="7620000" y="3048000"/>
-            <a:ext cx="279400" cy="279400"/>
-          </a:xfrm>
-          <a:prstGeom prst="ellipse">
-            <a:avLst/>
-          </a:prstGeom>
-          <a:solidFill>
-            <a:srgbClr val="00A5FF"/>
-          </a:solidFill>
-          <a:ln>
-            <a:noFill/>
-          </a:ln>
-        </p:spPr>
-        <p:txBody>
-          <a:bodyPr rtlCol="0" anchor="ctr" wrap="square" lIns="0" rIns="0" tIns="0" bIns="0">
-            <a:noAutofit/>
-          </a:bodyPr>
-          <a:lstStyle/>
-          <a:p>
-            <a:pPr algn="ctr"/>
-            <a:r>
-              <a:rPr sz="1600" b="0" i="0">
-                <a:solidFill>
-                  <a:srgbClr val="FFFFFF"/>
-                </a:solidFill>
-                <a:latin typeface="Corporate S"/>
-              </a:rPr>
-              <a:t>3</a:t>
-            </a:r>
-          </a:p>
-        </p:txBody>
-      </p:sp>
-      <p:sp>
-        <p:nvSpPr>
-          <p:cNvPr id="17" name="legend-3"/>
-          <p:cNvSpPr txBox="1"/>
-          <p:nvPr/>
-        </p:nvSpPr>
-        <p:spPr>
-          <a:xfrm>
-            <a:off x="8026400" y="2997200"/>
-            <a:ext cx="3149600" cy="381000"/>
-          </a:xfrm>
-          <a:prstGeom prst="rect">
-            <a:avLst/>
-          </a:prstGeom>
-          <a:noFill/>
-        </p:spPr>
-        <p:txBody>
-          <a:bodyPr wrap="square" lIns="0" rIns="0" tIns="0" bIns="0" anchor="ctr">
-            <a:noAutofit/>
-          </a:bodyPr>
-          <a:lstStyle/>
-          <a:p>
-            <a:pPr algn="l"/>
-            <a:r>
-              <a:rPr sz="1700" b="0" i="0">
-                <a:solidFill>
-                  <a:srgbClr val="333333"/>
-                </a:solidFill>
-                <a:latin typeface="Corporate S"/>
-              </a:rPr>
-              <a:t>Lip protection</a:t>
-            </a:r>
-          </a:p>
-        </p:txBody>
-      </p:sp>
-      <p:sp>
-        <p:nvSpPr>
-          <p:cNvPr id="18" name="marker-4"/>
-          <p:cNvSpPr/>
-          <p:nvPr/>
-        </p:nvSpPr>
-        <p:spPr>
-          <a:xfrm>
-            <a:off x="4229100" y="4800600"/>
-            <a:ext cx="304800" cy="304800"/>
-          </a:xfrm>
-          <a:prstGeom prst="ellipse">
-            <a:avLst/>
-          </a:prstGeom>
-          <a:solidFill>
-            <a:srgbClr val="00A5FF"/>
-          </a:solidFill>
-          <a:ln w="19050">
-            <a:solidFill>
-              <a:srgbClr val="FFFFFF"/>
-            </a:solidFill>
-          </a:ln>
-          <a:effectLst>
-            <a:glow rad="127000">
-              <a:srgbClr val="00A5FF">
-                <a:alpha val="70000"/>
-              </a:srgbClr>
-            </a:glow>
-          </a:effectLst>
-        </p:spPr>
-        <p:txBody>
-          <a:bodyPr rtlCol="0" anchor="ctr" wrap="square" lIns="0" rIns="0" tIns="0" bIns="0">
-            <a:noAutofit/>
-          </a:bodyPr>
-          <a:lstStyle/>
-          <a:p>
-            <a:pPr algn="ctr"/>
-            <a:r>
-              <a:rPr sz="1800" b="0" i="0">
-                <a:solidFill>
-                  <a:srgbClr val="FFFFFF"/>
-                </a:solidFill>
-                <a:latin typeface="Corporate S"/>
-              </a:rPr>
-              <a:t>4</a:t>
-            </a:r>
-          </a:p>
-        </p:txBody>
-      </p:sp>
-      <p:sp>
-        <p:nvSpPr>
-          <p:cNvPr id="19" name="legend-num-4"/>
-          <p:cNvSpPr/>
-          <p:nvPr/>
-        </p:nvSpPr>
-        <p:spPr>
-          <a:xfrm>
-            <a:off x="7620000" y="3530600"/>
-            <a:ext cx="279400" cy="279400"/>
-          </a:xfrm>
-          <a:prstGeom prst="ellipse">
-            <a:avLst/>
-          </a:prstGeom>
-          <a:solidFill>
-            <a:srgbClr val="00A5FF"/>
-          </a:solidFill>
-          <a:ln>
-            <a:noFill/>
-          </a:ln>
-        </p:spPr>
-        <p:txBody>
-          <a:bodyPr rtlCol="0" anchor="ctr" wrap="square" lIns="0" rIns="0" tIns="0" bIns="0">
-            <a:noAutofit/>
-          </a:bodyPr>
-          <a:lstStyle/>
-          <a:p>
-            <a:pPr algn="ctr"/>
-            <a:r>
-              <a:rPr sz="1600" b="0" i="0">
-                <a:solidFill>
-                  <a:srgbClr val="FFFFFF"/>
-                </a:solidFill>
-                <a:latin typeface="Corporate S"/>
-              </a:rPr>
-              <a:t>4</a:t>
-            </a:r>
-          </a:p>
-        </p:txBody>
-      </p:sp>
-      <p:sp>
-        <p:nvSpPr>
-          <p:cNvPr id="20" name="legend-4"/>
-          <p:cNvSpPr txBox="1"/>
-          <p:nvPr/>
-        </p:nvSpPr>
-        <p:spPr>
-          <a:xfrm>
-            <a:off x="8026400" y="3479800"/>
-            <a:ext cx="3149600" cy="381000"/>
-          </a:xfrm>
-          <a:prstGeom prst="rect">
-            <a:avLst/>
-          </a:prstGeom>
-          <a:noFill/>
-        </p:spPr>
-        <p:txBody>
-          <a:bodyPr wrap="square" lIns="0" rIns="0" tIns="0" bIns="0" anchor="ctr">
-            <a:noAutofit/>
-          </a:bodyPr>
-          <a:lstStyle/>
-          <a:p>
-            <a:pPr algn="l"/>
-            <a:r>
-              <a:rPr sz="1700" b="0" i="0">
-                <a:solidFill>
-                  <a:srgbClr val="333333"/>
-                </a:solidFill>
-                <a:latin typeface="Corporate S"/>
-              </a:rPr>
-              <a:t>Cured gingiva barrier</a:t>
-            </a:r>
-          </a:p>
-        </p:txBody>
-      </p:sp>
-      <p:sp>
-        <p:nvSpPr>
-          <p:cNvPr id="21" name="rail-line"/>
+              <a:t>Clean Before You Whiten</a:t>
+            </a:r>
+          </a:p>
+        </p:txBody>
+      </p:sp>
+      <p:pic>
+        <p:nvPicPr>
+          <p:cNvPr id="5" name="Picture Placeholder 4" descr="prophylaxis-before.jpg"/>
+          <p:cNvPicPr>
+            <a:picLocks noGrp="1" noChangeAspect="1"/>
+          </p:cNvPicPr>
+          <p:nvPr>
+            <p:ph type="pic" idx="31"/>
+          </p:nvPr>
+        </p:nvPicPr>
+        <p:blipFill>
+          <a:blip r:embed="rId2"/>
+          <a:srcRect l="2878" r="2878"/>
+          <a:stretch>
+            <a:fillRect/>
+          </a:stretch>
+        </p:blipFill>
+        <p:spPr>
+          <a:noFill/>
+        </p:spPr>
+      </p:pic>
+      <p:pic>
+        <p:nvPicPr>
+          <p:cNvPr id="6" name="Picture Placeholder 5" descr="prophylaxis-after.jpg"/>
+          <p:cNvPicPr>
+            <a:picLocks noGrp="1" noChangeAspect="1"/>
+          </p:cNvPicPr>
+          <p:nvPr>
+            <p:ph type="pic" idx="32"/>
+          </p:nvPr>
+        </p:nvPicPr>
+        <p:blipFill>
+          <a:blip r:embed="rId3"/>
+          <a:srcRect t="8992" b="8992"/>
+          <a:stretch>
+            <a:fillRect/>
+          </a:stretch>
+        </p:blipFill>
+        <p:spPr>
+          <a:noFill/>
+        </p:spPr>
+      </p:pic>
+      <p:sp>
+        <p:nvSpPr>
+          <p:cNvPr id="7" name="Text Placeholder 6"/>
+          <p:cNvSpPr>
+            <a:spLocks noGrp="1"/>
+          </p:cNvSpPr>
+          <p:nvPr>
+            <p:ph type="body" idx="33"/>
+          </p:nvPr>
+        </p:nvSpPr>
+        <p:spPr/>
+        <p:txBody>
+          <a:bodyPr/>
+          <a:lstStyle/>
+          <a:p>
+            <a:r>
+              <a:t>Before prophylaxis</a:t>
+            </a:r>
+          </a:p>
+        </p:txBody>
+      </p:sp>
+      <p:sp>
+        <p:nvSpPr>
+          <p:cNvPr id="8" name="Text Placeholder 7"/>
+          <p:cNvSpPr>
+            <a:spLocks noGrp="1"/>
+          </p:cNvSpPr>
+          <p:nvPr>
+            <p:ph type="body" idx="34"/>
+          </p:nvPr>
+        </p:nvSpPr>
+        <p:spPr/>
+        <p:txBody>
+          <a:bodyPr/>
+          <a:lstStyle/>
+          <a:p>
+            <a:r>
+              <a:t>After prophylaxis</a:t>
+            </a:r>
+          </a:p>
+        </p:txBody>
+      </p:sp>
+      <p:sp>
+        <p:nvSpPr>
+          <p:cNvPr id="9" name="rail-line"/>
           <p:cNvSpPr/>
           <p:nvPr/>
         </p:nvSpPr>
@@ -16463,7 +15929,7 @@
       </p:sp>
       <p:sp>
         <p:nvSpPr>
-          <p:cNvPr id="22" name="rail-dot-1"/>
+          <p:cNvPr id="10" name="rail-dot-1"/>
           <p:cNvSpPr/>
           <p:nvPr/>
         </p:nvSpPr>
@@ -16494,7 +15960,7 @@
       </p:sp>
       <p:sp>
         <p:nvSpPr>
-          <p:cNvPr id="23" name="rail-num-1"/>
+          <p:cNvPr id="11" name="rail-num-1"/>
           <p:cNvSpPr txBox="1"/>
           <p:nvPr/>
         </p:nvSpPr>
@@ -16529,7 +15995,7 @@
       </p:sp>
       <p:sp>
         <p:nvSpPr>
-          <p:cNvPr id="24" name="rail-dot-2"/>
+          <p:cNvPr id="12" name="rail-dot-2"/>
           <p:cNvSpPr/>
           <p:nvPr/>
         </p:nvSpPr>
@@ -16560,7 +16026,7 @@
       </p:sp>
       <p:sp>
         <p:nvSpPr>
-          <p:cNvPr id="25" name="rail-num-2"/>
+          <p:cNvPr id="13" name="rail-num-2"/>
           <p:cNvSpPr txBox="1"/>
           <p:nvPr/>
         </p:nvSpPr>
@@ -16595,7 +16061,7 @@
       </p:sp>
       <p:sp>
         <p:nvSpPr>
-          <p:cNvPr id="26" name="rail-dot-3"/>
+          <p:cNvPr id="14" name="rail-dot-3"/>
           <p:cNvSpPr/>
           <p:nvPr/>
         </p:nvSpPr>
@@ -16626,7 +16092,7 @@
       </p:sp>
       <p:sp>
         <p:nvSpPr>
-          <p:cNvPr id="27" name="rail-num-3"/>
+          <p:cNvPr id="15" name="rail-num-3"/>
           <p:cNvSpPr txBox="1"/>
           <p:nvPr/>
         </p:nvSpPr>
@@ -16661,7 +16127,7 @@
       </p:sp>
       <p:sp>
         <p:nvSpPr>
-          <p:cNvPr id="28" name="rail-dot-4"/>
+          <p:cNvPr id="16" name="rail-dot-4"/>
           <p:cNvSpPr/>
           <p:nvPr/>
         </p:nvSpPr>
@@ -16692,7 +16158,7 @@
       </p:sp>
       <p:sp>
         <p:nvSpPr>
-          <p:cNvPr id="29" name="rail-num-4"/>
+          <p:cNvPr id="17" name="rail-num-4"/>
           <p:cNvSpPr txBox="1"/>
           <p:nvPr/>
         </p:nvSpPr>
@@ -16727,7 +16193,7 @@
       </p:sp>
       <p:sp>
         <p:nvSpPr>
-          <p:cNvPr id="30" name="rail-dot-5"/>
+          <p:cNvPr id="18" name="rail-dot-5"/>
           <p:cNvSpPr/>
           <p:nvPr/>
         </p:nvSpPr>
@@ -16758,7 +16224,7 @@
       </p:sp>
       <p:sp>
         <p:nvSpPr>
-          <p:cNvPr id="31" name="rail-num-5"/>
+          <p:cNvPr id="19" name="rail-num-5"/>
           <p:cNvSpPr txBox="1"/>
           <p:nvPr/>
         </p:nvSpPr>
@@ -16793,7 +16259,7 @@
       </p:sp>
       <p:sp>
         <p:nvSpPr>
-          <p:cNvPr id="32" name="footer"/>
+          <p:cNvPr id="20" name="footer"/>
           <p:cNvSpPr txBox="1"/>
           <p:nvPr/>
         </p:nvSpPr>
@@ -16881,7 +16347,7 @@
           <a:lstStyle/>
           <a:p>
             <a:r>
-              <a:t>Layout 17 · case</a:t>
+              <a:t>Layout 16 · photo_annotated</a:t>
             </a:r>
           </a:p>
         </p:txBody>
@@ -16902,149 +16368,93 @@
           <a:lstStyle/>
           <a:p>
             <a:r>
-              <a:t>“The Uneven Case”</a:t>
-            </a:r>
-          </a:p>
-        </p:txBody>
-      </p:sp>
-      <p:sp>
-        <p:nvSpPr>
-          <p:cNvPr id="5" name="Text Placeholder 4"/>
-          <p:cNvSpPr>
-            <a:spLocks noGrp="1"/>
-          </p:cNvSpPr>
+              <a:t>The Isolation Setup</a:t>
+            </a:r>
+          </a:p>
+        </p:txBody>
+      </p:sp>
+      <p:pic>
+        <p:nvPicPr>
+          <p:cNvPr id="5" name="Picture Placeholder 4" descr="04-light-cure-gingiva-protector.jpg"/>
+          <p:cNvPicPr>
+            <a:picLocks noGrp="1" noChangeAspect="1"/>
+          </p:cNvPicPr>
           <p:nvPr>
-            <p:ph type="body" idx="35"/>
+            <p:ph type="pic" idx="15"/>
           </p:nvPr>
-        </p:nvSpPr>
-        <p:spPr/>
-        <p:txBody>
-          <a:bodyPr/>
-          <a:lstStyle/>
-          <a:p>
-            <a:r>
-              <a:t>A 38-year-old at the end of cycle 3 — centrals magnificent, cervical thirds still yellow, canines two steps behind, chalky patches on the laterals. She is holding the mirror.</a:t>
-            </a:r>
-          </a:p>
-        </p:txBody>
-      </p:sp>
-      <p:sp>
-        <p:nvSpPr>
-          <p:cNvPr id="6" name="finding-head"/>
-          <p:cNvSpPr txBox="1"/>
-          <p:nvPr/>
-        </p:nvSpPr>
-        <p:spPr>
-          <a:xfrm>
-            <a:off x="1524000" y="3276600"/>
-            <a:ext cx="3556000" cy="190500"/>
-          </a:xfrm>
-          <a:prstGeom prst="rect">
-            <a:avLst/>
-          </a:prstGeom>
-          <a:noFill/>
-        </p:spPr>
-        <p:txBody>
-          <a:bodyPr wrap="square" lIns="0" rIns="0" tIns="0" bIns="0" anchor="t">
-            <a:noAutofit/>
-          </a:bodyPr>
-          <a:lstStyle/>
-          <a:p>
-            <a:pPr algn="l"/>
-            <a:r>
-              <a:rPr sz="1100" b="0" i="0" cap="all" spc="176">
-                <a:solidFill>
-                  <a:srgbClr val="00A5FF"/>
-                </a:solidFill>
-                <a:latin typeface="Corporate S"/>
-              </a:rPr>
-              <a:t>Finding</a:t>
-            </a:r>
-          </a:p>
-        </p:txBody>
-      </p:sp>
-      <p:sp>
-        <p:nvSpPr>
-          <p:cNvPr id="7" name="cause-head"/>
-          <p:cNvSpPr txBox="1"/>
-          <p:nvPr/>
-        </p:nvSpPr>
-        <p:spPr>
-          <a:xfrm>
-            <a:off x="5588000" y="3276600"/>
-            <a:ext cx="3937000" cy="190500"/>
-          </a:xfrm>
-          <a:prstGeom prst="rect">
-            <a:avLst/>
-          </a:prstGeom>
-          <a:noFill/>
-        </p:spPr>
-        <p:txBody>
-          <a:bodyPr wrap="square" lIns="0" rIns="0" tIns="0" bIns="0" anchor="t">
-            <a:noAutofit/>
-          </a:bodyPr>
-          <a:lstStyle/>
-          <a:p>
-            <a:pPr algn="l"/>
-            <a:r>
-              <a:rPr sz="1100" b="0" i="0" cap="all" spc="176">
-                <a:solidFill>
-                  <a:srgbClr val="00A5FF"/>
-                </a:solidFill>
-                <a:latin typeface="Corporate S"/>
-              </a:rPr>
-              <a:t>Cause</a:t>
-            </a:r>
-          </a:p>
-        </p:txBody>
-      </p:sp>
-      <p:sp>
-        <p:nvSpPr>
-          <p:cNvPr id="8" name="finding-1"/>
-          <p:cNvSpPr txBox="1"/>
-          <p:nvPr/>
-        </p:nvSpPr>
-        <p:spPr>
-          <a:xfrm>
-            <a:off x="1524000" y="3556000"/>
-            <a:ext cx="3556000" cy="406400"/>
-          </a:xfrm>
-          <a:prstGeom prst="rect">
-            <a:avLst/>
-          </a:prstGeom>
-          <a:noFill/>
-        </p:spPr>
-        <p:txBody>
-          <a:bodyPr wrap="square" lIns="0" rIns="0" tIns="0" bIns="0" anchor="ctr">
-            <a:noAutofit/>
-          </a:bodyPr>
-          <a:lstStyle/>
-          <a:p>
-            <a:pPr algn="l"/>
-            <a:r>
-              <a:rPr sz="1700" b="0" i="0">
-                <a:solidFill>
-                  <a:srgbClr val="5D6C73"/>
-                </a:solidFill>
-                <a:latin typeface="Corporate S"/>
-              </a:rPr>
-              <a:t>Cervical thirds still yellow</a:t>
-            </a:r>
-          </a:p>
-        </p:txBody>
-      </p:sp>
-      <p:sp>
-        <p:nvSpPr>
-          <p:cNvPr id="9" name="arrow-1"/>
+        </p:nvPicPr>
+        <p:blipFill>
+          <a:blip r:embed="rId2"/>
+          <a:srcRect l="7812" r="7812"/>
+          <a:stretch>
+            <a:fillRect/>
+          </a:stretch>
+        </p:blipFill>
+        <p:spPr>
+          <a:noFill/>
+        </p:spPr>
+      </p:pic>
+      <p:sp>
+        <p:nvSpPr>
+          <p:cNvPr id="6" name="marker-1"/>
           <p:cNvSpPr/>
           <p:nvPr/>
         </p:nvSpPr>
         <p:spPr>
           <a:xfrm>
-            <a:off x="5207000" y="3683000"/>
-            <a:ext cx="254000" cy="152400"/>
-          </a:xfrm>
-          <a:prstGeom prst="rightArrow">
+            <a:off x="6057900" y="2590800"/>
+            <a:ext cx="304800" cy="304800"/>
+          </a:xfrm>
+          <a:prstGeom prst="ellipse">
+            <a:avLst/>
+          </a:prstGeom>
+          <a:solidFill>
+            <a:srgbClr val="00A5FF"/>
+          </a:solidFill>
+          <a:ln w="19050">
+            <a:solidFill>
+              <a:srgbClr val="FFFFFF"/>
+            </a:solidFill>
+          </a:ln>
+          <a:effectLst>
+            <a:glow rad="127000">
+              <a:srgbClr val="00A5FF">
+                <a:alpha val="70000"/>
+              </a:srgbClr>
+            </a:glow>
+          </a:effectLst>
+        </p:spPr>
+        <p:txBody>
+          <a:bodyPr rtlCol="0" anchor="ctr" wrap="square" lIns="0" rIns="0" tIns="0" bIns="0">
+            <a:noAutofit/>
+          </a:bodyPr>
+          <a:lstStyle/>
+          <a:p>
+            <a:pPr algn="ctr"/>
+            <a:r>
+              <a:rPr sz="1800" b="0" i="0">
+                <a:solidFill>
+                  <a:srgbClr val="FFFFFF"/>
+                </a:solidFill>
+                <a:latin typeface="Corporate S"/>
+              </a:rPr>
+              <a:t>1</a:t>
+            </a:r>
+          </a:p>
+        </p:txBody>
+      </p:sp>
+      <p:sp>
+        <p:nvSpPr>
+          <p:cNvPr id="7" name="legend-num-1"/>
+          <p:cNvSpPr/>
+          <p:nvPr/>
+        </p:nvSpPr>
+        <p:spPr>
+          <a:xfrm>
+            <a:off x="7620000" y="2082800"/>
+            <a:ext cx="279400" cy="279400"/>
+          </a:xfrm>
+          <a:prstGeom prst="ellipse">
             <a:avLst/>
           </a:prstGeom>
           <a:solidFill>
@@ -17055,23 +16465,34 @@
           </a:ln>
         </p:spPr>
         <p:txBody>
-          <a:bodyPr rtlCol="0" anchor="ctr"/>
+          <a:bodyPr rtlCol="0" anchor="ctr" wrap="square" lIns="0" rIns="0" tIns="0" bIns="0">
+            <a:noAutofit/>
+          </a:bodyPr>
           <a:lstStyle/>
           <a:p>
             <a:pPr algn="ctr"/>
-          </a:p>
-        </p:txBody>
-      </p:sp>
-      <p:sp>
-        <p:nvSpPr>
-          <p:cNvPr id="10" name="cause-1"/>
+            <a:r>
+              <a:rPr sz="1600" b="0" i="0">
+                <a:solidFill>
+                  <a:srgbClr val="FFFFFF"/>
+                </a:solidFill>
+                <a:latin typeface="Corporate S"/>
+              </a:rPr>
+              <a:t>1</a:t>
+            </a:r>
+          </a:p>
+        </p:txBody>
+      </p:sp>
+      <p:sp>
+        <p:nvSpPr>
+          <p:cNvPr id="8" name="legend-1"/>
           <p:cNvSpPr txBox="1"/>
           <p:nvPr/>
         </p:nvSpPr>
         <p:spPr>
           <a:xfrm>
-            <a:off x="5588000" y="3556000"/>
-            <a:ext cx="3937000" cy="406400"/>
+            <a:off x="8026400" y="2032000"/>
+            <a:ext cx="3149600" cy="381000"/>
           </a:xfrm>
           <a:prstGeom prst="rect">
             <a:avLst/>
@@ -17092,58 +16513,72 @@
                 </a:solidFill>
                 <a:latin typeface="Corporate S"/>
               </a:rPr>
-              <a:t>Barrier over-extended onto cervical enamel</a:t>
-            </a:r>
-          </a:p>
-        </p:txBody>
-      </p:sp>
-      <p:sp>
-        <p:nvSpPr>
-          <p:cNvPr id="11" name="finding-2"/>
-          <p:cNvSpPr txBox="1"/>
-          <p:nvPr/>
-        </p:nvSpPr>
-        <p:spPr>
-          <a:xfrm>
-            <a:off x="1524000" y="4013200"/>
-            <a:ext cx="3556000" cy="406400"/>
-          </a:xfrm>
-          <a:prstGeom prst="rect">
-            <a:avLst/>
-          </a:prstGeom>
-          <a:noFill/>
-        </p:spPr>
-        <p:txBody>
-          <a:bodyPr wrap="square" lIns="0" rIns="0" tIns="0" bIns="0" anchor="ctr">
-            <a:noAutofit/>
-          </a:bodyPr>
-          <a:lstStyle/>
-          <a:p>
-            <a:pPr algn="l"/>
-            <a:r>
-              <a:rPr sz="1700" b="0" i="0">
-                <a:solidFill>
-                  <a:srgbClr val="5D6C73"/>
-                </a:solidFill>
-                <a:latin typeface="Corporate S"/>
-              </a:rPr>
-              <a:t>Patchy brightness</a:t>
-            </a:r>
-          </a:p>
-        </p:txBody>
-      </p:sp>
-      <p:sp>
-        <p:nvSpPr>
-          <p:cNvPr id="12" name="arrow-2"/>
+              <a:t>Filtered goggles</a:t>
+            </a:r>
+          </a:p>
+        </p:txBody>
+      </p:sp>
+      <p:sp>
+        <p:nvSpPr>
+          <p:cNvPr id="9" name="marker-2"/>
           <p:cNvSpPr/>
           <p:nvPr/>
         </p:nvSpPr>
         <p:spPr>
           <a:xfrm>
-            <a:off x="5207000" y="4140200"/>
-            <a:ext cx="254000" cy="152400"/>
-          </a:xfrm>
-          <a:prstGeom prst="rightArrow">
+            <a:off x="2628900" y="2743200"/>
+            <a:ext cx="304800" cy="304800"/>
+          </a:xfrm>
+          <a:prstGeom prst="ellipse">
+            <a:avLst/>
+          </a:prstGeom>
+          <a:solidFill>
+            <a:srgbClr val="00A5FF"/>
+          </a:solidFill>
+          <a:ln w="19050">
+            <a:solidFill>
+              <a:srgbClr val="FFFFFF"/>
+            </a:solidFill>
+          </a:ln>
+          <a:effectLst>
+            <a:glow rad="127000">
+              <a:srgbClr val="00A5FF">
+                <a:alpha val="70000"/>
+              </a:srgbClr>
+            </a:glow>
+          </a:effectLst>
+        </p:spPr>
+        <p:txBody>
+          <a:bodyPr rtlCol="0" anchor="ctr" wrap="square" lIns="0" rIns="0" tIns="0" bIns="0">
+            <a:noAutofit/>
+          </a:bodyPr>
+          <a:lstStyle/>
+          <a:p>
+            <a:pPr algn="ctr"/>
+            <a:r>
+              <a:rPr sz="1800" b="0" i="0">
+                <a:solidFill>
+                  <a:srgbClr val="FFFFFF"/>
+                </a:solidFill>
+                <a:latin typeface="Corporate S"/>
+              </a:rPr>
+              <a:t>2</a:t>
+            </a:r>
+          </a:p>
+        </p:txBody>
+      </p:sp>
+      <p:sp>
+        <p:nvSpPr>
+          <p:cNvPr id="10" name="legend-num-2"/>
+          <p:cNvSpPr/>
+          <p:nvPr/>
+        </p:nvSpPr>
+        <p:spPr>
+          <a:xfrm>
+            <a:off x="7620000" y="2565400"/>
+            <a:ext cx="279400" cy="279400"/>
+          </a:xfrm>
+          <a:prstGeom prst="ellipse">
             <a:avLst/>
           </a:prstGeom>
           <a:solidFill>
@@ -17154,23 +16589,34 @@
           </a:ln>
         </p:spPr>
         <p:txBody>
-          <a:bodyPr rtlCol="0" anchor="ctr"/>
+          <a:bodyPr rtlCol="0" anchor="ctr" wrap="square" lIns="0" rIns="0" tIns="0" bIns="0">
+            <a:noAutofit/>
+          </a:bodyPr>
           <a:lstStyle/>
           <a:p>
             <a:pPr algn="ctr"/>
-          </a:p>
-        </p:txBody>
-      </p:sp>
-      <p:sp>
-        <p:nvSpPr>
-          <p:cNvPr id="13" name="cause-2"/>
+            <a:r>
+              <a:rPr sz="1600" b="0" i="0">
+                <a:solidFill>
+                  <a:srgbClr val="FFFFFF"/>
+                </a:solidFill>
+                <a:latin typeface="Corporate S"/>
+              </a:rPr>
+              <a:t>2</a:t>
+            </a:r>
+          </a:p>
+        </p:txBody>
+      </p:sp>
+      <p:sp>
+        <p:nvSpPr>
+          <p:cNvPr id="11" name="legend-2"/>
           <p:cNvSpPr txBox="1"/>
           <p:nvPr/>
         </p:nvSpPr>
         <p:spPr>
           <a:xfrm>
-            <a:off x="5588000" y="4013200"/>
-            <a:ext cx="3937000" cy="406400"/>
+            <a:off x="8026400" y="2514600"/>
+            <a:ext cx="3149600" cy="381000"/>
           </a:xfrm>
           <a:prstGeom prst="rect">
             <a:avLst/>
@@ -17191,58 +16637,72 @@
                 </a:solidFill>
                 <a:latin typeface="Corporate S"/>
               </a:rPr>
-              <a:t>Gel layer below 1 mm in zones — Sin #5</a:t>
-            </a:r>
-          </a:p>
-        </p:txBody>
-      </p:sp>
-      <p:sp>
-        <p:nvSpPr>
-          <p:cNvPr id="14" name="finding-3"/>
-          <p:cNvSpPr txBox="1"/>
-          <p:nvPr/>
-        </p:nvSpPr>
-        <p:spPr>
-          <a:xfrm>
-            <a:off x="1524000" y="4470400"/>
-            <a:ext cx="3556000" cy="406400"/>
-          </a:xfrm>
-          <a:prstGeom prst="rect">
-            <a:avLst/>
-          </a:prstGeom>
-          <a:noFill/>
-        </p:spPr>
-        <p:txBody>
-          <a:bodyPr wrap="square" lIns="0" rIns="0" tIns="0" bIns="0" anchor="ctr">
-            <a:noAutofit/>
-          </a:bodyPr>
-          <a:lstStyle/>
-          <a:p>
-            <a:pPr algn="l"/>
-            <a:r>
-              <a:rPr sz="1700" b="0" i="0">
-                <a:solidFill>
-                  <a:srgbClr val="5D6C73"/>
-                </a:solidFill>
-                <a:latin typeface="Corporate S"/>
-              </a:rPr>
-              <a:t>Everything underperforming</a:t>
-            </a:r>
-          </a:p>
-        </p:txBody>
-      </p:sp>
-      <p:sp>
-        <p:nvSpPr>
-          <p:cNvPr id="15" name="arrow-3"/>
+              <a:t>Curing light</a:t>
+            </a:r>
+          </a:p>
+        </p:txBody>
+      </p:sp>
+      <p:sp>
+        <p:nvSpPr>
+          <p:cNvPr id="12" name="marker-3"/>
           <p:cNvSpPr/>
           <p:nvPr/>
         </p:nvSpPr>
         <p:spPr>
           <a:xfrm>
-            <a:off x="5207000" y="4597400"/>
-            <a:ext cx="254000" cy="152400"/>
-          </a:xfrm>
-          <a:prstGeom prst="rightArrow">
+            <a:off x="3429000" y="3733800"/>
+            <a:ext cx="304800" cy="304800"/>
+          </a:xfrm>
+          <a:prstGeom prst="ellipse">
+            <a:avLst/>
+          </a:prstGeom>
+          <a:solidFill>
+            <a:srgbClr val="00A5FF"/>
+          </a:solidFill>
+          <a:ln w="19050">
+            <a:solidFill>
+              <a:srgbClr val="FFFFFF"/>
+            </a:solidFill>
+          </a:ln>
+          <a:effectLst>
+            <a:glow rad="127000">
+              <a:srgbClr val="00A5FF">
+                <a:alpha val="70000"/>
+              </a:srgbClr>
+            </a:glow>
+          </a:effectLst>
+        </p:spPr>
+        <p:txBody>
+          <a:bodyPr rtlCol="0" anchor="ctr" wrap="square" lIns="0" rIns="0" tIns="0" bIns="0">
+            <a:noAutofit/>
+          </a:bodyPr>
+          <a:lstStyle/>
+          <a:p>
+            <a:pPr algn="ctr"/>
+            <a:r>
+              <a:rPr sz="1800" b="0" i="0">
+                <a:solidFill>
+                  <a:srgbClr val="FFFFFF"/>
+                </a:solidFill>
+                <a:latin typeface="Corporate S"/>
+              </a:rPr>
+              <a:t>3</a:t>
+            </a:r>
+          </a:p>
+        </p:txBody>
+      </p:sp>
+      <p:sp>
+        <p:nvSpPr>
+          <p:cNvPr id="13" name="legend-num-3"/>
+          <p:cNvSpPr/>
+          <p:nvPr/>
+        </p:nvSpPr>
+        <p:spPr>
+          <a:xfrm>
+            <a:off x="7620000" y="3048000"/>
+            <a:ext cx="279400" cy="279400"/>
+          </a:xfrm>
+          <a:prstGeom prst="ellipse">
             <a:avLst/>
           </a:prstGeom>
           <a:solidFill>
@@ -17253,23 +16713,34 @@
           </a:ln>
         </p:spPr>
         <p:txBody>
-          <a:bodyPr rtlCol="0" anchor="ctr"/>
+          <a:bodyPr rtlCol="0" anchor="ctr" wrap="square" lIns="0" rIns="0" tIns="0" bIns="0">
+            <a:noAutofit/>
+          </a:bodyPr>
           <a:lstStyle/>
           <a:p>
             <a:pPr algn="ctr"/>
-          </a:p>
-        </p:txBody>
-      </p:sp>
-      <p:sp>
-        <p:nvSpPr>
-          <p:cNvPr id="16" name="cause-3"/>
+            <a:r>
+              <a:rPr sz="1600" b="0" i="0">
+                <a:solidFill>
+                  <a:srgbClr val="FFFFFF"/>
+                </a:solidFill>
+                <a:latin typeface="Corporate S"/>
+              </a:rPr>
+              <a:t>3</a:t>
+            </a:r>
+          </a:p>
+        </p:txBody>
+      </p:sp>
+      <p:sp>
+        <p:nvSpPr>
+          <p:cNvPr id="14" name="legend-3"/>
           <p:cNvSpPr txBox="1"/>
           <p:nvPr/>
         </p:nvSpPr>
         <p:spPr>
           <a:xfrm>
-            <a:off x="5588000" y="4470400"/>
-            <a:ext cx="3937000" cy="406400"/>
+            <a:off x="8026400" y="2997200"/>
+            <a:ext cx="3149600" cy="381000"/>
           </a:xfrm>
           <a:prstGeom prst="rect">
             <a:avLst/>
@@ -17290,58 +16761,72 @@
                 </a:solidFill>
                 <a:latin typeface="Corporate S"/>
               </a:rPr>
-              <a:t>Lamp gap or tilt — 1 cm ≈ −50% power</a:t>
-            </a:r>
-          </a:p>
-        </p:txBody>
-      </p:sp>
-      <p:sp>
-        <p:nvSpPr>
-          <p:cNvPr id="17" name="finding-4"/>
-          <p:cNvSpPr txBox="1"/>
-          <p:nvPr/>
-        </p:nvSpPr>
-        <p:spPr>
-          <a:xfrm>
-            <a:off x="1524000" y="4927600"/>
-            <a:ext cx="3556000" cy="406400"/>
-          </a:xfrm>
-          <a:prstGeom prst="rect">
-            <a:avLst/>
-          </a:prstGeom>
-          <a:noFill/>
-        </p:spPr>
-        <p:txBody>
-          <a:bodyPr wrap="square" lIns="0" rIns="0" tIns="0" bIns="0" anchor="ctr">
-            <a:noAutofit/>
-          </a:bodyPr>
-          <a:lstStyle/>
-          <a:p>
-            <a:pPr algn="l"/>
-            <a:r>
-              <a:rPr sz="1700" b="0" i="0">
-                <a:solidFill>
-                  <a:srgbClr val="5D6C73"/>
-                </a:solidFill>
-                <a:latin typeface="Corporate S"/>
-              </a:rPr>
-              <a:t>Canines two steps behind</a:t>
-            </a:r>
-          </a:p>
-        </p:txBody>
-      </p:sp>
-      <p:sp>
-        <p:nvSpPr>
-          <p:cNvPr id="18" name="arrow-4"/>
+              <a:t>Lip retractor</a:t>
+            </a:r>
+          </a:p>
+        </p:txBody>
+      </p:sp>
+      <p:sp>
+        <p:nvSpPr>
+          <p:cNvPr id="15" name="marker-4"/>
           <p:cNvSpPr/>
           <p:nvPr/>
         </p:nvSpPr>
         <p:spPr>
           <a:xfrm>
-            <a:off x="5207000" y="5054600"/>
-            <a:ext cx="254000" cy="152400"/>
-          </a:xfrm>
-          <a:prstGeom prst="rightArrow">
+            <a:off x="4800600" y="3505200"/>
+            <a:ext cx="304800" cy="304800"/>
+          </a:xfrm>
+          <a:prstGeom prst="ellipse">
+            <a:avLst/>
+          </a:prstGeom>
+          <a:solidFill>
+            <a:srgbClr val="00A5FF"/>
+          </a:solidFill>
+          <a:ln w="19050">
+            <a:solidFill>
+              <a:srgbClr val="FFFFFF"/>
+            </a:solidFill>
+          </a:ln>
+          <a:effectLst>
+            <a:glow rad="127000">
+              <a:srgbClr val="00A5FF">
+                <a:alpha val="70000"/>
+              </a:srgbClr>
+            </a:glow>
+          </a:effectLst>
+        </p:spPr>
+        <p:txBody>
+          <a:bodyPr rtlCol="0" anchor="ctr" wrap="square" lIns="0" rIns="0" tIns="0" bIns="0">
+            <a:noAutofit/>
+          </a:bodyPr>
+          <a:lstStyle/>
+          <a:p>
+            <a:pPr algn="ctr"/>
+            <a:r>
+              <a:rPr sz="1800" b="0" i="0">
+                <a:solidFill>
+                  <a:srgbClr val="FFFFFF"/>
+                </a:solidFill>
+                <a:latin typeface="Corporate S"/>
+              </a:rPr>
+              <a:t>4</a:t>
+            </a:r>
+          </a:p>
+        </p:txBody>
+      </p:sp>
+      <p:sp>
+        <p:nvSpPr>
+          <p:cNvPr id="16" name="legend-num-4"/>
+          <p:cNvSpPr/>
+          <p:nvPr/>
+        </p:nvSpPr>
+        <p:spPr>
+          <a:xfrm>
+            <a:off x="7620000" y="3530600"/>
+            <a:ext cx="279400" cy="279400"/>
+          </a:xfrm>
+          <a:prstGeom prst="ellipse">
             <a:avLst/>
           </a:prstGeom>
           <a:solidFill>
@@ -17352,23 +16837,34 @@
           </a:ln>
         </p:spPr>
         <p:txBody>
-          <a:bodyPr rtlCol="0" anchor="ctr"/>
+          <a:bodyPr rtlCol="0" anchor="ctr" wrap="square" lIns="0" rIns="0" tIns="0" bIns="0">
+            <a:noAutofit/>
+          </a:bodyPr>
           <a:lstStyle/>
           <a:p>
             <a:pPr algn="ctr"/>
-          </a:p>
-        </p:txBody>
-      </p:sp>
-      <p:sp>
-        <p:nvSpPr>
-          <p:cNvPr id="19" name="cause-4"/>
+            <a:r>
+              <a:rPr sz="1600" b="0" i="0">
+                <a:solidFill>
+                  <a:srgbClr val="FFFFFF"/>
+                </a:solidFill>
+                <a:latin typeface="Corporate S"/>
+              </a:rPr>
+              <a:t>4</a:t>
+            </a:r>
+          </a:p>
+        </p:txBody>
+      </p:sp>
+      <p:sp>
+        <p:nvSpPr>
+          <p:cNvPr id="17" name="legend-4"/>
           <p:cNvSpPr txBox="1"/>
           <p:nvPr/>
         </p:nvSpPr>
         <p:spPr>
           <a:xfrm>
-            <a:off x="5588000" y="4927600"/>
-            <a:ext cx="3937000" cy="406400"/>
+            <a:off x="8026400" y="3479800"/>
+            <a:ext cx="3149600" cy="381000"/>
           </a:xfrm>
           <a:prstGeom prst="rect">
             <a:avLst/>
@@ -17389,113 +16885,14 @@
                 </a:solidFill>
                 <a:latin typeface="Corporate S"/>
               </a:rPr>
-              <a:t>Thicker dentin — biology, not error</a:t>
-            </a:r>
-          </a:p>
-        </p:txBody>
-      </p:sp>
-      <p:sp>
-        <p:nvSpPr>
-          <p:cNvPr id="20" name="finding-5"/>
-          <p:cNvSpPr txBox="1"/>
-          <p:nvPr/>
-        </p:nvSpPr>
-        <p:spPr>
-          <a:xfrm>
-            <a:off x="1524000" y="5384800"/>
-            <a:ext cx="3556000" cy="406400"/>
-          </a:xfrm>
-          <a:prstGeom prst="rect">
-            <a:avLst/>
-          </a:prstGeom>
-          <a:noFill/>
-        </p:spPr>
-        <p:txBody>
-          <a:bodyPr wrap="square" lIns="0" rIns="0" tIns="0" bIns="0" anchor="ctr">
-            <a:noAutofit/>
-          </a:bodyPr>
-          <a:lstStyle/>
-          <a:p>
-            <a:pPr algn="l"/>
-            <a:r>
-              <a:rPr sz="1700" b="0" i="0">
-                <a:solidFill>
-                  <a:srgbClr val="5D6C73"/>
-                </a:solidFill>
-                <a:latin typeface="Corporate S"/>
-              </a:rPr>
-              <a:t>Chalky white patches</a:t>
-            </a:r>
-          </a:p>
-        </p:txBody>
-      </p:sp>
-      <p:sp>
-        <p:nvSpPr>
-          <p:cNvPr id="21" name="arrow-5"/>
-          <p:cNvSpPr/>
-          <p:nvPr/>
-        </p:nvSpPr>
-        <p:spPr>
-          <a:xfrm>
-            <a:off x="5207000" y="5511800"/>
-            <a:ext cx="254000" cy="152400"/>
-          </a:xfrm>
-          <a:prstGeom prst="rightArrow">
-            <a:avLst/>
-          </a:prstGeom>
-          <a:solidFill>
-            <a:srgbClr val="00A5FF"/>
-          </a:solidFill>
-          <a:ln>
-            <a:noFill/>
-          </a:ln>
-        </p:spPr>
-        <p:txBody>
-          <a:bodyPr rtlCol="0" anchor="ctr"/>
-          <a:lstStyle/>
-          <a:p>
-            <a:pPr algn="ctr"/>
-          </a:p>
-        </p:txBody>
-      </p:sp>
-      <p:sp>
-        <p:nvSpPr>
-          <p:cNvPr id="22" name="cause-5"/>
-          <p:cNvSpPr txBox="1"/>
-          <p:nvPr/>
-        </p:nvSpPr>
-        <p:spPr>
-          <a:xfrm>
-            <a:off x="5588000" y="5384800"/>
-            <a:ext cx="3937000" cy="406400"/>
-          </a:xfrm>
-          <a:prstGeom prst="rect">
-            <a:avLst/>
-          </a:prstGeom>
-          <a:noFill/>
-        </p:spPr>
-        <p:txBody>
-          <a:bodyPr wrap="square" lIns="0" rIns="0" tIns="0" bIns="0" anchor="ctr">
-            <a:noAutofit/>
-          </a:bodyPr>
-          <a:lstStyle/>
-          <a:p>
-            <a:pPr algn="l"/>
-            <a:r>
-              <a:rPr sz="1700" b="0" i="0">
-                <a:solidFill>
-                  <a:srgbClr val="333333"/>
-                </a:solidFill>
-                <a:latin typeface="Corporate S"/>
-              </a:rPr>
-              <a:t>Transient dehydration — not damage</a:t>
-            </a:r>
-          </a:p>
-        </p:txBody>
-      </p:sp>
-      <p:sp>
-        <p:nvSpPr>
-          <p:cNvPr id="23" name="rail-line"/>
+              <a:t>Gingiva Protector, light-cured</a:t>
+            </a:r>
+          </a:p>
+        </p:txBody>
+      </p:sp>
+      <p:sp>
+        <p:nvSpPr>
+          <p:cNvPr id="18" name="rail-line"/>
           <p:cNvSpPr/>
           <p:nvPr/>
         </p:nvSpPr>
@@ -17524,7 +16921,7 @@
       </p:sp>
       <p:sp>
         <p:nvSpPr>
-          <p:cNvPr id="24" name="rail-dot-1"/>
+          <p:cNvPr id="19" name="rail-dot-1"/>
           <p:cNvSpPr/>
           <p:nvPr/>
         </p:nvSpPr>
@@ -17555,7 +16952,7 @@
       </p:sp>
       <p:sp>
         <p:nvSpPr>
-          <p:cNvPr id="25" name="rail-num-1"/>
+          <p:cNvPr id="20" name="rail-num-1"/>
           <p:cNvSpPr txBox="1"/>
           <p:nvPr/>
         </p:nvSpPr>
@@ -17590,7 +16987,7 @@
       </p:sp>
       <p:sp>
         <p:nvSpPr>
-          <p:cNvPr id="26" name="rail-dot-2"/>
+          <p:cNvPr id="21" name="rail-dot-2"/>
           <p:cNvSpPr/>
           <p:nvPr/>
         </p:nvSpPr>
@@ -17621,7 +17018,7 @@
       </p:sp>
       <p:sp>
         <p:nvSpPr>
-          <p:cNvPr id="27" name="rail-num-2"/>
+          <p:cNvPr id="22" name="rail-num-2"/>
           <p:cNvSpPr txBox="1"/>
           <p:nvPr/>
         </p:nvSpPr>
@@ -17656,7 +17053,7 @@
       </p:sp>
       <p:sp>
         <p:nvSpPr>
-          <p:cNvPr id="28" name="rail-dot-3"/>
+          <p:cNvPr id="23" name="rail-dot-3"/>
           <p:cNvSpPr/>
           <p:nvPr/>
         </p:nvSpPr>
@@ -17687,7 +17084,7 @@
       </p:sp>
       <p:sp>
         <p:nvSpPr>
-          <p:cNvPr id="29" name="rail-num-3"/>
+          <p:cNvPr id="24" name="rail-num-3"/>
           <p:cNvSpPr txBox="1"/>
           <p:nvPr/>
         </p:nvSpPr>
@@ -17722,7 +17119,7 @@
       </p:sp>
       <p:sp>
         <p:nvSpPr>
-          <p:cNvPr id="30" name="rail-dot-4"/>
+          <p:cNvPr id="25" name="rail-dot-4"/>
           <p:cNvSpPr/>
           <p:nvPr/>
         </p:nvSpPr>
@@ -17753,7 +17150,7 @@
       </p:sp>
       <p:sp>
         <p:nvSpPr>
-          <p:cNvPr id="31" name="rail-num-4"/>
+          <p:cNvPr id="26" name="rail-num-4"/>
           <p:cNvSpPr txBox="1"/>
           <p:nvPr/>
         </p:nvSpPr>
@@ -17788,7 +17185,7 @@
       </p:sp>
       <p:sp>
         <p:nvSpPr>
-          <p:cNvPr id="32" name="rail-dot-5"/>
+          <p:cNvPr id="27" name="rail-dot-5"/>
           <p:cNvSpPr/>
           <p:nvPr/>
         </p:nvSpPr>
@@ -17819,7 +17216,7 @@
       </p:sp>
       <p:sp>
         <p:nvSpPr>
-          <p:cNvPr id="33" name="rail-num-5"/>
+          <p:cNvPr id="28" name="rail-num-5"/>
           <p:cNvSpPr txBox="1"/>
           <p:nvPr/>
         </p:nvSpPr>
@@ -17854,7 +17251,7 @@
       </p:sp>
       <p:sp>
         <p:nvSpPr>
-          <p:cNvPr id="34" name="footer"/>
+          <p:cNvPr id="29" name="footer"/>
           <p:cNvSpPr txBox="1"/>
           <p:nvPr/>
         </p:nvSpPr>
@@ -17942,19 +17339,19 @@
           <a:lstStyle/>
           <a:p>
             <a:r>
-              <a:t>Layout 18 · quiz</a:t>
-            </a:r>
-          </a:p>
-        </p:txBody>
-      </p:sp>
-      <p:sp>
-        <p:nvSpPr>
-          <p:cNvPr id="4" name="Text Placeholder 3"/>
+              <a:t>Layout 17 · case</a:t>
+            </a:r>
+          </a:p>
+        </p:txBody>
+      </p:sp>
+      <p:sp>
+        <p:nvSpPr>
+          <p:cNvPr id="4" name="Title 3"/>
           <p:cNvSpPr>
             <a:spLocks noGrp="1"/>
           </p:cNvSpPr>
           <p:nvPr>
-            <p:ph type="body" idx="36"/>
+            <p:ph type="title"/>
           </p:nvPr>
         </p:nvSpPr>
         <p:spPr/>
@@ -17963,29 +17360,153 @@
           <a:lstStyle/>
           <a:p>
             <a:r>
-              <a:t>Cervical thirds still yellow after cycle 3 — what is the most likely cause?</a:t>
-            </a:r>
-          </a:p>
-        </p:txBody>
-      </p:sp>
-      <p:sp>
-        <p:nvSpPr>
-          <p:cNvPr id="5" name="quiz-opt-1"/>
+              <a:t>“The Uneven Case”</a:t>
+            </a:r>
+          </a:p>
+        </p:txBody>
+      </p:sp>
+      <p:sp>
+        <p:nvSpPr>
+          <p:cNvPr id="5" name="Text Placeholder 4"/>
+          <p:cNvSpPr>
+            <a:spLocks noGrp="1"/>
+          </p:cNvSpPr>
+          <p:nvPr>
+            <p:ph type="body" idx="35"/>
+          </p:nvPr>
+        </p:nvSpPr>
+        <p:spPr/>
+        <p:txBody>
+          <a:bodyPr/>
+          <a:lstStyle/>
+          <a:p>
+            <a:r>
+              <a:t>A 38-year-old at the end of cycle 3 — centrals magnificent, cervical thirds still yellow, canines two steps behind, chalky patches on the laterals. She is holding the mirror.</a:t>
+            </a:r>
+          </a:p>
+        </p:txBody>
+      </p:sp>
+      <p:sp>
+        <p:nvSpPr>
+          <p:cNvPr id="6" name="finding-head"/>
+          <p:cNvSpPr txBox="1"/>
+          <p:nvPr/>
+        </p:nvSpPr>
+        <p:spPr>
+          <a:xfrm>
+            <a:off x="1524000" y="3276600"/>
+            <a:ext cx="3556000" cy="190500"/>
+          </a:xfrm>
+          <a:prstGeom prst="rect">
+            <a:avLst/>
+          </a:prstGeom>
+          <a:noFill/>
+        </p:spPr>
+        <p:txBody>
+          <a:bodyPr wrap="square" lIns="0" rIns="0" tIns="0" bIns="0" anchor="t">
+            <a:noAutofit/>
+          </a:bodyPr>
+          <a:lstStyle/>
+          <a:p>
+            <a:pPr algn="l"/>
+            <a:r>
+              <a:rPr sz="1100" b="0" i="0" cap="all" spc="176">
+                <a:solidFill>
+                  <a:srgbClr val="00A5FF"/>
+                </a:solidFill>
+                <a:latin typeface="Corporate S"/>
+              </a:rPr>
+              <a:t>Finding</a:t>
+            </a:r>
+          </a:p>
+        </p:txBody>
+      </p:sp>
+      <p:sp>
+        <p:nvSpPr>
+          <p:cNvPr id="7" name="cause-head"/>
+          <p:cNvSpPr txBox="1"/>
+          <p:nvPr/>
+        </p:nvSpPr>
+        <p:spPr>
+          <a:xfrm>
+            <a:off x="5588000" y="3276600"/>
+            <a:ext cx="3937000" cy="190500"/>
+          </a:xfrm>
+          <a:prstGeom prst="rect">
+            <a:avLst/>
+          </a:prstGeom>
+          <a:noFill/>
+        </p:spPr>
+        <p:txBody>
+          <a:bodyPr wrap="square" lIns="0" rIns="0" tIns="0" bIns="0" anchor="t">
+            <a:noAutofit/>
+          </a:bodyPr>
+          <a:lstStyle/>
+          <a:p>
+            <a:pPr algn="l"/>
+            <a:r>
+              <a:rPr sz="1100" b="0" i="0" cap="all" spc="176">
+                <a:solidFill>
+                  <a:srgbClr val="00A5FF"/>
+                </a:solidFill>
+                <a:latin typeface="Corporate S"/>
+              </a:rPr>
+              <a:t>Cause</a:t>
+            </a:r>
+          </a:p>
+        </p:txBody>
+      </p:sp>
+      <p:sp>
+        <p:nvSpPr>
+          <p:cNvPr id="8" name="finding-1"/>
+          <p:cNvSpPr txBox="1"/>
+          <p:nvPr/>
+        </p:nvSpPr>
+        <p:spPr>
+          <a:xfrm>
+            <a:off x="1524000" y="3556000"/>
+            <a:ext cx="3556000" cy="406400"/>
+          </a:xfrm>
+          <a:prstGeom prst="rect">
+            <a:avLst/>
+          </a:prstGeom>
+          <a:noFill/>
+        </p:spPr>
+        <p:txBody>
+          <a:bodyPr wrap="square" lIns="0" rIns="0" tIns="0" bIns="0" anchor="ctr">
+            <a:noAutofit/>
+          </a:bodyPr>
+          <a:lstStyle/>
+          <a:p>
+            <a:pPr algn="l"/>
+            <a:r>
+              <a:rPr sz="1700" b="0" i="0">
+                <a:solidFill>
+                  <a:srgbClr val="5D6C73"/>
+                </a:solidFill>
+                <a:latin typeface="Corporate S"/>
+              </a:rPr>
+              <a:t>Cervical thirds still yellow</a:t>
+            </a:r>
+          </a:p>
+        </p:txBody>
+      </p:sp>
+      <p:sp>
+        <p:nvSpPr>
+          <p:cNvPr id="9" name="arrow-1"/>
           <p:cNvSpPr/>
           <p:nvPr/>
         </p:nvSpPr>
         <p:spPr>
           <a:xfrm>
-            <a:off x="1524000" y="3048000"/>
-            <a:ext cx="8001000" cy="635000"/>
-          </a:xfrm>
-          <a:prstGeom prst="roundRect">
-            <a:avLst>
-              <a:gd name="adj" fmla="val 18000"/>
-            </a:avLst>
+            <a:off x="5207000" y="3683000"/>
+            <a:ext cx="254000" cy="152400"/>
+          </a:xfrm>
+          <a:prstGeom prst="rightArrow">
+            <a:avLst/>
           </a:prstGeom>
           <a:solidFill>
-            <a:srgbClr val="283237"/>
+            <a:srgbClr val="00A5FF"/>
           </a:solidFill>
           <a:ln>
             <a:noFill/>
@@ -18001,99 +17522,90 @@
       </p:sp>
       <p:sp>
         <p:nvSpPr>
-          <p:cNvPr id="6" name="quiz-letter-1"/>
+          <p:cNvPr id="10" name="cause-1"/>
+          <p:cNvSpPr txBox="1"/>
+          <p:nvPr/>
+        </p:nvSpPr>
+        <p:spPr>
+          <a:xfrm>
+            <a:off x="5588000" y="3556000"/>
+            <a:ext cx="3937000" cy="406400"/>
+          </a:xfrm>
+          <a:prstGeom prst="rect">
+            <a:avLst/>
+          </a:prstGeom>
+          <a:noFill/>
+        </p:spPr>
+        <p:txBody>
+          <a:bodyPr wrap="square" lIns="0" rIns="0" tIns="0" bIns="0" anchor="ctr">
+            <a:noAutofit/>
+          </a:bodyPr>
+          <a:lstStyle/>
+          <a:p>
+            <a:pPr algn="l"/>
+            <a:r>
+              <a:rPr sz="1700" b="0" i="0">
+                <a:solidFill>
+                  <a:srgbClr val="333333"/>
+                </a:solidFill>
+                <a:latin typeface="Corporate S"/>
+              </a:rPr>
+              <a:t>Barrier over-extended onto cervical enamel</a:t>
+            </a:r>
+          </a:p>
+        </p:txBody>
+      </p:sp>
+      <p:sp>
+        <p:nvSpPr>
+          <p:cNvPr id="11" name="finding-2"/>
+          <p:cNvSpPr txBox="1"/>
+          <p:nvPr/>
+        </p:nvSpPr>
+        <p:spPr>
+          <a:xfrm>
+            <a:off x="1524000" y="4013200"/>
+            <a:ext cx="3556000" cy="406400"/>
+          </a:xfrm>
+          <a:prstGeom prst="rect">
+            <a:avLst/>
+          </a:prstGeom>
+          <a:noFill/>
+        </p:spPr>
+        <p:txBody>
+          <a:bodyPr wrap="square" lIns="0" rIns="0" tIns="0" bIns="0" anchor="ctr">
+            <a:noAutofit/>
+          </a:bodyPr>
+          <a:lstStyle/>
+          <a:p>
+            <a:pPr algn="l"/>
+            <a:r>
+              <a:rPr sz="1700" b="0" i="0">
+                <a:solidFill>
+                  <a:srgbClr val="5D6C73"/>
+                </a:solidFill>
+                <a:latin typeface="Corporate S"/>
+              </a:rPr>
+              <a:t>Patchy brightness</a:t>
+            </a:r>
+          </a:p>
+        </p:txBody>
+      </p:sp>
+      <p:sp>
+        <p:nvSpPr>
+          <p:cNvPr id="12" name="arrow-2"/>
           <p:cNvSpPr/>
           <p:nvPr/>
         </p:nvSpPr>
         <p:spPr>
           <a:xfrm>
-            <a:off x="1714500" y="3175000"/>
-            <a:ext cx="381000" cy="381000"/>
-          </a:xfrm>
-          <a:prstGeom prst="ellipse">
+            <a:off x="5207000" y="4140200"/>
+            <a:ext cx="254000" cy="152400"/>
+          </a:xfrm>
+          <a:prstGeom prst="rightArrow">
             <a:avLst/>
           </a:prstGeom>
           <a:solidFill>
-            <a:srgbClr val="283237"/>
-          </a:solidFill>
-          <a:ln w="19050">
-            <a:solidFill>
-              <a:srgbClr val="00A5FF"/>
-            </a:solidFill>
-          </a:ln>
-        </p:spPr>
-        <p:txBody>
-          <a:bodyPr rtlCol="0" anchor="ctr" wrap="square" lIns="0" rIns="0" tIns="0" bIns="0">
-            <a:noAutofit/>
-          </a:bodyPr>
-          <a:lstStyle/>
-          <a:p>
-            <a:pPr algn="ctr"/>
-            <a:r>
-              <a:rPr sz="1800" b="0" i="0">
-                <a:solidFill>
-                  <a:srgbClr val="00A5FF"/>
-                </a:solidFill>
-                <a:latin typeface="Corporate S"/>
-              </a:rPr>
-              <a:t>A</a:t>
-            </a:r>
-          </a:p>
-        </p:txBody>
-      </p:sp>
-      <p:sp>
-        <p:nvSpPr>
-          <p:cNvPr id="7" name="quiz-text-1"/>
-          <p:cNvSpPr txBox="1"/>
-          <p:nvPr/>
-        </p:nvSpPr>
-        <p:spPr>
-          <a:xfrm>
-            <a:off x="2286000" y="3048000"/>
-            <a:ext cx="6985000" cy="635000"/>
-          </a:xfrm>
-          <a:prstGeom prst="rect">
-            <a:avLst/>
-          </a:prstGeom>
-          <a:noFill/>
-        </p:spPr>
-        <p:txBody>
-          <a:bodyPr wrap="square" lIns="0" rIns="0" tIns="0" bIns="0" anchor="ctr">
-            <a:noAutofit/>
-          </a:bodyPr>
-          <a:lstStyle/>
-          <a:p>
-            <a:pPr algn="l"/>
-            <a:r>
-              <a:rPr sz="2100" b="0" i="0">
-                <a:solidFill>
-                  <a:srgbClr val="FFFFFF"/>
-                </a:solidFill>
-                <a:latin typeface="Corporate S"/>
-              </a:rPr>
-              <a:t>Gel layer below 1 mm</a:t>
-            </a:r>
-          </a:p>
-        </p:txBody>
-      </p:sp>
-      <p:sp>
-        <p:nvSpPr>
-          <p:cNvPr id="8" name="quiz-opt-2"/>
-          <p:cNvSpPr/>
-          <p:nvPr/>
-        </p:nvSpPr>
-        <p:spPr>
-          <a:xfrm>
-            <a:off x="1524000" y="3810000"/>
-            <a:ext cx="8001000" cy="635000"/>
-          </a:xfrm>
-          <a:prstGeom prst="roundRect">
-            <a:avLst>
-              <a:gd name="adj" fmla="val 18000"/>
-            </a:avLst>
-          </a:prstGeom>
-          <a:solidFill>
-            <a:srgbClr val="283237"/>
+            <a:srgbClr val="00A5FF"/>
           </a:solidFill>
           <a:ln>
             <a:noFill/>
@@ -18109,99 +17621,90 @@
       </p:sp>
       <p:sp>
         <p:nvSpPr>
-          <p:cNvPr id="9" name="quiz-letter-2"/>
+          <p:cNvPr id="13" name="cause-2"/>
+          <p:cNvSpPr txBox="1"/>
+          <p:nvPr/>
+        </p:nvSpPr>
+        <p:spPr>
+          <a:xfrm>
+            <a:off x="5588000" y="4013200"/>
+            <a:ext cx="3937000" cy="406400"/>
+          </a:xfrm>
+          <a:prstGeom prst="rect">
+            <a:avLst/>
+          </a:prstGeom>
+          <a:noFill/>
+        </p:spPr>
+        <p:txBody>
+          <a:bodyPr wrap="square" lIns="0" rIns="0" tIns="0" bIns="0" anchor="ctr">
+            <a:noAutofit/>
+          </a:bodyPr>
+          <a:lstStyle/>
+          <a:p>
+            <a:pPr algn="l"/>
+            <a:r>
+              <a:rPr sz="1700" b="0" i="0">
+                <a:solidFill>
+                  <a:srgbClr val="333333"/>
+                </a:solidFill>
+                <a:latin typeface="Corporate S"/>
+              </a:rPr>
+              <a:t>Gel layer below 1 mm in zones — Sin #5</a:t>
+            </a:r>
+          </a:p>
+        </p:txBody>
+      </p:sp>
+      <p:sp>
+        <p:nvSpPr>
+          <p:cNvPr id="14" name="finding-3"/>
+          <p:cNvSpPr txBox="1"/>
+          <p:nvPr/>
+        </p:nvSpPr>
+        <p:spPr>
+          <a:xfrm>
+            <a:off x="1524000" y="4470400"/>
+            <a:ext cx="3556000" cy="406400"/>
+          </a:xfrm>
+          <a:prstGeom prst="rect">
+            <a:avLst/>
+          </a:prstGeom>
+          <a:noFill/>
+        </p:spPr>
+        <p:txBody>
+          <a:bodyPr wrap="square" lIns="0" rIns="0" tIns="0" bIns="0" anchor="ctr">
+            <a:noAutofit/>
+          </a:bodyPr>
+          <a:lstStyle/>
+          <a:p>
+            <a:pPr algn="l"/>
+            <a:r>
+              <a:rPr sz="1700" b="0" i="0">
+                <a:solidFill>
+                  <a:srgbClr val="5D6C73"/>
+                </a:solidFill>
+                <a:latin typeface="Corporate S"/>
+              </a:rPr>
+              <a:t>Everything underperforming</a:t>
+            </a:r>
+          </a:p>
+        </p:txBody>
+      </p:sp>
+      <p:sp>
+        <p:nvSpPr>
+          <p:cNvPr id="15" name="arrow-3"/>
           <p:cNvSpPr/>
           <p:nvPr/>
         </p:nvSpPr>
         <p:spPr>
           <a:xfrm>
-            <a:off x="1714500" y="3937000"/>
-            <a:ext cx="381000" cy="381000"/>
-          </a:xfrm>
-          <a:prstGeom prst="ellipse">
+            <a:off x="5207000" y="4597400"/>
+            <a:ext cx="254000" cy="152400"/>
+          </a:xfrm>
+          <a:prstGeom prst="rightArrow">
             <a:avLst/>
           </a:prstGeom>
           <a:solidFill>
-            <a:srgbClr val="283237"/>
-          </a:solidFill>
-          <a:ln w="19050">
-            <a:solidFill>
-              <a:srgbClr val="00A5FF"/>
-            </a:solidFill>
-          </a:ln>
-        </p:spPr>
-        <p:txBody>
-          <a:bodyPr rtlCol="0" anchor="ctr" wrap="square" lIns="0" rIns="0" tIns="0" bIns="0">
-            <a:noAutofit/>
-          </a:bodyPr>
-          <a:lstStyle/>
-          <a:p>
-            <a:pPr algn="ctr"/>
-            <a:r>
-              <a:rPr sz="1800" b="0" i="0">
-                <a:solidFill>
-                  <a:srgbClr val="00A5FF"/>
-                </a:solidFill>
-                <a:latin typeface="Corporate S"/>
-              </a:rPr>
-              <a:t>B</a:t>
-            </a:r>
-          </a:p>
-        </p:txBody>
-      </p:sp>
-      <p:sp>
-        <p:nvSpPr>
-          <p:cNvPr id="10" name="quiz-text-2"/>
-          <p:cNvSpPr txBox="1"/>
-          <p:nvPr/>
-        </p:nvSpPr>
-        <p:spPr>
-          <a:xfrm>
-            <a:off x="2286000" y="3810000"/>
-            <a:ext cx="6985000" cy="635000"/>
-          </a:xfrm>
-          <a:prstGeom prst="rect">
-            <a:avLst/>
-          </a:prstGeom>
-          <a:noFill/>
-        </p:spPr>
-        <p:txBody>
-          <a:bodyPr wrap="square" lIns="0" rIns="0" tIns="0" bIns="0" anchor="ctr">
-            <a:noAutofit/>
-          </a:bodyPr>
-          <a:lstStyle/>
-          <a:p>
-            <a:pPr algn="l"/>
-            <a:r>
-              <a:rPr sz="2100" b="0" i="0">
-                <a:solidFill>
-                  <a:srgbClr val="FFFFFF"/>
-                </a:solidFill>
-                <a:latin typeface="Corporate S"/>
-              </a:rPr>
-              <a:t>Barrier over-extended onto cervical enamel</a:t>
-            </a:r>
-          </a:p>
-        </p:txBody>
-      </p:sp>
-      <p:sp>
-        <p:nvSpPr>
-          <p:cNvPr id="11" name="quiz-opt-3"/>
-          <p:cNvSpPr/>
-          <p:nvPr/>
-        </p:nvSpPr>
-        <p:spPr>
-          <a:xfrm>
-            <a:off x="1524000" y="4572000"/>
-            <a:ext cx="8001000" cy="635000"/>
-          </a:xfrm>
-          <a:prstGeom prst="roundRect">
-            <a:avLst>
-              <a:gd name="adj" fmla="val 18000"/>
-            </a:avLst>
-          </a:prstGeom>
-          <a:solidFill>
-            <a:srgbClr val="283237"/>
+            <a:srgbClr val="00A5FF"/>
           </a:solidFill>
           <a:ln>
             <a:noFill/>
@@ -18217,56 +17720,113 @@
       </p:sp>
       <p:sp>
         <p:nvSpPr>
-          <p:cNvPr id="12" name="quiz-letter-3"/>
+          <p:cNvPr id="16" name="cause-3"/>
+          <p:cNvSpPr txBox="1"/>
+          <p:nvPr/>
+        </p:nvSpPr>
+        <p:spPr>
+          <a:xfrm>
+            <a:off x="5588000" y="4470400"/>
+            <a:ext cx="3937000" cy="406400"/>
+          </a:xfrm>
+          <a:prstGeom prst="rect">
+            <a:avLst/>
+          </a:prstGeom>
+          <a:noFill/>
+        </p:spPr>
+        <p:txBody>
+          <a:bodyPr wrap="square" lIns="0" rIns="0" tIns="0" bIns="0" anchor="ctr">
+            <a:noAutofit/>
+          </a:bodyPr>
+          <a:lstStyle/>
+          <a:p>
+            <a:pPr algn="l"/>
+            <a:r>
+              <a:rPr sz="1700" b="0" i="0">
+                <a:solidFill>
+                  <a:srgbClr val="333333"/>
+                </a:solidFill>
+                <a:latin typeface="Corporate S"/>
+              </a:rPr>
+              <a:t>Lamp gap or tilt — 1 cm ≈ −50% power</a:t>
+            </a:r>
+          </a:p>
+        </p:txBody>
+      </p:sp>
+      <p:sp>
+        <p:nvSpPr>
+          <p:cNvPr id="17" name="finding-4"/>
+          <p:cNvSpPr txBox="1"/>
+          <p:nvPr/>
+        </p:nvSpPr>
+        <p:spPr>
+          <a:xfrm>
+            <a:off x="1524000" y="4927600"/>
+            <a:ext cx="3556000" cy="406400"/>
+          </a:xfrm>
+          <a:prstGeom prst="rect">
+            <a:avLst/>
+          </a:prstGeom>
+          <a:noFill/>
+        </p:spPr>
+        <p:txBody>
+          <a:bodyPr wrap="square" lIns="0" rIns="0" tIns="0" bIns="0" anchor="ctr">
+            <a:noAutofit/>
+          </a:bodyPr>
+          <a:lstStyle/>
+          <a:p>
+            <a:pPr algn="l"/>
+            <a:r>
+              <a:rPr sz="1700" b="0" i="0">
+                <a:solidFill>
+                  <a:srgbClr val="5D6C73"/>
+                </a:solidFill>
+                <a:latin typeface="Corporate S"/>
+              </a:rPr>
+              <a:t>Canines two steps behind</a:t>
+            </a:r>
+          </a:p>
+        </p:txBody>
+      </p:sp>
+      <p:sp>
+        <p:nvSpPr>
+          <p:cNvPr id="18" name="arrow-4"/>
           <p:cNvSpPr/>
           <p:nvPr/>
         </p:nvSpPr>
         <p:spPr>
           <a:xfrm>
-            <a:off x="1714500" y="4699000"/>
-            <a:ext cx="381000" cy="381000"/>
-          </a:xfrm>
-          <a:prstGeom prst="ellipse">
+            <a:off x="5207000" y="5054600"/>
+            <a:ext cx="254000" cy="152400"/>
+          </a:xfrm>
+          <a:prstGeom prst="rightArrow">
             <a:avLst/>
           </a:prstGeom>
           <a:solidFill>
-            <a:srgbClr val="283237"/>
+            <a:srgbClr val="00A5FF"/>
           </a:solidFill>
-          <a:ln w="19050">
-            <a:solidFill>
-              <a:srgbClr val="00A5FF"/>
-            </a:solidFill>
-          </a:ln>
-        </p:spPr>
-        <p:txBody>
-          <a:bodyPr rtlCol="0" anchor="ctr" wrap="square" lIns="0" rIns="0" tIns="0" bIns="0">
-            <a:noAutofit/>
-          </a:bodyPr>
+          <a:ln>
+            <a:noFill/>
+          </a:ln>
+        </p:spPr>
+        <p:txBody>
+          <a:bodyPr rtlCol="0" anchor="ctr"/>
           <a:lstStyle/>
           <a:p>
             <a:pPr algn="ctr"/>
-            <a:r>
-              <a:rPr sz="1800" b="0" i="0">
-                <a:solidFill>
-                  <a:srgbClr val="00A5FF"/>
-                </a:solidFill>
-                <a:latin typeface="Corporate S"/>
-              </a:rPr>
-              <a:t>C</a:t>
-            </a:r>
-          </a:p>
-        </p:txBody>
-      </p:sp>
-      <p:sp>
-        <p:nvSpPr>
-          <p:cNvPr id="13" name="quiz-text-3"/>
+          </a:p>
+        </p:txBody>
+      </p:sp>
+      <p:sp>
+        <p:nvSpPr>
+          <p:cNvPr id="19" name="cause-4"/>
           <p:cNvSpPr txBox="1"/>
           <p:nvPr/>
         </p:nvSpPr>
         <p:spPr>
           <a:xfrm>
-            <a:off x="2286000" y="4572000"/>
-            <a:ext cx="6985000" cy="635000"/>
+            <a:off x="5588000" y="4927600"/>
+            <a:ext cx="3937000" cy="406400"/>
           </a:xfrm>
           <a:prstGeom prst="rect">
             <a:avLst/>
@@ -18281,20 +17841,119 @@
           <a:p>
             <a:pPr algn="l"/>
             <a:r>
-              <a:rPr sz="2100" b="0" i="0">
-                <a:solidFill>
-                  <a:srgbClr val="FFFFFF"/>
-                </a:solidFill>
-                <a:latin typeface="Corporate S"/>
-              </a:rPr>
-              <a:t>Lamp gap or tilt</a:t>
-            </a:r>
-          </a:p>
-        </p:txBody>
-      </p:sp>
-      <p:sp>
-        <p:nvSpPr>
-          <p:cNvPr id="14" name="rail-line"/>
+              <a:rPr sz="1700" b="0" i="0">
+                <a:solidFill>
+                  <a:srgbClr val="333333"/>
+                </a:solidFill>
+                <a:latin typeface="Corporate S"/>
+              </a:rPr>
+              <a:t>Thicker dentin — biology, not error</a:t>
+            </a:r>
+          </a:p>
+        </p:txBody>
+      </p:sp>
+      <p:sp>
+        <p:nvSpPr>
+          <p:cNvPr id="20" name="finding-5"/>
+          <p:cNvSpPr txBox="1"/>
+          <p:nvPr/>
+        </p:nvSpPr>
+        <p:spPr>
+          <a:xfrm>
+            <a:off x="1524000" y="5384800"/>
+            <a:ext cx="3556000" cy="406400"/>
+          </a:xfrm>
+          <a:prstGeom prst="rect">
+            <a:avLst/>
+          </a:prstGeom>
+          <a:noFill/>
+        </p:spPr>
+        <p:txBody>
+          <a:bodyPr wrap="square" lIns="0" rIns="0" tIns="0" bIns="0" anchor="ctr">
+            <a:noAutofit/>
+          </a:bodyPr>
+          <a:lstStyle/>
+          <a:p>
+            <a:pPr algn="l"/>
+            <a:r>
+              <a:rPr sz="1700" b="0" i="0">
+                <a:solidFill>
+                  <a:srgbClr val="5D6C73"/>
+                </a:solidFill>
+                <a:latin typeface="Corporate S"/>
+              </a:rPr>
+              <a:t>Chalky white patches</a:t>
+            </a:r>
+          </a:p>
+        </p:txBody>
+      </p:sp>
+      <p:sp>
+        <p:nvSpPr>
+          <p:cNvPr id="21" name="arrow-5"/>
+          <p:cNvSpPr/>
+          <p:nvPr/>
+        </p:nvSpPr>
+        <p:spPr>
+          <a:xfrm>
+            <a:off x="5207000" y="5511800"/>
+            <a:ext cx="254000" cy="152400"/>
+          </a:xfrm>
+          <a:prstGeom prst="rightArrow">
+            <a:avLst/>
+          </a:prstGeom>
+          <a:solidFill>
+            <a:srgbClr val="00A5FF"/>
+          </a:solidFill>
+          <a:ln>
+            <a:noFill/>
+          </a:ln>
+        </p:spPr>
+        <p:txBody>
+          <a:bodyPr rtlCol="0" anchor="ctr"/>
+          <a:lstStyle/>
+          <a:p>
+            <a:pPr algn="ctr"/>
+          </a:p>
+        </p:txBody>
+      </p:sp>
+      <p:sp>
+        <p:nvSpPr>
+          <p:cNvPr id="22" name="cause-5"/>
+          <p:cNvSpPr txBox="1"/>
+          <p:nvPr/>
+        </p:nvSpPr>
+        <p:spPr>
+          <a:xfrm>
+            <a:off x="5588000" y="5384800"/>
+            <a:ext cx="3937000" cy="406400"/>
+          </a:xfrm>
+          <a:prstGeom prst="rect">
+            <a:avLst/>
+          </a:prstGeom>
+          <a:noFill/>
+        </p:spPr>
+        <p:txBody>
+          <a:bodyPr wrap="square" lIns="0" rIns="0" tIns="0" bIns="0" anchor="ctr">
+            <a:noAutofit/>
+          </a:bodyPr>
+          <a:lstStyle/>
+          <a:p>
+            <a:pPr algn="l"/>
+            <a:r>
+              <a:rPr sz="1700" b="0" i="0">
+                <a:solidFill>
+                  <a:srgbClr val="333333"/>
+                </a:solidFill>
+                <a:latin typeface="Corporate S"/>
+              </a:rPr>
+              <a:t>Transient dehydration — not damage</a:t>
+            </a:r>
+          </a:p>
+        </p:txBody>
+      </p:sp>
+      <p:sp>
+        <p:nvSpPr>
+          <p:cNvPr id="23" name="rail-line"/>
           <p:cNvSpPr/>
           <p:nvPr/>
         </p:nvSpPr>
@@ -18323,7 +17982,7 @@
       </p:sp>
       <p:sp>
         <p:nvSpPr>
-          <p:cNvPr id="15" name="rail-dot-1"/>
+          <p:cNvPr id="24" name="rail-dot-1"/>
           <p:cNvSpPr/>
           <p:nvPr/>
         </p:nvSpPr>
@@ -18336,7 +17995,7 @@
             <a:avLst/>
           </a:prstGeom>
           <a:solidFill>
-            <a:srgbClr val="192024"/>
+            <a:srgbClr val="1F272B"/>
           </a:solidFill>
           <a:ln w="19050">
             <a:solidFill>
@@ -18354,7 +18013,7 @@
       </p:sp>
       <p:sp>
         <p:nvSpPr>
-          <p:cNvPr id="16" name="rail-num-1"/>
+          <p:cNvPr id="25" name="rail-num-1"/>
           <p:cNvSpPr txBox="1"/>
           <p:nvPr/>
         </p:nvSpPr>
@@ -18389,7 +18048,7 @@
       </p:sp>
       <p:sp>
         <p:nvSpPr>
-          <p:cNvPr id="17" name="rail-dot-2"/>
+          <p:cNvPr id="26" name="rail-dot-2"/>
           <p:cNvSpPr/>
           <p:nvPr/>
         </p:nvSpPr>
@@ -18402,7 +18061,7 @@
             <a:avLst/>
           </a:prstGeom>
           <a:solidFill>
-            <a:srgbClr val="192024"/>
+            <a:srgbClr val="1F272B"/>
           </a:solidFill>
           <a:ln w="19050">
             <a:solidFill>
@@ -18420,7 +18079,7 @@
       </p:sp>
       <p:sp>
         <p:nvSpPr>
-          <p:cNvPr id="18" name="rail-num-2"/>
+          <p:cNvPr id="27" name="rail-num-2"/>
           <p:cNvSpPr txBox="1"/>
           <p:nvPr/>
         </p:nvSpPr>
@@ -18455,7 +18114,7 @@
       </p:sp>
       <p:sp>
         <p:nvSpPr>
-          <p:cNvPr id="19" name="rail-dot-3"/>
+          <p:cNvPr id="28" name="rail-dot-3"/>
           <p:cNvSpPr/>
           <p:nvPr/>
         </p:nvSpPr>
@@ -18468,7 +18127,7 @@
             <a:avLst/>
           </a:prstGeom>
           <a:solidFill>
-            <a:srgbClr val="192024"/>
+            <a:srgbClr val="1F272B"/>
           </a:solidFill>
           <a:ln w="19050">
             <a:solidFill>
@@ -18486,7 +18145,7 @@
       </p:sp>
       <p:sp>
         <p:nvSpPr>
-          <p:cNvPr id="20" name="rail-num-3"/>
+          <p:cNvPr id="29" name="rail-num-3"/>
           <p:cNvSpPr txBox="1"/>
           <p:nvPr/>
         </p:nvSpPr>
@@ -18521,7 +18180,7 @@
       </p:sp>
       <p:sp>
         <p:nvSpPr>
-          <p:cNvPr id="21" name="rail-dot-4"/>
+          <p:cNvPr id="30" name="rail-dot-4"/>
           <p:cNvSpPr/>
           <p:nvPr/>
         </p:nvSpPr>
@@ -18534,7 +18193,7 @@
             <a:avLst/>
           </a:prstGeom>
           <a:solidFill>
-            <a:srgbClr val="192024"/>
+            <a:srgbClr val="1F272B"/>
           </a:solidFill>
           <a:ln w="19050">
             <a:solidFill>
@@ -18552,7 +18211,7 @@
       </p:sp>
       <p:sp>
         <p:nvSpPr>
-          <p:cNvPr id="22" name="rail-num-4"/>
+          <p:cNvPr id="31" name="rail-num-4"/>
           <p:cNvSpPr txBox="1"/>
           <p:nvPr/>
         </p:nvSpPr>
@@ -18587,7 +18246,7 @@
       </p:sp>
       <p:sp>
         <p:nvSpPr>
-          <p:cNvPr id="23" name="rail-dot-5"/>
+          <p:cNvPr id="32" name="rail-dot-5"/>
           <p:cNvSpPr/>
           <p:nvPr/>
         </p:nvSpPr>
@@ -18600,7 +18259,7 @@
             <a:avLst/>
           </a:prstGeom>
           <a:solidFill>
-            <a:srgbClr val="192024"/>
+            <a:srgbClr val="1F272B"/>
           </a:solidFill>
           <a:ln w="19050">
             <a:solidFill>
@@ -18618,7 +18277,7 @@
       </p:sp>
       <p:sp>
         <p:nvSpPr>
-          <p:cNvPr id="24" name="rail-num-5"/>
+          <p:cNvPr id="33" name="rail-num-5"/>
           <p:cNvSpPr txBox="1"/>
           <p:nvPr/>
         </p:nvSpPr>
@@ -18653,7 +18312,7 @@
       </p:sp>
       <p:sp>
         <p:nvSpPr>
-          <p:cNvPr id="25" name="footer"/>
+          <p:cNvPr id="34" name="footer"/>
           <p:cNvSpPr txBox="1"/>
           <p:nvPr/>
         </p:nvSpPr>
@@ -18677,7 +18336,7 @@
             <a:r>
               <a:rPr sz="1100" b="0" i="0" cap="all" spc="176">
                 <a:solidFill>
-                  <a:srgbClr val="8597A0"/>
+                  <a:srgbClr val="ABB7BE"/>
                 </a:solidFill>
                 <a:latin typeface="Corporate S"/>
               </a:rPr>
@@ -18892,119 +18551,6 @@
             </a:avLst>
           </a:prstGeom>
           <a:solidFill>
-            <a:srgbClr val="00A5FF"/>
-          </a:solidFill>
-          <a:ln>
-            <a:noFill/>
-          </a:ln>
-          <a:effectLst>
-            <a:glow rad="317500">
-              <a:srgbClr val="00A5FF">
-                <a:alpha val="50000"/>
-              </a:srgbClr>
-            </a:glow>
-          </a:effectLst>
-        </p:spPr>
-        <p:txBody>
-          <a:bodyPr rtlCol="0" anchor="ctr"/>
-          <a:lstStyle/>
-          <a:p>
-            <a:pPr algn="ctr"/>
-          </a:p>
-        </p:txBody>
-      </p:sp>
-      <p:sp>
-        <p:nvSpPr>
-          <p:cNvPr id="9" name="quiz-letter-2"/>
-          <p:cNvSpPr/>
-          <p:nvPr/>
-        </p:nvSpPr>
-        <p:spPr>
-          <a:xfrm>
-            <a:off x="1714500" y="3937000"/>
-            <a:ext cx="381000" cy="381000"/>
-          </a:xfrm>
-          <a:prstGeom prst="ellipse">
-            <a:avLst/>
-          </a:prstGeom>
-          <a:solidFill>
-            <a:srgbClr val="FFFFFF"/>
-          </a:solidFill>
-          <a:ln>
-            <a:noFill/>
-          </a:ln>
-        </p:spPr>
-        <p:txBody>
-          <a:bodyPr rtlCol="0" anchor="ctr" wrap="square" lIns="0" rIns="0" tIns="0" bIns="0">
-            <a:noAutofit/>
-          </a:bodyPr>
-          <a:lstStyle/>
-          <a:p>
-            <a:pPr algn="ctr"/>
-            <a:r>
-              <a:rPr sz="1800" b="0" i="0">
-                <a:solidFill>
-                  <a:srgbClr val="1F272B"/>
-                </a:solidFill>
-                <a:latin typeface="Corporate S"/>
-              </a:rPr>
-              <a:t>B</a:t>
-            </a:r>
-          </a:p>
-        </p:txBody>
-      </p:sp>
-      <p:sp>
-        <p:nvSpPr>
-          <p:cNvPr id="10" name="quiz-text-2"/>
-          <p:cNvSpPr txBox="1"/>
-          <p:nvPr/>
-        </p:nvSpPr>
-        <p:spPr>
-          <a:xfrm>
-            <a:off x="2286000" y="3810000"/>
-            <a:ext cx="6985000" cy="635000"/>
-          </a:xfrm>
-          <a:prstGeom prst="rect">
-            <a:avLst/>
-          </a:prstGeom>
-          <a:noFill/>
-        </p:spPr>
-        <p:txBody>
-          <a:bodyPr wrap="square" lIns="0" rIns="0" tIns="0" bIns="0" anchor="ctr">
-            <a:noAutofit/>
-          </a:bodyPr>
-          <a:lstStyle/>
-          <a:p>
-            <a:pPr algn="l"/>
-            <a:r>
-              <a:rPr sz="2100" b="0" i="0">
-                <a:solidFill>
-                  <a:srgbClr val="1F272B"/>
-                </a:solidFill>
-                <a:latin typeface="Corporate S"/>
-              </a:rPr>
-              <a:t>Barrier over-extended onto cervical enamel</a:t>
-            </a:r>
-          </a:p>
-        </p:txBody>
-      </p:sp>
-      <p:sp>
-        <p:nvSpPr>
-          <p:cNvPr id="11" name="quiz-opt-3"/>
-          <p:cNvSpPr/>
-          <p:nvPr/>
-        </p:nvSpPr>
-        <p:spPr>
-          <a:xfrm>
-            <a:off x="1524000" y="4572000"/>
-            <a:ext cx="8001000" cy="635000"/>
-          </a:xfrm>
-          <a:prstGeom prst="roundRect">
-            <a:avLst>
-              <a:gd name="adj" fmla="val 18000"/>
-            </a:avLst>
-          </a:prstGeom>
-          <a:solidFill>
             <a:srgbClr val="283237"/>
           </a:solidFill>
           <a:ln>
@@ -19021,13 +18567,13 @@
       </p:sp>
       <p:sp>
         <p:nvSpPr>
-          <p:cNvPr id="12" name="quiz-letter-3"/>
+          <p:cNvPr id="9" name="quiz-letter-2"/>
           <p:cNvSpPr/>
           <p:nvPr/>
         </p:nvSpPr>
         <p:spPr>
           <a:xfrm>
-            <a:off x="1714500" y="4699000"/>
+            <a:off x="1714500" y="3937000"/>
             <a:ext cx="381000" cy="381000"/>
           </a:xfrm>
           <a:prstGeom prst="ellipse">
@@ -19056,6 +18602,114 @@
                 </a:solidFill>
                 <a:latin typeface="Corporate S"/>
               </a:rPr>
+              <a:t>B</a:t>
+            </a:r>
+          </a:p>
+        </p:txBody>
+      </p:sp>
+      <p:sp>
+        <p:nvSpPr>
+          <p:cNvPr id="10" name="quiz-text-2"/>
+          <p:cNvSpPr txBox="1"/>
+          <p:nvPr/>
+        </p:nvSpPr>
+        <p:spPr>
+          <a:xfrm>
+            <a:off x="2286000" y="3810000"/>
+            <a:ext cx="6985000" cy="635000"/>
+          </a:xfrm>
+          <a:prstGeom prst="rect">
+            <a:avLst/>
+          </a:prstGeom>
+          <a:noFill/>
+        </p:spPr>
+        <p:txBody>
+          <a:bodyPr wrap="square" lIns="0" rIns="0" tIns="0" bIns="0" anchor="ctr">
+            <a:noAutofit/>
+          </a:bodyPr>
+          <a:lstStyle/>
+          <a:p>
+            <a:pPr algn="l"/>
+            <a:r>
+              <a:rPr sz="2100" b="0" i="0">
+                <a:solidFill>
+                  <a:srgbClr val="FFFFFF"/>
+                </a:solidFill>
+                <a:latin typeface="Corporate S"/>
+              </a:rPr>
+              <a:t>Barrier over-extended onto cervical enamel</a:t>
+            </a:r>
+          </a:p>
+        </p:txBody>
+      </p:sp>
+      <p:sp>
+        <p:nvSpPr>
+          <p:cNvPr id="11" name="quiz-opt-3"/>
+          <p:cNvSpPr/>
+          <p:nvPr/>
+        </p:nvSpPr>
+        <p:spPr>
+          <a:xfrm>
+            <a:off x="1524000" y="4572000"/>
+            <a:ext cx="8001000" cy="635000"/>
+          </a:xfrm>
+          <a:prstGeom prst="roundRect">
+            <a:avLst>
+              <a:gd name="adj" fmla="val 18000"/>
+            </a:avLst>
+          </a:prstGeom>
+          <a:solidFill>
+            <a:srgbClr val="283237"/>
+          </a:solidFill>
+          <a:ln>
+            <a:noFill/>
+          </a:ln>
+        </p:spPr>
+        <p:txBody>
+          <a:bodyPr rtlCol="0" anchor="ctr"/>
+          <a:lstStyle/>
+          <a:p>
+            <a:pPr algn="ctr"/>
+          </a:p>
+        </p:txBody>
+      </p:sp>
+      <p:sp>
+        <p:nvSpPr>
+          <p:cNvPr id="12" name="quiz-letter-3"/>
+          <p:cNvSpPr/>
+          <p:nvPr/>
+        </p:nvSpPr>
+        <p:spPr>
+          <a:xfrm>
+            <a:off x="1714500" y="4699000"/>
+            <a:ext cx="381000" cy="381000"/>
+          </a:xfrm>
+          <a:prstGeom prst="ellipse">
+            <a:avLst/>
+          </a:prstGeom>
+          <a:solidFill>
+            <a:srgbClr val="283237"/>
+          </a:solidFill>
+          <a:ln w="19050">
+            <a:solidFill>
+              <a:srgbClr val="00A5FF"/>
+            </a:solidFill>
+          </a:ln>
+        </p:spPr>
+        <p:txBody>
+          <a:bodyPr rtlCol="0" anchor="ctr" wrap="square" lIns="0" rIns="0" tIns="0" bIns="0">
+            <a:noAutofit/>
+          </a:bodyPr>
+          <a:lstStyle/>
+          <a:p>
+            <a:pPr algn="ctr"/>
+            <a:r>
+              <a:rPr sz="1800" b="0" i="0">
+                <a:solidFill>
+                  <a:srgbClr val="00A5FF"/>
+                </a:solidFill>
+                <a:latin typeface="Corporate S"/>
+              </a:rPr>
               <a:t>C</a:t>
             </a:r>
           </a:p>
@@ -19098,42 +18752,7 @@
       </p:sp>
       <p:sp>
         <p:nvSpPr>
-          <p:cNvPr id="14" name="quiz-expl"/>
-          <p:cNvSpPr txBox="1"/>
-          <p:nvPr/>
-        </p:nvSpPr>
-        <p:spPr>
-          <a:xfrm>
-            <a:off x="1524000" y="5588000"/>
-            <a:ext cx="8001000" cy="508000"/>
-          </a:xfrm>
-          <a:prstGeom prst="rect">
-            <a:avLst/>
-          </a:prstGeom>
-          <a:noFill/>
-        </p:spPr>
-        <p:txBody>
-          <a:bodyPr wrap="square" lIns="0" rIns="0" tIns="0" bIns="0" anchor="t">
-            <a:noAutofit/>
-          </a:bodyPr>
-          <a:lstStyle/>
-          <a:p>
-            <a:pPr algn="l"/>
-            <a:r>
-              <a:rPr sz="1700" b="0" i="0">
-                <a:solidFill>
-                  <a:srgbClr val="C9D4DA"/>
-                </a:solidFill>
-                <a:latin typeface="Corporate S"/>
-              </a:rPr>
-              <a:t>The barrier covered the cervical enamel — the gel never touched it. Re-isolate correctly, then apply fresh 1 mm gel.</a:t>
-            </a:r>
-          </a:p>
-        </p:txBody>
-      </p:sp>
-      <p:sp>
-        <p:nvSpPr>
-          <p:cNvPr id="15" name="rail-line"/>
+          <p:cNvPr id="14" name="rail-line"/>
           <p:cNvSpPr/>
           <p:nvPr/>
         </p:nvSpPr>
@@ -19162,7 +18781,7 @@
       </p:sp>
       <p:sp>
         <p:nvSpPr>
-          <p:cNvPr id="16" name="rail-dot-1"/>
+          <p:cNvPr id="15" name="rail-dot-1"/>
           <p:cNvSpPr/>
           <p:nvPr/>
         </p:nvSpPr>
@@ -19193,7 +18812,7 @@
       </p:sp>
       <p:sp>
         <p:nvSpPr>
-          <p:cNvPr id="17" name="rail-num-1"/>
+          <p:cNvPr id="16" name="rail-num-1"/>
           <p:cNvSpPr txBox="1"/>
           <p:nvPr/>
         </p:nvSpPr>
@@ -19228,7 +18847,7 @@
       </p:sp>
       <p:sp>
         <p:nvSpPr>
-          <p:cNvPr id="18" name="rail-dot-2"/>
+          <p:cNvPr id="17" name="rail-dot-2"/>
           <p:cNvSpPr/>
           <p:nvPr/>
         </p:nvSpPr>
@@ -19259,7 +18878,7 @@
       </p:sp>
       <p:sp>
         <p:nvSpPr>
-          <p:cNvPr id="19" name="rail-num-2"/>
+          <p:cNvPr id="18" name="rail-num-2"/>
           <p:cNvSpPr txBox="1"/>
           <p:nvPr/>
         </p:nvSpPr>
@@ -19294,7 +18913,7 @@
       </p:sp>
       <p:sp>
         <p:nvSpPr>
-          <p:cNvPr id="20" name="rail-dot-3"/>
+          <p:cNvPr id="19" name="rail-dot-3"/>
           <p:cNvSpPr/>
           <p:nvPr/>
         </p:nvSpPr>
@@ -19325,7 +18944,7 @@
       </p:sp>
       <p:sp>
         <p:nvSpPr>
-          <p:cNvPr id="21" name="rail-num-3"/>
+          <p:cNvPr id="20" name="rail-num-3"/>
           <p:cNvSpPr txBox="1"/>
           <p:nvPr/>
         </p:nvSpPr>
@@ -19360,7 +18979,7 @@
       </p:sp>
       <p:sp>
         <p:nvSpPr>
-          <p:cNvPr id="22" name="rail-dot-4"/>
+          <p:cNvPr id="21" name="rail-dot-4"/>
           <p:cNvSpPr/>
           <p:nvPr/>
         </p:nvSpPr>
@@ -19391,7 +19010,7 @@
       </p:sp>
       <p:sp>
         <p:nvSpPr>
-          <p:cNvPr id="23" name="rail-num-4"/>
+          <p:cNvPr id="22" name="rail-num-4"/>
           <p:cNvSpPr txBox="1"/>
           <p:nvPr/>
         </p:nvSpPr>
@@ -19426,7 +19045,7 @@
       </p:sp>
       <p:sp>
         <p:nvSpPr>
-          <p:cNvPr id="24" name="rail-dot-5"/>
+          <p:cNvPr id="23" name="rail-dot-5"/>
           <p:cNvSpPr/>
           <p:nvPr/>
         </p:nvSpPr>
@@ -19457,7 +19076,7 @@
       </p:sp>
       <p:sp>
         <p:nvSpPr>
-          <p:cNvPr id="25" name="rail-num-5"/>
+          <p:cNvPr id="24" name="rail-num-5"/>
           <p:cNvSpPr txBox="1"/>
           <p:nvPr/>
         </p:nvSpPr>
@@ -19492,7 +19111,7 @@
       </p:sp>
       <p:sp>
         <p:nvSpPr>
-          <p:cNvPr id="26" name="footer"/>
+          <p:cNvPr id="25" name="footer"/>
           <p:cNvSpPr txBox="1"/>
           <p:nvPr/>
         </p:nvSpPr>
@@ -20016,6 +19635,845 @@
 </p:sld>
 </file>
 
+<file path=ppt/slides/slide20.xml><?xml version="1.0" encoding="utf-8"?>
+<p:sld xmlns:a="http://schemas.openxmlformats.org/drawingml/2006/main" xmlns:p="http://schemas.openxmlformats.org/presentationml/2006/main" xmlns:r="http://schemas.openxmlformats.org/officeDocument/2006/relationships">
+  <p:cSld>
+    <p:spTree>
+      <p:nvGrpSpPr>
+        <p:cNvPr id="1" name=""/>
+        <p:cNvGrpSpPr/>
+        <p:nvPr/>
+      </p:nvGrpSpPr>
+      <p:grpSpPr/>
+      <p:sp>
+        <p:nvSpPr>
+          <p:cNvPr id="2" name="Text Placeholder 1"/>
+          <p:cNvSpPr>
+            <a:spLocks noGrp="1"/>
+          </p:cNvSpPr>
+          <p:nvPr>
+            <p:ph type="body" idx="10"/>
+          </p:nvPr>
+        </p:nvSpPr>
+        <p:spPr/>
+        <p:txBody>
+          <a:bodyPr/>
+          <a:lstStyle/>
+          <a:p>
+            <a:r>
+              <a:t>02</a:t>
+            </a:r>
+          </a:p>
+        </p:txBody>
+      </p:sp>
+      <p:sp>
+        <p:nvSpPr>
+          <p:cNvPr id="3" name="Text Placeholder 2"/>
+          <p:cNvSpPr>
+            <a:spLocks noGrp="1"/>
+          </p:cNvSpPr>
+          <p:nvPr>
+            <p:ph type="body" idx="11"/>
+          </p:nvPr>
+        </p:nvSpPr>
+        <p:spPr/>
+        <p:txBody>
+          <a:bodyPr/>
+          <a:lstStyle/>
+          <a:p>
+            <a:r>
+              <a:t>Layout 18 · quiz</a:t>
+            </a:r>
+          </a:p>
+        </p:txBody>
+      </p:sp>
+      <p:sp>
+        <p:nvSpPr>
+          <p:cNvPr id="4" name="Text Placeholder 3"/>
+          <p:cNvSpPr>
+            <a:spLocks noGrp="1"/>
+          </p:cNvSpPr>
+          <p:nvPr>
+            <p:ph type="body" idx="36"/>
+          </p:nvPr>
+        </p:nvSpPr>
+        <p:spPr/>
+        <p:txBody>
+          <a:bodyPr/>
+          <a:lstStyle/>
+          <a:p>
+            <a:r>
+              <a:t>Cervical thirds still yellow after cycle 3 — what is the most likely cause?</a:t>
+            </a:r>
+          </a:p>
+        </p:txBody>
+      </p:sp>
+      <p:sp>
+        <p:nvSpPr>
+          <p:cNvPr id="5" name="quiz-opt-1"/>
+          <p:cNvSpPr/>
+          <p:nvPr/>
+        </p:nvSpPr>
+        <p:spPr>
+          <a:xfrm>
+            <a:off x="1524000" y="3048000"/>
+            <a:ext cx="8001000" cy="635000"/>
+          </a:xfrm>
+          <a:prstGeom prst="roundRect">
+            <a:avLst>
+              <a:gd name="adj" fmla="val 18000"/>
+            </a:avLst>
+          </a:prstGeom>
+          <a:solidFill>
+            <a:srgbClr val="283237"/>
+          </a:solidFill>
+          <a:ln>
+            <a:noFill/>
+          </a:ln>
+        </p:spPr>
+        <p:txBody>
+          <a:bodyPr rtlCol="0" anchor="ctr"/>
+          <a:lstStyle/>
+          <a:p>
+            <a:pPr algn="ctr"/>
+          </a:p>
+        </p:txBody>
+      </p:sp>
+      <p:sp>
+        <p:nvSpPr>
+          <p:cNvPr id="6" name="quiz-letter-1"/>
+          <p:cNvSpPr/>
+          <p:nvPr/>
+        </p:nvSpPr>
+        <p:spPr>
+          <a:xfrm>
+            <a:off x="1714500" y="3175000"/>
+            <a:ext cx="381000" cy="381000"/>
+          </a:xfrm>
+          <a:prstGeom prst="ellipse">
+            <a:avLst/>
+          </a:prstGeom>
+          <a:solidFill>
+            <a:srgbClr val="283237"/>
+          </a:solidFill>
+          <a:ln w="19050">
+            <a:solidFill>
+              <a:srgbClr val="00A5FF"/>
+            </a:solidFill>
+          </a:ln>
+        </p:spPr>
+        <p:txBody>
+          <a:bodyPr rtlCol="0" anchor="ctr" wrap="square" lIns="0" rIns="0" tIns="0" bIns="0">
+            <a:noAutofit/>
+          </a:bodyPr>
+          <a:lstStyle/>
+          <a:p>
+            <a:pPr algn="ctr"/>
+            <a:r>
+              <a:rPr sz="1800" b="0" i="0">
+                <a:solidFill>
+                  <a:srgbClr val="00A5FF"/>
+                </a:solidFill>
+                <a:latin typeface="Corporate S"/>
+              </a:rPr>
+              <a:t>A</a:t>
+            </a:r>
+          </a:p>
+        </p:txBody>
+      </p:sp>
+      <p:sp>
+        <p:nvSpPr>
+          <p:cNvPr id="7" name="quiz-text-1"/>
+          <p:cNvSpPr txBox="1"/>
+          <p:nvPr/>
+        </p:nvSpPr>
+        <p:spPr>
+          <a:xfrm>
+            <a:off x="2286000" y="3048000"/>
+            <a:ext cx="6985000" cy="635000"/>
+          </a:xfrm>
+          <a:prstGeom prst="rect">
+            <a:avLst/>
+          </a:prstGeom>
+          <a:noFill/>
+        </p:spPr>
+        <p:txBody>
+          <a:bodyPr wrap="square" lIns="0" rIns="0" tIns="0" bIns="0" anchor="ctr">
+            <a:noAutofit/>
+          </a:bodyPr>
+          <a:lstStyle/>
+          <a:p>
+            <a:pPr algn="l"/>
+            <a:r>
+              <a:rPr sz="2100" b="0" i="0">
+                <a:solidFill>
+                  <a:srgbClr val="FFFFFF"/>
+                </a:solidFill>
+                <a:latin typeface="Corporate S"/>
+              </a:rPr>
+              <a:t>Gel layer below 1 mm</a:t>
+            </a:r>
+          </a:p>
+        </p:txBody>
+      </p:sp>
+      <p:sp>
+        <p:nvSpPr>
+          <p:cNvPr id="8" name="quiz-opt-2"/>
+          <p:cNvSpPr/>
+          <p:nvPr/>
+        </p:nvSpPr>
+        <p:spPr>
+          <a:xfrm>
+            <a:off x="1524000" y="3810000"/>
+            <a:ext cx="8001000" cy="635000"/>
+          </a:xfrm>
+          <a:prstGeom prst="roundRect">
+            <a:avLst>
+              <a:gd name="adj" fmla="val 18000"/>
+            </a:avLst>
+          </a:prstGeom>
+          <a:solidFill>
+            <a:srgbClr val="00A5FF"/>
+          </a:solidFill>
+          <a:ln>
+            <a:noFill/>
+          </a:ln>
+          <a:effectLst>
+            <a:glow rad="317500">
+              <a:srgbClr val="00A5FF">
+                <a:alpha val="50000"/>
+              </a:srgbClr>
+            </a:glow>
+          </a:effectLst>
+        </p:spPr>
+        <p:txBody>
+          <a:bodyPr rtlCol="0" anchor="ctr"/>
+          <a:lstStyle/>
+          <a:p>
+            <a:pPr algn="ctr"/>
+          </a:p>
+        </p:txBody>
+      </p:sp>
+      <p:sp>
+        <p:nvSpPr>
+          <p:cNvPr id="9" name="quiz-letter-2"/>
+          <p:cNvSpPr/>
+          <p:nvPr/>
+        </p:nvSpPr>
+        <p:spPr>
+          <a:xfrm>
+            <a:off x="1714500" y="3937000"/>
+            <a:ext cx="381000" cy="381000"/>
+          </a:xfrm>
+          <a:prstGeom prst="ellipse">
+            <a:avLst/>
+          </a:prstGeom>
+          <a:solidFill>
+            <a:srgbClr val="FFFFFF"/>
+          </a:solidFill>
+          <a:ln>
+            <a:noFill/>
+          </a:ln>
+        </p:spPr>
+        <p:txBody>
+          <a:bodyPr rtlCol="0" anchor="ctr" wrap="square" lIns="0" rIns="0" tIns="0" bIns="0">
+            <a:noAutofit/>
+          </a:bodyPr>
+          <a:lstStyle/>
+          <a:p>
+            <a:pPr algn="ctr"/>
+            <a:r>
+              <a:rPr sz="1800" b="0" i="0">
+                <a:solidFill>
+                  <a:srgbClr val="1F272B"/>
+                </a:solidFill>
+                <a:latin typeface="Corporate S"/>
+              </a:rPr>
+              <a:t>B</a:t>
+            </a:r>
+          </a:p>
+        </p:txBody>
+      </p:sp>
+      <p:sp>
+        <p:nvSpPr>
+          <p:cNvPr id="10" name="quiz-text-2"/>
+          <p:cNvSpPr txBox="1"/>
+          <p:nvPr/>
+        </p:nvSpPr>
+        <p:spPr>
+          <a:xfrm>
+            <a:off x="2286000" y="3810000"/>
+            <a:ext cx="6985000" cy="635000"/>
+          </a:xfrm>
+          <a:prstGeom prst="rect">
+            <a:avLst/>
+          </a:prstGeom>
+          <a:noFill/>
+        </p:spPr>
+        <p:txBody>
+          <a:bodyPr wrap="square" lIns="0" rIns="0" tIns="0" bIns="0" anchor="ctr">
+            <a:noAutofit/>
+          </a:bodyPr>
+          <a:lstStyle/>
+          <a:p>
+            <a:pPr algn="l"/>
+            <a:r>
+              <a:rPr sz="2100" b="0" i="0">
+                <a:solidFill>
+                  <a:srgbClr val="1F272B"/>
+                </a:solidFill>
+                <a:latin typeface="Corporate S"/>
+              </a:rPr>
+              <a:t>Barrier over-extended onto cervical enamel</a:t>
+            </a:r>
+          </a:p>
+        </p:txBody>
+      </p:sp>
+      <p:sp>
+        <p:nvSpPr>
+          <p:cNvPr id="11" name="quiz-opt-3"/>
+          <p:cNvSpPr/>
+          <p:nvPr/>
+        </p:nvSpPr>
+        <p:spPr>
+          <a:xfrm>
+            <a:off x="1524000" y="4572000"/>
+            <a:ext cx="8001000" cy="635000"/>
+          </a:xfrm>
+          <a:prstGeom prst="roundRect">
+            <a:avLst>
+              <a:gd name="adj" fmla="val 18000"/>
+            </a:avLst>
+          </a:prstGeom>
+          <a:solidFill>
+            <a:srgbClr val="283237"/>
+          </a:solidFill>
+          <a:ln>
+            <a:noFill/>
+          </a:ln>
+        </p:spPr>
+        <p:txBody>
+          <a:bodyPr rtlCol="0" anchor="ctr"/>
+          <a:lstStyle/>
+          <a:p>
+            <a:pPr algn="ctr"/>
+          </a:p>
+        </p:txBody>
+      </p:sp>
+      <p:sp>
+        <p:nvSpPr>
+          <p:cNvPr id="12" name="quiz-letter-3"/>
+          <p:cNvSpPr/>
+          <p:nvPr/>
+        </p:nvSpPr>
+        <p:spPr>
+          <a:xfrm>
+            <a:off x="1714500" y="4699000"/>
+            <a:ext cx="381000" cy="381000"/>
+          </a:xfrm>
+          <a:prstGeom prst="ellipse">
+            <a:avLst/>
+          </a:prstGeom>
+          <a:solidFill>
+            <a:srgbClr val="283237"/>
+          </a:solidFill>
+          <a:ln w="19050">
+            <a:solidFill>
+              <a:srgbClr val="00A5FF"/>
+            </a:solidFill>
+          </a:ln>
+        </p:spPr>
+        <p:txBody>
+          <a:bodyPr rtlCol="0" anchor="ctr" wrap="square" lIns="0" rIns="0" tIns="0" bIns="0">
+            <a:noAutofit/>
+          </a:bodyPr>
+          <a:lstStyle/>
+          <a:p>
+            <a:pPr algn="ctr"/>
+            <a:r>
+              <a:rPr sz="1800" b="0" i="0">
+                <a:solidFill>
+                  <a:srgbClr val="00A5FF"/>
+                </a:solidFill>
+                <a:latin typeface="Corporate S"/>
+              </a:rPr>
+              <a:t>C</a:t>
+            </a:r>
+          </a:p>
+        </p:txBody>
+      </p:sp>
+      <p:sp>
+        <p:nvSpPr>
+          <p:cNvPr id="13" name="quiz-text-3"/>
+          <p:cNvSpPr txBox="1"/>
+          <p:nvPr/>
+        </p:nvSpPr>
+        <p:spPr>
+          <a:xfrm>
+            <a:off x="2286000" y="4572000"/>
+            <a:ext cx="6985000" cy="635000"/>
+          </a:xfrm>
+          <a:prstGeom prst="rect">
+            <a:avLst/>
+          </a:prstGeom>
+          <a:noFill/>
+        </p:spPr>
+        <p:txBody>
+          <a:bodyPr wrap="square" lIns="0" rIns="0" tIns="0" bIns="0" anchor="ctr">
+            <a:noAutofit/>
+          </a:bodyPr>
+          <a:lstStyle/>
+          <a:p>
+            <a:pPr algn="l"/>
+            <a:r>
+              <a:rPr sz="2100" b="0" i="0">
+                <a:solidFill>
+                  <a:srgbClr val="FFFFFF"/>
+                </a:solidFill>
+                <a:latin typeface="Corporate S"/>
+              </a:rPr>
+              <a:t>Lamp gap or tilt</a:t>
+            </a:r>
+          </a:p>
+        </p:txBody>
+      </p:sp>
+      <p:sp>
+        <p:nvSpPr>
+          <p:cNvPr id="14" name="quiz-expl"/>
+          <p:cNvSpPr txBox="1"/>
+          <p:nvPr/>
+        </p:nvSpPr>
+        <p:spPr>
+          <a:xfrm>
+            <a:off x="1524000" y="5588000"/>
+            <a:ext cx="8001000" cy="508000"/>
+          </a:xfrm>
+          <a:prstGeom prst="rect">
+            <a:avLst/>
+          </a:prstGeom>
+          <a:noFill/>
+        </p:spPr>
+        <p:txBody>
+          <a:bodyPr wrap="square" lIns="0" rIns="0" tIns="0" bIns="0" anchor="t">
+            <a:noAutofit/>
+          </a:bodyPr>
+          <a:lstStyle/>
+          <a:p>
+            <a:pPr algn="l"/>
+            <a:r>
+              <a:rPr sz="1700" b="0" i="0">
+                <a:solidFill>
+                  <a:srgbClr val="C9D4DA"/>
+                </a:solidFill>
+                <a:latin typeface="Corporate S"/>
+              </a:rPr>
+              <a:t>The barrier covered the cervical enamel — the gel never touched it. Re-isolate correctly, then apply fresh 1 mm gel.</a:t>
+            </a:r>
+          </a:p>
+        </p:txBody>
+      </p:sp>
+      <p:sp>
+        <p:nvSpPr>
+          <p:cNvPr id="15" name="rail-line"/>
+          <p:cNvSpPr/>
+          <p:nvPr/>
+        </p:nvSpPr>
+        <p:spPr>
+          <a:xfrm>
+            <a:off x="425450" y="2000250"/>
+            <a:ext cx="12700" cy="2641600"/>
+          </a:xfrm>
+          <a:prstGeom prst="rect">
+            <a:avLst/>
+          </a:prstGeom>
+          <a:solidFill>
+            <a:srgbClr val="3D4B52"/>
+          </a:solidFill>
+          <a:ln>
+            <a:noFill/>
+          </a:ln>
+        </p:spPr>
+        <p:txBody>
+          <a:bodyPr rtlCol="0" anchor="ctr"/>
+          <a:lstStyle/>
+          <a:p>
+            <a:pPr algn="ctr"/>
+          </a:p>
+        </p:txBody>
+      </p:sp>
+      <p:sp>
+        <p:nvSpPr>
+          <p:cNvPr id="16" name="rail-dot-1"/>
+          <p:cNvSpPr/>
+          <p:nvPr/>
+        </p:nvSpPr>
+        <p:spPr>
+          <a:xfrm>
+            <a:off x="381000" y="1949450"/>
+            <a:ext cx="101600" cy="101600"/>
+          </a:xfrm>
+          <a:prstGeom prst="ellipse">
+            <a:avLst/>
+          </a:prstGeom>
+          <a:solidFill>
+            <a:srgbClr val="192024"/>
+          </a:solidFill>
+          <a:ln w="19050">
+            <a:solidFill>
+              <a:srgbClr val="56666E"/>
+            </a:solidFill>
+          </a:ln>
+        </p:spPr>
+        <p:txBody>
+          <a:bodyPr rtlCol="0" anchor="ctr"/>
+          <a:lstStyle/>
+          <a:p>
+            <a:pPr algn="ctr"/>
+          </a:p>
+        </p:txBody>
+      </p:sp>
+      <p:sp>
+        <p:nvSpPr>
+          <p:cNvPr id="17" name="rail-num-1"/>
+          <p:cNvSpPr txBox="1"/>
+          <p:nvPr/>
+        </p:nvSpPr>
+        <p:spPr>
+          <a:xfrm>
+            <a:off x="635000" y="1898650"/>
+            <a:ext cx="254000" cy="203200"/>
+          </a:xfrm>
+          <a:prstGeom prst="rect">
+            <a:avLst/>
+          </a:prstGeom>
+          <a:noFill/>
+        </p:spPr>
+        <p:txBody>
+          <a:bodyPr wrap="square" lIns="0" rIns="0" tIns="0" bIns="0" anchor="ctr">
+            <a:noAutofit/>
+          </a:bodyPr>
+          <a:lstStyle/>
+          <a:p>
+            <a:pPr algn="l"/>
+            <a:r>
+              <a:rPr sz="1300" b="0" i="0">
+                <a:solidFill>
+                  <a:srgbClr val="56666E"/>
+                </a:solidFill>
+                <a:latin typeface="Corporate S"/>
+              </a:rPr>
+              <a:t>1</a:t>
+            </a:r>
+          </a:p>
+        </p:txBody>
+      </p:sp>
+      <p:sp>
+        <p:nvSpPr>
+          <p:cNvPr id="18" name="rail-dot-2"/>
+          <p:cNvSpPr/>
+          <p:nvPr/>
+        </p:nvSpPr>
+        <p:spPr>
+          <a:xfrm>
+            <a:off x="381000" y="2609850"/>
+            <a:ext cx="101600" cy="101600"/>
+          </a:xfrm>
+          <a:prstGeom prst="ellipse">
+            <a:avLst/>
+          </a:prstGeom>
+          <a:solidFill>
+            <a:srgbClr val="192024"/>
+          </a:solidFill>
+          <a:ln w="19050">
+            <a:solidFill>
+              <a:srgbClr val="56666E"/>
+            </a:solidFill>
+          </a:ln>
+        </p:spPr>
+        <p:txBody>
+          <a:bodyPr rtlCol="0" anchor="ctr"/>
+          <a:lstStyle/>
+          <a:p>
+            <a:pPr algn="ctr"/>
+          </a:p>
+        </p:txBody>
+      </p:sp>
+      <p:sp>
+        <p:nvSpPr>
+          <p:cNvPr id="19" name="rail-num-2"/>
+          <p:cNvSpPr txBox="1"/>
+          <p:nvPr/>
+        </p:nvSpPr>
+        <p:spPr>
+          <a:xfrm>
+            <a:off x="635000" y="2559050"/>
+            <a:ext cx="254000" cy="203200"/>
+          </a:xfrm>
+          <a:prstGeom prst="rect">
+            <a:avLst/>
+          </a:prstGeom>
+          <a:noFill/>
+        </p:spPr>
+        <p:txBody>
+          <a:bodyPr wrap="square" lIns="0" rIns="0" tIns="0" bIns="0" anchor="ctr">
+            <a:noAutofit/>
+          </a:bodyPr>
+          <a:lstStyle/>
+          <a:p>
+            <a:pPr algn="l"/>
+            <a:r>
+              <a:rPr sz="1300" b="0" i="0">
+                <a:solidFill>
+                  <a:srgbClr val="56666E"/>
+                </a:solidFill>
+                <a:latin typeface="Corporate S"/>
+              </a:rPr>
+              <a:t>2</a:t>
+            </a:r>
+          </a:p>
+        </p:txBody>
+      </p:sp>
+      <p:sp>
+        <p:nvSpPr>
+          <p:cNvPr id="20" name="rail-dot-3"/>
+          <p:cNvSpPr/>
+          <p:nvPr/>
+        </p:nvSpPr>
+        <p:spPr>
+          <a:xfrm>
+            <a:off x="381000" y="3270250"/>
+            <a:ext cx="101600" cy="101600"/>
+          </a:xfrm>
+          <a:prstGeom prst="ellipse">
+            <a:avLst/>
+          </a:prstGeom>
+          <a:solidFill>
+            <a:srgbClr val="192024"/>
+          </a:solidFill>
+          <a:ln w="19050">
+            <a:solidFill>
+              <a:srgbClr val="56666E"/>
+            </a:solidFill>
+          </a:ln>
+        </p:spPr>
+        <p:txBody>
+          <a:bodyPr rtlCol="0" anchor="ctr"/>
+          <a:lstStyle/>
+          <a:p>
+            <a:pPr algn="ctr"/>
+          </a:p>
+        </p:txBody>
+      </p:sp>
+      <p:sp>
+        <p:nvSpPr>
+          <p:cNvPr id="21" name="rail-num-3"/>
+          <p:cNvSpPr txBox="1"/>
+          <p:nvPr/>
+        </p:nvSpPr>
+        <p:spPr>
+          <a:xfrm>
+            <a:off x="635000" y="3219450"/>
+            <a:ext cx="254000" cy="203200"/>
+          </a:xfrm>
+          <a:prstGeom prst="rect">
+            <a:avLst/>
+          </a:prstGeom>
+          <a:noFill/>
+        </p:spPr>
+        <p:txBody>
+          <a:bodyPr wrap="square" lIns="0" rIns="0" tIns="0" bIns="0" anchor="ctr">
+            <a:noAutofit/>
+          </a:bodyPr>
+          <a:lstStyle/>
+          <a:p>
+            <a:pPr algn="l"/>
+            <a:r>
+              <a:rPr sz="1300" b="0" i="0">
+                <a:solidFill>
+                  <a:srgbClr val="56666E"/>
+                </a:solidFill>
+                <a:latin typeface="Corporate S"/>
+              </a:rPr>
+              <a:t>3</a:t>
+            </a:r>
+          </a:p>
+        </p:txBody>
+      </p:sp>
+      <p:sp>
+        <p:nvSpPr>
+          <p:cNvPr id="22" name="rail-dot-4"/>
+          <p:cNvSpPr/>
+          <p:nvPr/>
+        </p:nvSpPr>
+        <p:spPr>
+          <a:xfrm>
+            <a:off x="381000" y="3930650"/>
+            <a:ext cx="101600" cy="101600"/>
+          </a:xfrm>
+          <a:prstGeom prst="ellipse">
+            <a:avLst/>
+          </a:prstGeom>
+          <a:solidFill>
+            <a:srgbClr val="192024"/>
+          </a:solidFill>
+          <a:ln w="19050">
+            <a:solidFill>
+              <a:srgbClr val="56666E"/>
+            </a:solidFill>
+          </a:ln>
+        </p:spPr>
+        <p:txBody>
+          <a:bodyPr rtlCol="0" anchor="ctr"/>
+          <a:lstStyle/>
+          <a:p>
+            <a:pPr algn="ctr"/>
+          </a:p>
+        </p:txBody>
+      </p:sp>
+      <p:sp>
+        <p:nvSpPr>
+          <p:cNvPr id="23" name="rail-num-4"/>
+          <p:cNvSpPr txBox="1"/>
+          <p:nvPr/>
+        </p:nvSpPr>
+        <p:spPr>
+          <a:xfrm>
+            <a:off x="635000" y="3879850"/>
+            <a:ext cx="254000" cy="203200"/>
+          </a:xfrm>
+          <a:prstGeom prst="rect">
+            <a:avLst/>
+          </a:prstGeom>
+          <a:noFill/>
+        </p:spPr>
+        <p:txBody>
+          <a:bodyPr wrap="square" lIns="0" rIns="0" tIns="0" bIns="0" anchor="ctr">
+            <a:noAutofit/>
+          </a:bodyPr>
+          <a:lstStyle/>
+          <a:p>
+            <a:pPr algn="l"/>
+            <a:r>
+              <a:rPr sz="1300" b="0" i="0">
+                <a:solidFill>
+                  <a:srgbClr val="56666E"/>
+                </a:solidFill>
+                <a:latin typeface="Corporate S"/>
+              </a:rPr>
+              <a:t>4</a:t>
+            </a:r>
+          </a:p>
+        </p:txBody>
+      </p:sp>
+      <p:sp>
+        <p:nvSpPr>
+          <p:cNvPr id="24" name="rail-dot-5"/>
+          <p:cNvSpPr/>
+          <p:nvPr/>
+        </p:nvSpPr>
+        <p:spPr>
+          <a:xfrm>
+            <a:off x="381000" y="4591050"/>
+            <a:ext cx="101600" cy="101600"/>
+          </a:xfrm>
+          <a:prstGeom prst="ellipse">
+            <a:avLst/>
+          </a:prstGeom>
+          <a:solidFill>
+            <a:srgbClr val="192024"/>
+          </a:solidFill>
+          <a:ln w="19050">
+            <a:solidFill>
+              <a:srgbClr val="56666E"/>
+            </a:solidFill>
+          </a:ln>
+        </p:spPr>
+        <p:txBody>
+          <a:bodyPr rtlCol="0" anchor="ctr"/>
+          <a:lstStyle/>
+          <a:p>
+            <a:pPr algn="ctr"/>
+          </a:p>
+        </p:txBody>
+      </p:sp>
+      <p:sp>
+        <p:nvSpPr>
+          <p:cNvPr id="25" name="rail-num-5"/>
+          <p:cNvSpPr txBox="1"/>
+          <p:nvPr/>
+        </p:nvSpPr>
+        <p:spPr>
+          <a:xfrm>
+            <a:off x="635000" y="4540250"/>
+            <a:ext cx="254000" cy="203200"/>
+          </a:xfrm>
+          <a:prstGeom prst="rect">
+            <a:avLst/>
+          </a:prstGeom>
+          <a:noFill/>
+        </p:spPr>
+        <p:txBody>
+          <a:bodyPr wrap="square" lIns="0" rIns="0" tIns="0" bIns="0" anchor="ctr">
+            <a:noAutofit/>
+          </a:bodyPr>
+          <a:lstStyle/>
+          <a:p>
+            <a:pPr algn="l"/>
+            <a:r>
+              <a:rPr sz="1300" b="0" i="0">
+                <a:solidFill>
+                  <a:srgbClr val="56666E"/>
+                </a:solidFill>
+                <a:latin typeface="Corporate S"/>
+              </a:rPr>
+              <a:t>5</a:t>
+            </a:r>
+          </a:p>
+        </p:txBody>
+      </p:sp>
+      <p:sp>
+        <p:nvSpPr>
+          <p:cNvPr id="26" name="footer"/>
+          <p:cNvSpPr txBox="1"/>
+          <p:nvPr/>
+        </p:nvSpPr>
+        <p:spPr>
+          <a:xfrm>
+            <a:off x="1524000" y="6413500"/>
+            <a:ext cx="7620000" cy="190500"/>
+          </a:xfrm>
+          <a:prstGeom prst="rect">
+            <a:avLst/>
+          </a:prstGeom>
+          <a:noFill/>
+        </p:spPr>
+        <p:txBody>
+          <a:bodyPr wrap="square" lIns="0" rIns="0" tIns="0" bIns="0" anchor="t">
+            <a:noAutofit/>
+          </a:bodyPr>
+          <a:lstStyle/>
+          <a:p>
+            <a:pPr algn="l"/>
+            <a:r>
+              <a:rPr sz="1100" b="0" i="0" cap="all" spc="176">
+                <a:solidFill>
+                  <a:srgbClr val="8597A0"/>
+                </a:solidFill>
+                <a:latin typeface="Corporate S"/>
+              </a:rPr>
+              <a:t>IN-OFFICE WHITENING WORKFLOW · 20</a:t>
+            </a:r>
+          </a:p>
+        </p:txBody>
+      </p:sp>
+    </p:spTree>
+  </p:cSld>
+  <p:clrMapOvr>
+    <a:masterClrMapping/>
+  </p:clrMapOvr>
+</p:sld>
+</file>
+
 <file path=ppt/slides/slide3.xml><?xml version="1.0" encoding="utf-8"?>
 <p:sld xmlns:a="http://schemas.openxmlformats.org/drawingml/2006/main" xmlns:p="http://schemas.openxmlformats.org/presentationml/2006/main" xmlns:r="http://schemas.openxmlformats.org/officeDocument/2006/relationships">
   <p:cSld>
@@ -22172,133 +22630,27 @@
           </a:p>
         </p:txBody>
       </p:sp>
-      <p:sp>
-        <p:nvSpPr>
-          <p:cNvPr id="8" name="brief-card"/>
-          <p:cNvSpPr/>
-          <p:nvPr/>
-        </p:nvSpPr>
-        <p:spPr>
-          <a:xfrm>
-            <a:off x="6350000" y="1905000"/>
-            <a:ext cx="5080000" cy="2540000"/>
-          </a:xfrm>
-          <a:prstGeom prst="rect">
-            <a:avLst/>
-          </a:prstGeom>
-          <a:solidFill>
-            <a:srgbClr val="DEE7EC"/>
-          </a:solidFill>
-          <a:ln w="12700">
-            <a:solidFill>
-              <a:srgbClr val="ABB7BE"/>
-            </a:solidFill>
-            <a:prstDash val="dash"/>
-          </a:ln>
-        </p:spPr>
-        <p:txBody>
-          <a:bodyPr rtlCol="0" anchor="ctr"/>
-          <a:lstStyle/>
-          <a:p>
-            <a:pPr algn="ctr"/>
-          </a:p>
-        </p:txBody>
-      </p:sp>
-      <p:sp>
-        <p:nvSpPr>
-          <p:cNvPr id="9" name="brief-icon"/>
-          <p:cNvSpPr/>
-          <p:nvPr/>
-        </p:nvSpPr>
-        <p:spPr>
-          <a:xfrm>
-            <a:off x="8686800" y="2679700"/>
-            <a:ext cx="406400" cy="292100"/>
-          </a:xfrm>
-          <a:prstGeom prst="roundRect">
-            <a:avLst>
-              <a:gd name="adj" fmla="val 17391"/>
-            </a:avLst>
-          </a:prstGeom>
-          <a:solidFill>
-            <a:srgbClr val="ABB7BE"/>
-          </a:solidFill>
-          <a:ln>
-            <a:noFill/>
-          </a:ln>
-        </p:spPr>
-        <p:txBody>
-          <a:bodyPr rtlCol="0" anchor="ctr"/>
-          <a:lstStyle/>
-          <a:p>
-            <a:pPr algn="ctr"/>
-          </a:p>
-        </p:txBody>
-      </p:sp>
-      <p:sp>
-        <p:nvSpPr>
-          <p:cNvPr id="10" name="brief-icon-lens"/>
-          <p:cNvSpPr/>
-          <p:nvPr/>
-        </p:nvSpPr>
-        <p:spPr>
-          <a:xfrm>
-            <a:off x="8813800" y="2749550"/>
-            <a:ext cx="152400" cy="152400"/>
-          </a:xfrm>
-          <a:prstGeom prst="ellipse">
-            <a:avLst/>
-          </a:prstGeom>
-          <a:solidFill>
-            <a:srgbClr val="DEE7EC"/>
-          </a:solidFill>
-          <a:ln>
-            <a:noFill/>
-          </a:ln>
-        </p:spPr>
-        <p:txBody>
-          <a:bodyPr rtlCol="0" anchor="ctr"/>
-          <a:lstStyle/>
-          <a:p>
-            <a:pPr algn="ctr"/>
-          </a:p>
-        </p:txBody>
-      </p:sp>
-      <p:sp>
-        <p:nvSpPr>
-          <p:cNvPr id="11" name="brief-text"/>
-          <p:cNvSpPr txBox="1"/>
-          <p:nvPr/>
-        </p:nvSpPr>
-        <p:spPr>
-          <a:xfrm>
-            <a:off x="6604000" y="3073400"/>
-            <a:ext cx="4572000" cy="762000"/>
-          </a:xfrm>
-          <a:prstGeom prst="rect">
-            <a:avLst/>
-          </a:prstGeom>
-          <a:noFill/>
-        </p:spPr>
-        <p:txBody>
-          <a:bodyPr wrap="square" lIns="0" rIns="0" tIns="0" bIns="0" anchor="t">
-            <a:noAutofit/>
-          </a:bodyPr>
-          <a:lstStyle/>
-          <a:p>
-            <a:pPr algn="ctr"/>
-            <a:r>
-              <a:rPr sz="1700" b="0" i="0">
-                <a:solidFill>
-                  <a:srgbClr val="5D6C73"/>
-                </a:solidFill>
-                <a:latin typeface="Corporate S"/>
-              </a:rPr>
-              <a:t>Set-up: lamp docked on the lip retractor, patient wearing filtered goggles</a:t>
-            </a:r>
-          </a:p>
-        </p:txBody>
-      </p:sp>
+      <p:pic>
+        <p:nvPicPr>
+          <p:cNvPr id="6" name="Picture Placeholder 5" descr="lamp-docked-goggles.jpg"/>
+          <p:cNvPicPr>
+            <a:picLocks noGrp="1" noChangeAspect="1"/>
+          </p:cNvPicPr>
+          <p:nvPr>
+            <p:ph type="pic" idx="15"/>
+          </p:nvPr>
+        </p:nvPicPr>
+        <p:blipFill>
+          <a:blip r:embed="rId2"/>
+          <a:srcRect t="38" b="38"/>
+          <a:stretch>
+            <a:fillRect/>
+          </a:stretch>
+        </p:blipFill>
+        <p:spPr>
+          <a:noFill/>
+        </p:spPr>
+      </p:pic>
       <p:sp>
         <p:nvSpPr>
           <p:cNvPr id="7" name="Text Placeholder 6"/>
@@ -22322,7 +22674,7 @@
       </p:sp>
       <p:sp>
         <p:nvSpPr>
-          <p:cNvPr id="12" name="rail-line"/>
+          <p:cNvPr id="8" name="rail-line"/>
           <p:cNvSpPr/>
           <p:nvPr/>
         </p:nvSpPr>
@@ -22351,7 +22703,7 @@
       </p:sp>
       <p:sp>
         <p:nvSpPr>
-          <p:cNvPr id="13" name="rail-dot-1"/>
+          <p:cNvPr id="9" name="rail-dot-1"/>
           <p:cNvSpPr/>
           <p:nvPr/>
         </p:nvSpPr>
@@ -22380,7 +22732,7 @@
       </p:sp>
       <p:sp>
         <p:nvSpPr>
-          <p:cNvPr id="14" name="rail-num-1"/>
+          <p:cNvPr id="10" name="rail-num-1"/>
           <p:cNvSpPr txBox="1"/>
           <p:nvPr/>
         </p:nvSpPr>
@@ -22415,7 +22767,7 @@
       </p:sp>
       <p:sp>
         <p:nvSpPr>
-          <p:cNvPr id="15" name="rail-dot-2-active"/>
+          <p:cNvPr id="11" name="rail-dot-2-active"/>
           <p:cNvSpPr/>
           <p:nvPr/>
         </p:nvSpPr>
@@ -22451,7 +22803,7 @@
       </p:sp>
       <p:sp>
         <p:nvSpPr>
-          <p:cNvPr id="16" name="rail-num-2"/>
+          <p:cNvPr id="12" name="rail-num-2"/>
           <p:cNvSpPr txBox="1"/>
           <p:nvPr/>
         </p:nvSpPr>
@@ -22486,7 +22838,7 @@
       </p:sp>
       <p:sp>
         <p:nvSpPr>
-          <p:cNvPr id="17" name="rail-dot-3"/>
+          <p:cNvPr id="13" name="rail-dot-3"/>
           <p:cNvSpPr/>
           <p:nvPr/>
         </p:nvSpPr>
@@ -22517,7 +22869,7 @@
       </p:sp>
       <p:sp>
         <p:nvSpPr>
-          <p:cNvPr id="18" name="rail-num-3"/>
+          <p:cNvPr id="14" name="rail-num-3"/>
           <p:cNvSpPr txBox="1"/>
           <p:nvPr/>
         </p:nvSpPr>
@@ -22552,7 +22904,7 @@
       </p:sp>
       <p:sp>
         <p:nvSpPr>
-          <p:cNvPr id="19" name="rail-dot-4"/>
+          <p:cNvPr id="15" name="rail-dot-4"/>
           <p:cNvSpPr/>
           <p:nvPr/>
         </p:nvSpPr>
@@ -22583,7 +22935,7 @@
       </p:sp>
       <p:sp>
         <p:nvSpPr>
-          <p:cNvPr id="20" name="rail-num-4"/>
+          <p:cNvPr id="16" name="rail-num-4"/>
           <p:cNvSpPr txBox="1"/>
           <p:nvPr/>
         </p:nvSpPr>
@@ -22618,7 +22970,7 @@
       </p:sp>
       <p:sp>
         <p:nvSpPr>
-          <p:cNvPr id="21" name="rail-dot-5"/>
+          <p:cNvPr id="17" name="rail-dot-5"/>
           <p:cNvSpPr/>
           <p:nvPr/>
         </p:nvSpPr>
@@ -22649,7 +23001,7 @@
       </p:sp>
       <p:sp>
         <p:nvSpPr>
-          <p:cNvPr id="22" name="rail-num-5"/>
+          <p:cNvPr id="18" name="rail-num-5"/>
           <p:cNvSpPr txBox="1"/>
           <p:nvPr/>
         </p:nvSpPr>
@@ -22684,7 +23036,7 @@
       </p:sp>
       <p:sp>
         <p:nvSpPr>
-          <p:cNvPr id="23" name="evidence-label"/>
+          <p:cNvPr id="19" name="evidence-label"/>
           <p:cNvSpPr txBox="1"/>
           <p:nvPr/>
         </p:nvSpPr>
@@ -22719,7 +23071,7 @@
       </p:sp>
       <p:sp>
         <p:nvSpPr>
-          <p:cNvPr id="24" name="evidence-text"/>
+          <p:cNvPr id="20" name="evidence-text"/>
           <p:cNvSpPr txBox="1"/>
           <p:nvPr/>
         </p:nvSpPr>
@@ -22754,7 +23106,7 @@
       </p:sp>
       <p:sp>
         <p:nvSpPr>
-          <p:cNvPr id="25" name="footer"/>
+          <p:cNvPr id="21" name="footer"/>
           <p:cNvSpPr txBox="1"/>
           <p:nvPr/>
         </p:nvSpPr>

--- a/skill/flaesh-campus/assets/template/flaesh-campus-template.pptx
+++ b/skill/flaesh-campus/assets/template/flaesh-campus-template.pptx
@@ -2649,7 +2649,69 @@
       </p:pic>
       <p:sp>
         <p:nvSpPr>
-          <p:cNvPr id="5" name="Episode"/>
+          <p:cNvPr id="5" name="zone-ring"/>
+          <p:cNvSpPr/>
+          <p:nvPr/>
+        </p:nvSpPr>
+        <p:spPr>
+          <a:xfrm>
+            <a:off x="9931400" y="4597400"/>
+            <a:ext cx="1905000" cy="1905000"/>
+          </a:xfrm>
+          <a:prstGeom prst="ellipse">
+            <a:avLst/>
+          </a:prstGeom>
+          <a:solidFill>
+            <a:srgbClr val="FFFFFF"/>
+          </a:solidFill>
+          <a:ln w="25400">
+            <a:solidFill>
+              <a:srgbClr val="00A5FF"/>
+            </a:solidFill>
+          </a:ln>
+          <a:effectLst>
+            <a:glow rad="292100">
+              <a:srgbClr val="00A5FF">
+                <a:alpha val="45000"/>
+              </a:srgbClr>
+            </a:glow>
+          </a:effectLst>
+        </p:spPr>
+        <p:txBody>
+          <a:bodyPr rtlCol="0" anchor="ctr"/>
+          <a:lstStyle/>
+          <a:p>
+            <a:pPr algn="ctr"/>
+          </a:p>
+        </p:txBody>
+      </p:sp>
+      <p:pic>
+        <p:nvPicPr>
+          <p:cNvPr id="6" name="zone-presenter" descr="video-presenter.jpg"/>
+          <p:cNvPicPr>
+            <a:picLocks noChangeAspect="1"/>
+          </p:cNvPicPr>
+          <p:nvPr/>
+        </p:nvPicPr>
+        <p:blipFill>
+          <a:blip r:embed="rId3"/>
+          <a:stretch>
+            <a:fillRect/>
+          </a:stretch>
+        </p:blipFill>
+        <p:spPr>
+          <a:xfrm>
+            <a:off x="9956800" y="4622800"/>
+            <a:ext cx="1854200" cy="1854200"/>
+          </a:xfrm>
+          <a:prstGeom prst="ellipse">
+            <a:avLst/>
+          </a:prstGeom>
+        </p:spPr>
+      </p:pic>
+      <p:sp>
+        <p:nvSpPr>
+          <p:cNvPr id="7" name="Episode"/>
           <p:cNvSpPr>
             <a:spLocks noGrp="1"/>
           </p:cNvSpPr>
@@ -2703,7 +2765,7 @@
       </p:sp>
       <p:sp>
         <p:nvSpPr>
-          <p:cNvPr id="6" name="Kicker"/>
+          <p:cNvPr id="8" name="Kicker"/>
           <p:cNvSpPr>
             <a:spLocks noGrp="1"/>
           </p:cNvSpPr>
@@ -2757,7 +2819,7 @@
       </p:sp>
       <p:sp>
         <p:nvSpPr>
-          <p:cNvPr id="7" name="Title"/>
+          <p:cNvPr id="9" name="Title"/>
           <p:cNvSpPr>
             <a:spLocks noGrp="1"/>
           </p:cNvSpPr>
@@ -2932,7 +2994,69 @@
       </p:pic>
       <p:sp>
         <p:nvSpPr>
-          <p:cNvPr id="5" name="Episode"/>
+          <p:cNvPr id="5" name="zone-ring"/>
+          <p:cNvSpPr/>
+          <p:nvPr/>
+        </p:nvSpPr>
+        <p:spPr>
+          <a:xfrm>
+            <a:off x="9931400" y="4597400"/>
+            <a:ext cx="1905000" cy="1905000"/>
+          </a:xfrm>
+          <a:prstGeom prst="ellipse">
+            <a:avLst/>
+          </a:prstGeom>
+          <a:solidFill>
+            <a:srgbClr val="FFFFFF"/>
+          </a:solidFill>
+          <a:ln w="25400">
+            <a:solidFill>
+              <a:srgbClr val="00A5FF"/>
+            </a:solidFill>
+          </a:ln>
+          <a:effectLst>
+            <a:glow rad="292100">
+              <a:srgbClr val="00A5FF">
+                <a:alpha val="45000"/>
+              </a:srgbClr>
+            </a:glow>
+          </a:effectLst>
+        </p:spPr>
+        <p:txBody>
+          <a:bodyPr rtlCol="0" anchor="ctr"/>
+          <a:lstStyle/>
+          <a:p>
+            <a:pPr algn="ctr"/>
+          </a:p>
+        </p:txBody>
+      </p:sp>
+      <p:pic>
+        <p:nvPicPr>
+          <p:cNvPr id="6" name="zone-presenter" descr="video-presenter.jpg"/>
+          <p:cNvPicPr>
+            <a:picLocks noChangeAspect="1"/>
+          </p:cNvPicPr>
+          <p:nvPr/>
+        </p:nvPicPr>
+        <p:blipFill>
+          <a:blip r:embed="rId3"/>
+          <a:stretch>
+            <a:fillRect/>
+          </a:stretch>
+        </p:blipFill>
+        <p:spPr>
+          <a:xfrm>
+            <a:off x="9956800" y="4622800"/>
+            <a:ext cx="1854200" cy="1854200"/>
+          </a:xfrm>
+          <a:prstGeom prst="ellipse">
+            <a:avLst/>
+          </a:prstGeom>
+        </p:spPr>
+      </p:pic>
+      <p:sp>
+        <p:nvSpPr>
+          <p:cNvPr id="7" name="Episode"/>
           <p:cNvSpPr>
             <a:spLocks noGrp="1"/>
           </p:cNvSpPr>
@@ -2986,7 +3110,7 @@
       </p:sp>
       <p:sp>
         <p:nvSpPr>
-          <p:cNvPr id="6" name="Kicker"/>
+          <p:cNvPr id="8" name="Kicker"/>
           <p:cNvSpPr>
             <a:spLocks noGrp="1"/>
           </p:cNvSpPr>
@@ -3040,7 +3164,7 @@
       </p:sp>
       <p:sp>
         <p:nvSpPr>
-          <p:cNvPr id="7" name="Title"/>
+          <p:cNvPr id="9" name="Title"/>
           <p:cNvSpPr>
             <a:spLocks noGrp="1"/>
           </p:cNvSpPr>
@@ -3215,7 +3339,69 @@
       </p:pic>
       <p:sp>
         <p:nvSpPr>
-          <p:cNvPr id="5" name="Episode"/>
+          <p:cNvPr id="5" name="zone-ring"/>
+          <p:cNvSpPr/>
+          <p:nvPr/>
+        </p:nvSpPr>
+        <p:spPr>
+          <a:xfrm>
+            <a:off x="9931400" y="4597400"/>
+            <a:ext cx="1905000" cy="1905000"/>
+          </a:xfrm>
+          <a:prstGeom prst="ellipse">
+            <a:avLst/>
+          </a:prstGeom>
+          <a:solidFill>
+            <a:srgbClr val="FFFFFF"/>
+          </a:solidFill>
+          <a:ln w="25400">
+            <a:solidFill>
+              <a:srgbClr val="00A5FF"/>
+            </a:solidFill>
+          </a:ln>
+          <a:effectLst>
+            <a:glow rad="292100">
+              <a:srgbClr val="00A5FF">
+                <a:alpha val="45000"/>
+              </a:srgbClr>
+            </a:glow>
+          </a:effectLst>
+        </p:spPr>
+        <p:txBody>
+          <a:bodyPr rtlCol="0" anchor="ctr"/>
+          <a:lstStyle/>
+          <a:p>
+            <a:pPr algn="ctr"/>
+          </a:p>
+        </p:txBody>
+      </p:sp>
+      <p:pic>
+        <p:nvPicPr>
+          <p:cNvPr id="6" name="zone-presenter" descr="video-presenter.jpg"/>
+          <p:cNvPicPr>
+            <a:picLocks noChangeAspect="1"/>
+          </p:cNvPicPr>
+          <p:nvPr/>
+        </p:nvPicPr>
+        <p:blipFill>
+          <a:blip r:embed="rId3"/>
+          <a:stretch>
+            <a:fillRect/>
+          </a:stretch>
+        </p:blipFill>
+        <p:spPr>
+          <a:xfrm>
+            <a:off x="9956800" y="4622800"/>
+            <a:ext cx="1854200" cy="1854200"/>
+          </a:xfrm>
+          <a:prstGeom prst="ellipse">
+            <a:avLst/>
+          </a:prstGeom>
+        </p:spPr>
+      </p:pic>
+      <p:sp>
+        <p:nvSpPr>
+          <p:cNvPr id="7" name="Episode"/>
           <p:cNvSpPr>
             <a:spLocks noGrp="1"/>
           </p:cNvSpPr>
@@ -3269,7 +3455,7 @@
       </p:sp>
       <p:sp>
         <p:nvSpPr>
-          <p:cNvPr id="6" name="Kicker"/>
+          <p:cNvPr id="8" name="Kicker"/>
           <p:cNvSpPr>
             <a:spLocks noGrp="1"/>
           </p:cNvSpPr>
@@ -3323,7 +3509,7 @@
       </p:sp>
       <p:sp>
         <p:nvSpPr>
-          <p:cNvPr id="7" name="Title"/>
+          <p:cNvPr id="9" name="Title"/>
           <p:cNvSpPr>
             <a:spLocks noGrp="1"/>
           </p:cNvSpPr>
@@ -3377,7 +3563,7 @@
       </p:sp>
       <p:sp>
         <p:nvSpPr>
-          <p:cNvPr id="8" name="Points"/>
+          <p:cNvPr id="10" name="Points"/>
           <p:cNvSpPr>
             <a:spLocks noGrp="1"/>
           </p:cNvSpPr>
@@ -3579,7 +3765,69 @@
       </p:pic>
       <p:sp>
         <p:nvSpPr>
-          <p:cNvPr id="5" name="Episode"/>
+          <p:cNvPr id="5" name="zone-ring"/>
+          <p:cNvSpPr/>
+          <p:nvPr/>
+        </p:nvSpPr>
+        <p:spPr>
+          <a:xfrm>
+            <a:off x="9931400" y="4597400"/>
+            <a:ext cx="1905000" cy="1905000"/>
+          </a:xfrm>
+          <a:prstGeom prst="ellipse">
+            <a:avLst/>
+          </a:prstGeom>
+          <a:solidFill>
+            <a:srgbClr val="FFFFFF"/>
+          </a:solidFill>
+          <a:ln w="25400">
+            <a:solidFill>
+              <a:srgbClr val="00A5FF"/>
+            </a:solidFill>
+          </a:ln>
+          <a:effectLst>
+            <a:glow rad="292100">
+              <a:srgbClr val="00A5FF">
+                <a:alpha val="45000"/>
+              </a:srgbClr>
+            </a:glow>
+          </a:effectLst>
+        </p:spPr>
+        <p:txBody>
+          <a:bodyPr rtlCol="0" anchor="ctr"/>
+          <a:lstStyle/>
+          <a:p>
+            <a:pPr algn="ctr"/>
+          </a:p>
+        </p:txBody>
+      </p:sp>
+      <p:pic>
+        <p:nvPicPr>
+          <p:cNvPr id="6" name="zone-presenter" descr="video-presenter.jpg"/>
+          <p:cNvPicPr>
+            <a:picLocks noChangeAspect="1"/>
+          </p:cNvPicPr>
+          <p:nvPr/>
+        </p:nvPicPr>
+        <p:blipFill>
+          <a:blip r:embed="rId3"/>
+          <a:stretch>
+            <a:fillRect/>
+          </a:stretch>
+        </p:blipFill>
+        <p:spPr>
+          <a:xfrm>
+            <a:off x="9956800" y="4622800"/>
+            <a:ext cx="1854200" cy="1854200"/>
+          </a:xfrm>
+          <a:prstGeom prst="ellipse">
+            <a:avLst/>
+          </a:prstGeom>
+        </p:spPr>
+      </p:pic>
+      <p:sp>
+        <p:nvSpPr>
+          <p:cNvPr id="7" name="Episode"/>
           <p:cNvSpPr>
             <a:spLocks noGrp="1"/>
           </p:cNvSpPr>
@@ -3633,7 +3881,7 @@
       </p:sp>
       <p:sp>
         <p:nvSpPr>
-          <p:cNvPr id="6" name="Kicker"/>
+          <p:cNvPr id="8" name="Kicker"/>
           <p:cNvSpPr>
             <a:spLocks noGrp="1"/>
           </p:cNvSpPr>
@@ -3687,7 +3935,7 @@
       </p:sp>
       <p:sp>
         <p:nvSpPr>
-          <p:cNvPr id="7" name="Title"/>
+          <p:cNvPr id="9" name="Title"/>
           <p:cNvSpPr>
             <a:spLocks noGrp="1"/>
           </p:cNvSpPr>
@@ -4261,7 +4509,69 @@
       </p:pic>
       <p:sp>
         <p:nvSpPr>
-          <p:cNvPr id="5" name="Episode"/>
+          <p:cNvPr id="5" name="zone-ring"/>
+          <p:cNvSpPr/>
+          <p:nvPr/>
+        </p:nvSpPr>
+        <p:spPr>
+          <a:xfrm>
+            <a:off x="9931400" y="4597400"/>
+            <a:ext cx="1905000" cy="1905000"/>
+          </a:xfrm>
+          <a:prstGeom prst="ellipse">
+            <a:avLst/>
+          </a:prstGeom>
+          <a:solidFill>
+            <a:srgbClr val="FFFFFF"/>
+          </a:solidFill>
+          <a:ln w="25400">
+            <a:solidFill>
+              <a:srgbClr val="00A5FF"/>
+            </a:solidFill>
+          </a:ln>
+          <a:effectLst>
+            <a:glow rad="292100">
+              <a:srgbClr val="00A5FF">
+                <a:alpha val="45000"/>
+              </a:srgbClr>
+            </a:glow>
+          </a:effectLst>
+        </p:spPr>
+        <p:txBody>
+          <a:bodyPr rtlCol="0" anchor="ctr"/>
+          <a:lstStyle/>
+          <a:p>
+            <a:pPr algn="ctr"/>
+          </a:p>
+        </p:txBody>
+      </p:sp>
+      <p:pic>
+        <p:nvPicPr>
+          <p:cNvPr id="6" name="zone-presenter" descr="video-presenter.jpg"/>
+          <p:cNvPicPr>
+            <a:picLocks noChangeAspect="1"/>
+          </p:cNvPicPr>
+          <p:nvPr/>
+        </p:nvPicPr>
+        <p:blipFill>
+          <a:blip r:embed="rId3"/>
+          <a:stretch>
+            <a:fillRect/>
+          </a:stretch>
+        </p:blipFill>
+        <p:spPr>
+          <a:xfrm>
+            <a:off x="9956800" y="4622800"/>
+            <a:ext cx="1854200" cy="1854200"/>
+          </a:xfrm>
+          <a:prstGeom prst="ellipse">
+            <a:avLst/>
+          </a:prstGeom>
+        </p:spPr>
+      </p:pic>
+      <p:sp>
+        <p:nvSpPr>
+          <p:cNvPr id="7" name="Episode"/>
           <p:cNvSpPr>
             <a:spLocks noGrp="1"/>
           </p:cNvSpPr>
@@ -4315,7 +4625,7 @@
       </p:sp>
       <p:sp>
         <p:nvSpPr>
-          <p:cNvPr id="6" name="Kicker"/>
+          <p:cNvPr id="8" name="Kicker"/>
           <p:cNvSpPr>
             <a:spLocks noGrp="1"/>
           </p:cNvSpPr>
@@ -4369,7 +4679,7 @@
       </p:sp>
       <p:sp>
         <p:nvSpPr>
-          <p:cNvPr id="7" name="Title"/>
+          <p:cNvPr id="9" name="Title"/>
           <p:cNvSpPr>
             <a:spLocks noGrp="1"/>
           </p:cNvSpPr>
@@ -4423,7 +4733,7 @@
       </p:sp>
       <p:sp>
         <p:nvSpPr>
-          <p:cNvPr id="8" name="PhotoBefore"/>
+          <p:cNvPr id="10" name="PhotoBefore"/>
           <p:cNvSpPr>
             <a:spLocks noGrp="1"/>
           </p:cNvSpPr>
@@ -4479,7 +4789,7 @@
       </p:sp>
       <p:sp>
         <p:nvSpPr>
-          <p:cNvPr id="9" name="PhotoAfter"/>
+          <p:cNvPr id="11" name="PhotoAfter"/>
           <p:cNvSpPr>
             <a:spLocks noGrp="1"/>
           </p:cNvSpPr>
@@ -4535,7 +4845,7 @@
       </p:sp>
       <p:sp>
         <p:nvSpPr>
-          <p:cNvPr id="10" name="LabelBefore"/>
+          <p:cNvPr id="12" name="LabelBefore"/>
           <p:cNvSpPr>
             <a:spLocks noGrp="1"/>
           </p:cNvSpPr>
@@ -4589,7 +4899,7 @@
       </p:sp>
       <p:sp>
         <p:nvSpPr>
-          <p:cNvPr id="11" name="LabelAfter"/>
+          <p:cNvPr id="13" name="LabelAfter"/>
           <p:cNvSpPr>
             <a:spLocks noGrp="1"/>
           </p:cNvSpPr>
@@ -4764,7 +5074,69 @@
       </p:pic>
       <p:sp>
         <p:nvSpPr>
-          <p:cNvPr id="5" name="Episode"/>
+          <p:cNvPr id="5" name="zone-ring"/>
+          <p:cNvSpPr/>
+          <p:nvPr/>
+        </p:nvSpPr>
+        <p:spPr>
+          <a:xfrm>
+            <a:off x="9931400" y="4597400"/>
+            <a:ext cx="1905000" cy="1905000"/>
+          </a:xfrm>
+          <a:prstGeom prst="ellipse">
+            <a:avLst/>
+          </a:prstGeom>
+          <a:solidFill>
+            <a:srgbClr val="FFFFFF"/>
+          </a:solidFill>
+          <a:ln w="25400">
+            <a:solidFill>
+              <a:srgbClr val="00A5FF"/>
+            </a:solidFill>
+          </a:ln>
+          <a:effectLst>
+            <a:glow rad="292100">
+              <a:srgbClr val="00A5FF">
+                <a:alpha val="45000"/>
+              </a:srgbClr>
+            </a:glow>
+          </a:effectLst>
+        </p:spPr>
+        <p:txBody>
+          <a:bodyPr rtlCol="0" anchor="ctr"/>
+          <a:lstStyle/>
+          <a:p>
+            <a:pPr algn="ctr"/>
+          </a:p>
+        </p:txBody>
+      </p:sp>
+      <p:pic>
+        <p:nvPicPr>
+          <p:cNvPr id="6" name="zone-presenter" descr="video-presenter.jpg"/>
+          <p:cNvPicPr>
+            <a:picLocks noChangeAspect="1"/>
+          </p:cNvPicPr>
+          <p:nvPr/>
+        </p:nvPicPr>
+        <p:blipFill>
+          <a:blip r:embed="rId3"/>
+          <a:stretch>
+            <a:fillRect/>
+          </a:stretch>
+        </p:blipFill>
+        <p:spPr>
+          <a:xfrm>
+            <a:off x="9956800" y="4622800"/>
+            <a:ext cx="1854200" cy="1854200"/>
+          </a:xfrm>
+          <a:prstGeom prst="ellipse">
+            <a:avLst/>
+          </a:prstGeom>
+        </p:spPr>
+      </p:pic>
+      <p:sp>
+        <p:nvSpPr>
+          <p:cNvPr id="7" name="Episode"/>
           <p:cNvSpPr>
             <a:spLocks noGrp="1"/>
           </p:cNvSpPr>
@@ -4818,7 +5190,7 @@
       </p:sp>
       <p:sp>
         <p:nvSpPr>
-          <p:cNvPr id="6" name="Kicker"/>
+          <p:cNvPr id="8" name="Kicker"/>
           <p:cNvSpPr>
             <a:spLocks noGrp="1"/>
           </p:cNvSpPr>
@@ -4872,7 +5244,7 @@
       </p:sp>
       <p:sp>
         <p:nvSpPr>
-          <p:cNvPr id="7" name="Title"/>
+          <p:cNvPr id="9" name="Title"/>
           <p:cNvSpPr>
             <a:spLocks noGrp="1"/>
           </p:cNvSpPr>
@@ -4926,7 +5298,7 @@
       </p:sp>
       <p:sp>
         <p:nvSpPr>
-          <p:cNvPr id="8" name="Photo"/>
+          <p:cNvPr id="10" name="Photo"/>
           <p:cNvSpPr>
             <a:spLocks noGrp="1"/>
           </p:cNvSpPr>
@@ -5103,7 +5475,69 @@
       </p:pic>
       <p:sp>
         <p:nvSpPr>
-          <p:cNvPr id="5" name="Episode"/>
+          <p:cNvPr id="5" name="zone-ring"/>
+          <p:cNvSpPr/>
+          <p:nvPr/>
+        </p:nvSpPr>
+        <p:spPr>
+          <a:xfrm>
+            <a:off x="9931400" y="4597400"/>
+            <a:ext cx="1905000" cy="1905000"/>
+          </a:xfrm>
+          <a:prstGeom prst="ellipse">
+            <a:avLst/>
+          </a:prstGeom>
+          <a:solidFill>
+            <a:srgbClr val="FFFFFF"/>
+          </a:solidFill>
+          <a:ln w="25400">
+            <a:solidFill>
+              <a:srgbClr val="00A5FF"/>
+            </a:solidFill>
+          </a:ln>
+          <a:effectLst>
+            <a:glow rad="292100">
+              <a:srgbClr val="00A5FF">
+                <a:alpha val="45000"/>
+              </a:srgbClr>
+            </a:glow>
+          </a:effectLst>
+        </p:spPr>
+        <p:txBody>
+          <a:bodyPr rtlCol="0" anchor="ctr"/>
+          <a:lstStyle/>
+          <a:p>
+            <a:pPr algn="ctr"/>
+          </a:p>
+        </p:txBody>
+      </p:sp>
+      <p:pic>
+        <p:nvPicPr>
+          <p:cNvPr id="6" name="zone-presenter" descr="video-presenter.jpg"/>
+          <p:cNvPicPr>
+            <a:picLocks noChangeAspect="1"/>
+          </p:cNvPicPr>
+          <p:nvPr/>
+        </p:nvPicPr>
+        <p:blipFill>
+          <a:blip r:embed="rId3"/>
+          <a:stretch>
+            <a:fillRect/>
+          </a:stretch>
+        </p:blipFill>
+        <p:spPr>
+          <a:xfrm>
+            <a:off x="9956800" y="4622800"/>
+            <a:ext cx="1854200" cy="1854200"/>
+          </a:xfrm>
+          <a:prstGeom prst="ellipse">
+            <a:avLst/>
+          </a:prstGeom>
+        </p:spPr>
+      </p:pic>
+      <p:sp>
+        <p:nvSpPr>
+          <p:cNvPr id="7" name="Episode"/>
           <p:cNvSpPr>
             <a:spLocks noGrp="1"/>
           </p:cNvSpPr>
@@ -5157,7 +5591,7 @@
       </p:sp>
       <p:sp>
         <p:nvSpPr>
-          <p:cNvPr id="6" name="Kicker"/>
+          <p:cNvPr id="8" name="Kicker"/>
           <p:cNvSpPr>
             <a:spLocks noGrp="1"/>
           </p:cNvSpPr>
@@ -5211,7 +5645,7 @@
       </p:sp>
       <p:sp>
         <p:nvSpPr>
-          <p:cNvPr id="7" name="Title"/>
+          <p:cNvPr id="9" name="Title"/>
           <p:cNvSpPr>
             <a:spLocks noGrp="1"/>
           </p:cNvSpPr>
@@ -5265,7 +5699,7 @@
       </p:sp>
       <p:sp>
         <p:nvSpPr>
-          <p:cNvPr id="8" name="Story"/>
+          <p:cNvPr id="10" name="Story"/>
           <p:cNvSpPr>
             <a:spLocks noGrp="1"/>
           </p:cNvSpPr>
@@ -5440,7 +5874,69 @@
       </p:pic>
       <p:sp>
         <p:nvSpPr>
-          <p:cNvPr id="5" name="Episode"/>
+          <p:cNvPr id="5" name="zone-ring"/>
+          <p:cNvSpPr/>
+          <p:nvPr/>
+        </p:nvSpPr>
+        <p:spPr>
+          <a:xfrm>
+            <a:off x="9931400" y="4597400"/>
+            <a:ext cx="1905000" cy="1905000"/>
+          </a:xfrm>
+          <a:prstGeom prst="ellipse">
+            <a:avLst/>
+          </a:prstGeom>
+          <a:solidFill>
+            <a:srgbClr val="232C31"/>
+          </a:solidFill>
+          <a:ln w="25400">
+            <a:solidFill>
+              <a:srgbClr val="00A5FF"/>
+            </a:solidFill>
+          </a:ln>
+          <a:effectLst>
+            <a:glow rad="381000">
+              <a:srgbClr val="00A5FF">
+                <a:alpha val="55000"/>
+              </a:srgbClr>
+            </a:glow>
+          </a:effectLst>
+        </p:spPr>
+        <p:txBody>
+          <a:bodyPr rtlCol="0" anchor="ctr"/>
+          <a:lstStyle/>
+          <a:p>
+            <a:pPr algn="ctr"/>
+          </a:p>
+        </p:txBody>
+      </p:sp>
+      <p:pic>
+        <p:nvPicPr>
+          <p:cNvPr id="6" name="zone-presenter" descr="video-presenter.jpg"/>
+          <p:cNvPicPr>
+            <a:picLocks noChangeAspect="1"/>
+          </p:cNvPicPr>
+          <p:nvPr/>
+        </p:nvPicPr>
+        <p:blipFill>
+          <a:blip r:embed="rId3"/>
+          <a:stretch>
+            <a:fillRect/>
+          </a:stretch>
+        </p:blipFill>
+        <p:spPr>
+          <a:xfrm>
+            <a:off x="9956800" y="4622800"/>
+            <a:ext cx="1854200" cy="1854200"/>
+          </a:xfrm>
+          <a:prstGeom prst="ellipse">
+            <a:avLst/>
+          </a:prstGeom>
+        </p:spPr>
+      </p:pic>
+      <p:sp>
+        <p:nvSpPr>
+          <p:cNvPr id="7" name="Episode"/>
           <p:cNvSpPr>
             <a:spLocks noGrp="1"/>
           </p:cNvSpPr>
@@ -5494,7 +5990,7 @@
       </p:sp>
       <p:sp>
         <p:nvSpPr>
-          <p:cNvPr id="6" name="Kicker"/>
+          <p:cNvPr id="8" name="Kicker"/>
           <p:cNvSpPr>
             <a:spLocks noGrp="1"/>
           </p:cNvSpPr>
@@ -5548,7 +6044,7 @@
       </p:sp>
       <p:sp>
         <p:nvSpPr>
-          <p:cNvPr id="7" name="Question"/>
+          <p:cNvPr id="9" name="Question"/>
           <p:cNvSpPr>
             <a:spLocks noGrp="1"/>
           </p:cNvSpPr>
@@ -5771,7 +6267,69 @@
       </p:pic>
       <p:sp>
         <p:nvSpPr>
-          <p:cNvPr id="6" name="Episode"/>
+          <p:cNvPr id="6" name="zone-ring"/>
+          <p:cNvSpPr/>
+          <p:nvPr/>
+        </p:nvSpPr>
+        <p:spPr>
+          <a:xfrm>
+            <a:off x="9931400" y="4597400"/>
+            <a:ext cx="1905000" cy="1905000"/>
+          </a:xfrm>
+          <a:prstGeom prst="ellipse">
+            <a:avLst/>
+          </a:prstGeom>
+          <a:solidFill>
+            <a:srgbClr val="232C31"/>
+          </a:solidFill>
+          <a:ln w="25400">
+            <a:solidFill>
+              <a:srgbClr val="00A5FF"/>
+            </a:solidFill>
+          </a:ln>
+          <a:effectLst>
+            <a:glow rad="381000">
+              <a:srgbClr val="00A5FF">
+                <a:alpha val="55000"/>
+              </a:srgbClr>
+            </a:glow>
+          </a:effectLst>
+        </p:spPr>
+        <p:txBody>
+          <a:bodyPr rtlCol="0" anchor="ctr"/>
+          <a:lstStyle/>
+          <a:p>
+            <a:pPr algn="ctr"/>
+          </a:p>
+        </p:txBody>
+      </p:sp>
+      <p:pic>
+        <p:nvPicPr>
+          <p:cNvPr id="7" name="zone-presenter" descr="video-presenter.jpg"/>
+          <p:cNvPicPr>
+            <a:picLocks noChangeAspect="1"/>
+          </p:cNvPicPr>
+          <p:nvPr/>
+        </p:nvPicPr>
+        <p:blipFill>
+          <a:blip r:embed="rId3"/>
+          <a:stretch>
+            <a:fillRect/>
+          </a:stretch>
+        </p:blipFill>
+        <p:spPr>
+          <a:xfrm>
+            <a:off x="9956800" y="4622800"/>
+            <a:ext cx="1854200" cy="1854200"/>
+          </a:xfrm>
+          <a:prstGeom prst="ellipse">
+            <a:avLst/>
+          </a:prstGeom>
+        </p:spPr>
+      </p:pic>
+      <p:sp>
+        <p:nvSpPr>
+          <p:cNvPr id="8" name="Episode"/>
           <p:cNvSpPr>
             <a:spLocks noGrp="1"/>
           </p:cNvSpPr>
@@ -5825,7 +6383,7 @@
       </p:sp>
       <p:sp>
         <p:nvSpPr>
-          <p:cNvPr id="7" name="Number"/>
+          <p:cNvPr id="9" name="Number"/>
           <p:cNvSpPr>
             <a:spLocks noGrp="1"/>
           </p:cNvSpPr>
@@ -5889,7 +6447,7 @@
       </p:sp>
       <p:sp>
         <p:nvSpPr>
-          <p:cNvPr id="8" name="Kicker"/>
+          <p:cNvPr id="10" name="Kicker"/>
           <p:cNvSpPr>
             <a:spLocks noGrp="1"/>
           </p:cNvSpPr>
@@ -5943,7 +6501,7 @@
       </p:sp>
       <p:sp>
         <p:nvSpPr>
-          <p:cNvPr id="9" name="Title"/>
+          <p:cNvPr id="11" name="Title"/>
           <p:cNvSpPr>
             <a:spLocks noGrp="1"/>
           </p:cNvSpPr>
@@ -6000,7 +6558,7 @@
       </p:sp>
       <p:sp>
         <p:nvSpPr>
-          <p:cNvPr id="10" name="Line"/>
+          <p:cNvPr id="12" name="Line"/>
           <p:cNvSpPr>
             <a:spLocks noGrp="1"/>
           </p:cNvSpPr>
@@ -6175,7 +6733,69 @@
       </p:pic>
       <p:sp>
         <p:nvSpPr>
-          <p:cNvPr id="5" name="truth-card"/>
+          <p:cNvPr id="5" name="zone-ring"/>
+          <p:cNvSpPr/>
+          <p:nvPr/>
+        </p:nvSpPr>
+        <p:spPr>
+          <a:xfrm>
+            <a:off x="9931400" y="4597400"/>
+            <a:ext cx="1905000" cy="1905000"/>
+          </a:xfrm>
+          <a:prstGeom prst="ellipse">
+            <a:avLst/>
+          </a:prstGeom>
+          <a:solidFill>
+            <a:srgbClr val="232C31"/>
+          </a:solidFill>
+          <a:ln w="25400">
+            <a:solidFill>
+              <a:srgbClr val="00A5FF"/>
+            </a:solidFill>
+          </a:ln>
+          <a:effectLst>
+            <a:glow rad="381000">
+              <a:srgbClr val="00A5FF">
+                <a:alpha val="55000"/>
+              </a:srgbClr>
+            </a:glow>
+          </a:effectLst>
+        </p:spPr>
+        <p:txBody>
+          <a:bodyPr rtlCol="0" anchor="ctr"/>
+          <a:lstStyle/>
+          <a:p>
+            <a:pPr algn="ctr"/>
+          </a:p>
+        </p:txBody>
+      </p:sp>
+      <p:pic>
+        <p:nvPicPr>
+          <p:cNvPr id="6" name="zone-presenter" descr="video-presenter.jpg"/>
+          <p:cNvPicPr>
+            <a:picLocks noChangeAspect="1"/>
+          </p:cNvPicPr>
+          <p:nvPr/>
+        </p:nvPicPr>
+        <p:blipFill>
+          <a:blip r:embed="rId3"/>
+          <a:stretch>
+            <a:fillRect/>
+          </a:stretch>
+        </p:blipFill>
+        <p:spPr>
+          <a:xfrm>
+            <a:off x="9956800" y="4622800"/>
+            <a:ext cx="1854200" cy="1854200"/>
+          </a:xfrm>
+          <a:prstGeom prst="ellipse">
+            <a:avLst/>
+          </a:prstGeom>
+        </p:spPr>
+      </p:pic>
+      <p:sp>
+        <p:nvSpPr>
+          <p:cNvPr id="7" name="truth-card"/>
           <p:cNvSpPr/>
           <p:nvPr/>
         </p:nvSpPr>
@@ -6206,7 +6826,7 @@
       </p:sp>
       <p:sp>
         <p:nvSpPr>
-          <p:cNvPr id="6" name="answer-card"/>
+          <p:cNvPr id="8" name="answer-card"/>
           <p:cNvSpPr/>
           <p:nvPr/>
         </p:nvSpPr>
@@ -6246,7 +6866,7 @@
       </p:sp>
       <p:sp>
         <p:nvSpPr>
-          <p:cNvPr id="7" name="Episode"/>
+          <p:cNvPr id="9" name="Episode"/>
           <p:cNvSpPr>
             <a:spLocks noGrp="1"/>
           </p:cNvSpPr>
@@ -6300,7 +6920,7 @@
       </p:sp>
       <p:sp>
         <p:nvSpPr>
-          <p:cNvPr id="8" name="Kicker"/>
+          <p:cNvPr id="10" name="Kicker"/>
           <p:cNvSpPr>
             <a:spLocks noGrp="1"/>
           </p:cNvSpPr>
@@ -6354,7 +6974,7 @@
       </p:sp>
       <p:sp>
         <p:nvSpPr>
-          <p:cNvPr id="9" name="Quote"/>
+          <p:cNvPr id="11" name="Quote"/>
           <p:cNvSpPr>
             <a:spLocks noGrp="1"/>
           </p:cNvSpPr>
@@ -6408,7 +7028,7 @@
       </p:sp>
       <p:sp>
         <p:nvSpPr>
-          <p:cNvPr id="10" name="TruthLabel"/>
+          <p:cNvPr id="12" name="TruthLabel"/>
           <p:cNvSpPr>
             <a:spLocks noGrp="1"/>
           </p:cNvSpPr>
@@ -6462,7 +7082,7 @@
       </p:sp>
       <p:sp>
         <p:nvSpPr>
-          <p:cNvPr id="11" name="TruthText"/>
+          <p:cNvPr id="13" name="TruthText"/>
           <p:cNvSpPr>
             <a:spLocks noGrp="1"/>
           </p:cNvSpPr>
@@ -6516,7 +7136,7 @@
       </p:sp>
       <p:sp>
         <p:nvSpPr>
-          <p:cNvPr id="12" name="AnswerLabel"/>
+          <p:cNvPr id="14" name="AnswerLabel"/>
           <p:cNvSpPr>
             <a:spLocks noGrp="1"/>
           </p:cNvSpPr>
@@ -6570,7 +7190,7 @@
       </p:sp>
       <p:sp>
         <p:nvSpPr>
-          <p:cNvPr id="13" name="AnswerText"/>
+          <p:cNvPr id="15" name="AnswerText"/>
           <p:cNvSpPr>
             <a:spLocks noGrp="1"/>
           </p:cNvSpPr>
@@ -6745,7 +7365,69 @@
       </p:pic>
       <p:sp>
         <p:nvSpPr>
-          <p:cNvPr id="5" name="next-card"/>
+          <p:cNvPr id="5" name="zone-ring"/>
+          <p:cNvSpPr/>
+          <p:nvPr/>
+        </p:nvSpPr>
+        <p:spPr>
+          <a:xfrm>
+            <a:off x="9931400" y="4597400"/>
+            <a:ext cx="1905000" cy="1905000"/>
+          </a:xfrm>
+          <a:prstGeom prst="ellipse">
+            <a:avLst/>
+          </a:prstGeom>
+          <a:solidFill>
+            <a:srgbClr val="232C31"/>
+          </a:solidFill>
+          <a:ln w="25400">
+            <a:solidFill>
+              <a:srgbClr val="00A5FF"/>
+            </a:solidFill>
+          </a:ln>
+          <a:effectLst>
+            <a:glow rad="381000">
+              <a:srgbClr val="00A5FF">
+                <a:alpha val="55000"/>
+              </a:srgbClr>
+            </a:glow>
+          </a:effectLst>
+        </p:spPr>
+        <p:txBody>
+          <a:bodyPr rtlCol="0" anchor="ctr"/>
+          <a:lstStyle/>
+          <a:p>
+            <a:pPr algn="ctr"/>
+          </a:p>
+        </p:txBody>
+      </p:sp>
+      <p:pic>
+        <p:nvPicPr>
+          <p:cNvPr id="6" name="zone-presenter" descr="video-presenter.jpg"/>
+          <p:cNvPicPr>
+            <a:picLocks noChangeAspect="1"/>
+          </p:cNvPicPr>
+          <p:nvPr/>
+        </p:nvPicPr>
+        <p:blipFill>
+          <a:blip r:embed="rId3"/>
+          <a:stretch>
+            <a:fillRect/>
+          </a:stretch>
+        </p:blipFill>
+        <p:spPr>
+          <a:xfrm>
+            <a:off x="9956800" y="4622800"/>
+            <a:ext cx="1854200" cy="1854200"/>
+          </a:xfrm>
+          <a:prstGeom prst="ellipse">
+            <a:avLst/>
+          </a:prstGeom>
+        </p:spPr>
+      </p:pic>
+      <p:sp>
+        <p:nvSpPr>
+          <p:cNvPr id="7" name="next-card"/>
           <p:cNvSpPr/>
           <p:nvPr/>
         </p:nvSpPr>
@@ -6785,7 +7467,7 @@
       </p:sp>
       <p:sp>
         <p:nvSpPr>
-          <p:cNvPr id="6" name="Episode"/>
+          <p:cNvPr id="8" name="Episode"/>
           <p:cNvSpPr>
             <a:spLocks noGrp="1"/>
           </p:cNvSpPr>
@@ -6839,7 +7521,7 @@
       </p:sp>
       <p:sp>
         <p:nvSpPr>
-          <p:cNvPr id="7" name="Kicker"/>
+          <p:cNvPr id="9" name="Kicker"/>
           <p:cNvSpPr>
             <a:spLocks noGrp="1"/>
           </p:cNvSpPr>
@@ -6893,7 +7575,7 @@
       </p:sp>
       <p:sp>
         <p:nvSpPr>
-          <p:cNvPr id="8" name="Title"/>
+          <p:cNvPr id="10" name="Title"/>
           <p:cNvSpPr>
             <a:spLocks noGrp="1"/>
           </p:cNvSpPr>
@@ -6947,7 +7629,7 @@
       </p:sp>
       <p:sp>
         <p:nvSpPr>
-          <p:cNvPr id="9" name="NextLabel"/>
+          <p:cNvPr id="11" name="NextLabel"/>
           <p:cNvSpPr>
             <a:spLocks noGrp="1"/>
           </p:cNvSpPr>
@@ -7001,7 +7683,7 @@
       </p:sp>
       <p:sp>
         <p:nvSpPr>
-          <p:cNvPr id="10" name="NextTitle"/>
+          <p:cNvPr id="12" name="NextTitle"/>
           <p:cNvSpPr>
             <a:spLocks noGrp="1"/>
           </p:cNvSpPr>
@@ -7055,7 +7737,7 @@
       </p:sp>
       <p:sp>
         <p:nvSpPr>
-          <p:cNvPr id="11" name="NextText"/>
+          <p:cNvPr id="13" name="NextText"/>
           <p:cNvSpPr>
             <a:spLocks noGrp="1"/>
           </p:cNvSpPr>
@@ -7230,7 +7912,69 @@
       </p:pic>
       <p:sp>
         <p:nvSpPr>
-          <p:cNvPr id="5" name="Episode"/>
+          <p:cNvPr id="5" name="zone-ring"/>
+          <p:cNvSpPr/>
+          <p:nvPr/>
+        </p:nvSpPr>
+        <p:spPr>
+          <a:xfrm>
+            <a:off x="9931400" y="4597400"/>
+            <a:ext cx="1905000" cy="1905000"/>
+          </a:xfrm>
+          <a:prstGeom prst="ellipse">
+            <a:avLst/>
+          </a:prstGeom>
+          <a:solidFill>
+            <a:srgbClr val="FFFFFF"/>
+          </a:solidFill>
+          <a:ln w="25400">
+            <a:solidFill>
+              <a:srgbClr val="00A5FF"/>
+            </a:solidFill>
+          </a:ln>
+          <a:effectLst>
+            <a:glow rad="292100">
+              <a:srgbClr val="00A5FF">
+                <a:alpha val="45000"/>
+              </a:srgbClr>
+            </a:glow>
+          </a:effectLst>
+        </p:spPr>
+        <p:txBody>
+          <a:bodyPr rtlCol="0" anchor="ctr"/>
+          <a:lstStyle/>
+          <a:p>
+            <a:pPr algn="ctr"/>
+          </a:p>
+        </p:txBody>
+      </p:sp>
+      <p:pic>
+        <p:nvPicPr>
+          <p:cNvPr id="6" name="zone-presenter" descr="video-presenter.jpg"/>
+          <p:cNvPicPr>
+            <a:picLocks noChangeAspect="1"/>
+          </p:cNvPicPr>
+          <p:nvPr/>
+        </p:nvPicPr>
+        <p:blipFill>
+          <a:blip r:embed="rId3"/>
+          <a:stretch>
+            <a:fillRect/>
+          </a:stretch>
+        </p:blipFill>
+        <p:spPr>
+          <a:xfrm>
+            <a:off x="9956800" y="4622800"/>
+            <a:ext cx="1854200" cy="1854200"/>
+          </a:xfrm>
+          <a:prstGeom prst="ellipse">
+            <a:avLst/>
+          </a:prstGeom>
+        </p:spPr>
+      </p:pic>
+      <p:sp>
+        <p:nvSpPr>
+          <p:cNvPr id="7" name="Episode"/>
           <p:cNvSpPr>
             <a:spLocks noGrp="1"/>
           </p:cNvSpPr>
@@ -7284,7 +8028,7 @@
       </p:sp>
       <p:sp>
         <p:nvSpPr>
-          <p:cNvPr id="6" name="Kicker"/>
+          <p:cNvPr id="8" name="Kicker"/>
           <p:cNvSpPr>
             <a:spLocks noGrp="1"/>
           </p:cNvSpPr>
@@ -7338,7 +8082,7 @@
       </p:sp>
       <p:sp>
         <p:nvSpPr>
-          <p:cNvPr id="7" name="Title"/>
+          <p:cNvPr id="9" name="Title"/>
           <p:cNvSpPr>
             <a:spLocks noGrp="1"/>
           </p:cNvSpPr>
@@ -7392,7 +8136,7 @@
       </p:sp>
       <p:sp>
         <p:nvSpPr>
-          <p:cNvPr id="8" name="Points"/>
+          <p:cNvPr id="10" name="Points"/>
           <p:cNvSpPr>
             <a:spLocks noGrp="1"/>
           </p:cNvSpPr>
@@ -7594,7 +8338,69 @@
       </p:pic>
       <p:sp>
         <p:nvSpPr>
-          <p:cNvPr id="5" name="Episode"/>
+          <p:cNvPr id="5" name="zone-ring"/>
+          <p:cNvSpPr/>
+          <p:nvPr/>
+        </p:nvSpPr>
+        <p:spPr>
+          <a:xfrm>
+            <a:off x="9931400" y="4597400"/>
+            <a:ext cx="1905000" cy="1905000"/>
+          </a:xfrm>
+          <a:prstGeom prst="ellipse">
+            <a:avLst/>
+          </a:prstGeom>
+          <a:solidFill>
+            <a:srgbClr val="FFFFFF"/>
+          </a:solidFill>
+          <a:ln w="25400">
+            <a:solidFill>
+              <a:srgbClr val="00A5FF"/>
+            </a:solidFill>
+          </a:ln>
+          <a:effectLst>
+            <a:glow rad="292100">
+              <a:srgbClr val="00A5FF">
+                <a:alpha val="45000"/>
+              </a:srgbClr>
+            </a:glow>
+          </a:effectLst>
+        </p:spPr>
+        <p:txBody>
+          <a:bodyPr rtlCol="0" anchor="ctr"/>
+          <a:lstStyle/>
+          <a:p>
+            <a:pPr algn="ctr"/>
+          </a:p>
+        </p:txBody>
+      </p:sp>
+      <p:pic>
+        <p:nvPicPr>
+          <p:cNvPr id="6" name="zone-presenter" descr="video-presenter.jpg"/>
+          <p:cNvPicPr>
+            <a:picLocks noChangeAspect="1"/>
+          </p:cNvPicPr>
+          <p:nvPr/>
+        </p:nvPicPr>
+        <p:blipFill>
+          <a:blip r:embed="rId3"/>
+          <a:stretch>
+            <a:fillRect/>
+          </a:stretch>
+        </p:blipFill>
+        <p:spPr>
+          <a:xfrm>
+            <a:off x="9956800" y="4622800"/>
+            <a:ext cx="1854200" cy="1854200"/>
+          </a:xfrm>
+          <a:prstGeom prst="ellipse">
+            <a:avLst/>
+          </a:prstGeom>
+        </p:spPr>
+      </p:pic>
+      <p:sp>
+        <p:nvSpPr>
+          <p:cNvPr id="7" name="Episode"/>
           <p:cNvSpPr>
             <a:spLocks noGrp="1"/>
           </p:cNvSpPr>
@@ -7648,7 +8454,7 @@
       </p:sp>
       <p:sp>
         <p:nvSpPr>
-          <p:cNvPr id="6" name="Kicker"/>
+          <p:cNvPr id="8" name="Kicker"/>
           <p:cNvSpPr>
             <a:spLocks noGrp="1"/>
           </p:cNvSpPr>
@@ -7702,7 +8508,7 @@
       </p:sp>
       <p:sp>
         <p:nvSpPr>
-          <p:cNvPr id="7" name="Title"/>
+          <p:cNvPr id="9" name="Title"/>
           <p:cNvSpPr>
             <a:spLocks noGrp="1"/>
           </p:cNvSpPr>
@@ -7756,7 +8562,7 @@
       </p:sp>
       <p:sp>
         <p:nvSpPr>
-          <p:cNvPr id="8" name="Points"/>
+          <p:cNvPr id="10" name="Points"/>
           <p:cNvSpPr>
             <a:spLocks noGrp="1"/>
           </p:cNvSpPr>
@@ -7837,7 +8643,7 @@
       </p:sp>
       <p:sp>
         <p:nvSpPr>
-          <p:cNvPr id="9" name="Photo"/>
+          <p:cNvPr id="11" name="Photo"/>
           <p:cNvSpPr>
             <a:spLocks noGrp="1"/>
           </p:cNvSpPr>
@@ -7893,7 +8699,7 @@
       </p:sp>
       <p:sp>
         <p:nvSpPr>
-          <p:cNvPr id="10" name="Caption"/>
+          <p:cNvPr id="12" name="Caption"/>
           <p:cNvSpPr>
             <a:spLocks noGrp="1"/>
           </p:cNvSpPr>
@@ -8068,7 +8874,69 @@
       </p:pic>
       <p:sp>
         <p:nvSpPr>
-          <p:cNvPr id="5" name="Episode"/>
+          <p:cNvPr id="5" name="zone-ring"/>
+          <p:cNvSpPr/>
+          <p:nvPr/>
+        </p:nvSpPr>
+        <p:spPr>
+          <a:xfrm>
+            <a:off x="9931400" y="4597400"/>
+            <a:ext cx="1905000" cy="1905000"/>
+          </a:xfrm>
+          <a:prstGeom prst="ellipse">
+            <a:avLst/>
+          </a:prstGeom>
+          <a:solidFill>
+            <a:srgbClr val="FFFFFF"/>
+          </a:solidFill>
+          <a:ln w="25400">
+            <a:solidFill>
+              <a:srgbClr val="00A5FF"/>
+            </a:solidFill>
+          </a:ln>
+          <a:effectLst>
+            <a:glow rad="292100">
+              <a:srgbClr val="00A5FF">
+                <a:alpha val="45000"/>
+              </a:srgbClr>
+            </a:glow>
+          </a:effectLst>
+        </p:spPr>
+        <p:txBody>
+          <a:bodyPr rtlCol="0" anchor="ctr"/>
+          <a:lstStyle/>
+          <a:p>
+            <a:pPr algn="ctr"/>
+          </a:p>
+        </p:txBody>
+      </p:sp>
+      <p:pic>
+        <p:nvPicPr>
+          <p:cNvPr id="6" name="zone-presenter" descr="video-presenter.jpg"/>
+          <p:cNvPicPr>
+            <a:picLocks noChangeAspect="1"/>
+          </p:cNvPicPr>
+          <p:nvPr/>
+        </p:nvPicPr>
+        <p:blipFill>
+          <a:blip r:embed="rId3"/>
+          <a:stretch>
+            <a:fillRect/>
+          </a:stretch>
+        </p:blipFill>
+        <p:spPr>
+          <a:xfrm>
+            <a:off x="9956800" y="4622800"/>
+            <a:ext cx="1854200" cy="1854200"/>
+          </a:xfrm>
+          <a:prstGeom prst="ellipse">
+            <a:avLst/>
+          </a:prstGeom>
+        </p:spPr>
+      </p:pic>
+      <p:sp>
+        <p:nvSpPr>
+          <p:cNvPr id="7" name="Episode"/>
           <p:cNvSpPr>
             <a:spLocks noGrp="1"/>
           </p:cNvSpPr>
@@ -8122,7 +8990,7 @@
       </p:sp>
       <p:sp>
         <p:nvSpPr>
-          <p:cNvPr id="6" name="Kicker"/>
+          <p:cNvPr id="8" name="Kicker"/>
           <p:cNvSpPr>
             <a:spLocks noGrp="1"/>
           </p:cNvSpPr>
@@ -8176,7 +9044,7 @@
       </p:sp>
       <p:sp>
         <p:nvSpPr>
-          <p:cNvPr id="7" name="Title"/>
+          <p:cNvPr id="9" name="Title"/>
           <p:cNvSpPr>
             <a:spLocks noGrp="1"/>
           </p:cNvSpPr>
@@ -8230,7 +9098,7 @@
       </p:sp>
       <p:sp>
         <p:nvSpPr>
-          <p:cNvPr id="8" name="Points"/>
+          <p:cNvPr id="10" name="Points"/>
           <p:cNvSpPr>
             <a:spLocks noGrp="1"/>
           </p:cNvSpPr>
@@ -8432,7 +9300,69 @@
       </p:pic>
       <p:sp>
         <p:nvSpPr>
-          <p:cNvPr id="5" name="Episode"/>
+          <p:cNvPr id="5" name="zone-ring"/>
+          <p:cNvSpPr/>
+          <p:nvPr/>
+        </p:nvSpPr>
+        <p:spPr>
+          <a:xfrm>
+            <a:off x="9931400" y="4597400"/>
+            <a:ext cx="1905000" cy="1905000"/>
+          </a:xfrm>
+          <a:prstGeom prst="ellipse">
+            <a:avLst/>
+          </a:prstGeom>
+          <a:solidFill>
+            <a:srgbClr val="FFFFFF"/>
+          </a:solidFill>
+          <a:ln w="25400">
+            <a:solidFill>
+              <a:srgbClr val="00A5FF"/>
+            </a:solidFill>
+          </a:ln>
+          <a:effectLst>
+            <a:glow rad="292100">
+              <a:srgbClr val="00A5FF">
+                <a:alpha val="45000"/>
+              </a:srgbClr>
+            </a:glow>
+          </a:effectLst>
+        </p:spPr>
+        <p:txBody>
+          <a:bodyPr rtlCol="0" anchor="ctr"/>
+          <a:lstStyle/>
+          <a:p>
+            <a:pPr algn="ctr"/>
+          </a:p>
+        </p:txBody>
+      </p:sp>
+      <p:pic>
+        <p:nvPicPr>
+          <p:cNvPr id="6" name="zone-presenter" descr="video-presenter.jpg"/>
+          <p:cNvPicPr>
+            <a:picLocks noChangeAspect="1"/>
+          </p:cNvPicPr>
+          <p:nvPr/>
+        </p:nvPicPr>
+        <p:blipFill>
+          <a:blip r:embed="rId3"/>
+          <a:stretch>
+            <a:fillRect/>
+          </a:stretch>
+        </p:blipFill>
+        <p:spPr>
+          <a:xfrm>
+            <a:off x="9956800" y="4622800"/>
+            <a:ext cx="1854200" cy="1854200"/>
+          </a:xfrm>
+          <a:prstGeom prst="ellipse">
+            <a:avLst/>
+          </a:prstGeom>
+        </p:spPr>
+      </p:pic>
+      <p:sp>
+        <p:nvSpPr>
+          <p:cNvPr id="7" name="Episode"/>
           <p:cNvSpPr>
             <a:spLocks noGrp="1"/>
           </p:cNvSpPr>
@@ -8486,7 +9416,7 @@
       </p:sp>
       <p:sp>
         <p:nvSpPr>
-          <p:cNvPr id="6" name="Kicker"/>
+          <p:cNvPr id="8" name="Kicker"/>
           <p:cNvSpPr>
             <a:spLocks noGrp="1"/>
           </p:cNvSpPr>
@@ -8540,7 +9470,7 @@
       </p:sp>
       <p:sp>
         <p:nvSpPr>
-          <p:cNvPr id="7" name="Big"/>
+          <p:cNvPr id="9" name="Big"/>
           <p:cNvSpPr>
             <a:spLocks noGrp="1"/>
           </p:cNvSpPr>
@@ -8597,7 +9527,7 @@
       </p:sp>
       <p:sp>
         <p:nvSpPr>
-          <p:cNvPr id="8" name="Statement"/>
+          <p:cNvPr id="10" name="Statement"/>
           <p:cNvSpPr>
             <a:spLocks noGrp="1"/>
           </p:cNvSpPr>
@@ -8651,7 +9581,7 @@
       </p:sp>
       <p:sp>
         <p:nvSpPr>
-          <p:cNvPr id="9" name="Text"/>
+          <p:cNvPr id="11" name="Text"/>
           <p:cNvSpPr>
             <a:spLocks noGrp="1"/>
           </p:cNvSpPr>
@@ -8826,7 +9756,69 @@
       </p:pic>
       <p:sp>
         <p:nvSpPr>
-          <p:cNvPr id="5" name="Episode"/>
+          <p:cNvPr id="5" name="zone-ring"/>
+          <p:cNvSpPr/>
+          <p:nvPr/>
+        </p:nvSpPr>
+        <p:spPr>
+          <a:xfrm>
+            <a:off x="9931400" y="4597400"/>
+            <a:ext cx="1905000" cy="1905000"/>
+          </a:xfrm>
+          <a:prstGeom prst="ellipse">
+            <a:avLst/>
+          </a:prstGeom>
+          <a:solidFill>
+            <a:srgbClr val="FFFFFF"/>
+          </a:solidFill>
+          <a:ln w="25400">
+            <a:solidFill>
+              <a:srgbClr val="00A5FF"/>
+            </a:solidFill>
+          </a:ln>
+          <a:effectLst>
+            <a:glow rad="292100">
+              <a:srgbClr val="00A5FF">
+                <a:alpha val="45000"/>
+              </a:srgbClr>
+            </a:glow>
+          </a:effectLst>
+        </p:spPr>
+        <p:txBody>
+          <a:bodyPr rtlCol="0" anchor="ctr"/>
+          <a:lstStyle/>
+          <a:p>
+            <a:pPr algn="ctr"/>
+          </a:p>
+        </p:txBody>
+      </p:sp>
+      <p:pic>
+        <p:nvPicPr>
+          <p:cNvPr id="6" name="zone-presenter" descr="video-presenter.jpg"/>
+          <p:cNvPicPr>
+            <a:picLocks noChangeAspect="1"/>
+          </p:cNvPicPr>
+          <p:nvPr/>
+        </p:nvPicPr>
+        <p:blipFill>
+          <a:blip r:embed="rId3"/>
+          <a:stretch>
+            <a:fillRect/>
+          </a:stretch>
+        </p:blipFill>
+        <p:spPr>
+          <a:xfrm>
+            <a:off x="9956800" y="4622800"/>
+            <a:ext cx="1854200" cy="1854200"/>
+          </a:xfrm>
+          <a:prstGeom prst="ellipse">
+            <a:avLst/>
+          </a:prstGeom>
+        </p:spPr>
+      </p:pic>
+      <p:sp>
+        <p:nvSpPr>
+          <p:cNvPr id="7" name="Episode"/>
           <p:cNvSpPr>
             <a:spLocks noGrp="1"/>
           </p:cNvSpPr>
@@ -8880,7 +9872,7 @@
       </p:sp>
       <p:sp>
         <p:nvSpPr>
-          <p:cNvPr id="6" name="Kicker"/>
+          <p:cNvPr id="8" name="Kicker"/>
           <p:cNvSpPr>
             <a:spLocks noGrp="1"/>
           </p:cNvSpPr>
@@ -8934,7 +9926,7 @@
       </p:sp>
       <p:sp>
         <p:nvSpPr>
-          <p:cNvPr id="7" name="Title"/>
+          <p:cNvPr id="9" name="Title"/>
           <p:cNvSpPr>
             <a:spLocks noGrp="1"/>
           </p:cNvSpPr>
@@ -15733,6 +16725,68 @@
           </a:p>
         </p:txBody>
       </p:sp>
+      <p:sp>
+        <p:nvSpPr>
+          <p:cNvPr id="18" name="zone-ring-top"/>
+          <p:cNvSpPr/>
+          <p:nvPr/>
+        </p:nvSpPr>
+        <p:spPr>
+          <a:xfrm>
+            <a:off x="9931400" y="4597400"/>
+            <a:ext cx="1905000" cy="1905000"/>
+          </a:xfrm>
+          <a:prstGeom prst="ellipse">
+            <a:avLst/>
+          </a:prstGeom>
+          <a:solidFill>
+            <a:srgbClr val="232C31"/>
+          </a:solidFill>
+          <a:ln w="25400">
+            <a:solidFill>
+              <a:srgbClr val="00A5FF"/>
+            </a:solidFill>
+          </a:ln>
+          <a:effectLst>
+            <a:glow rad="381000">
+              <a:srgbClr val="00A5FF">
+                <a:alpha val="55000"/>
+              </a:srgbClr>
+            </a:glow>
+          </a:effectLst>
+        </p:spPr>
+        <p:txBody>
+          <a:bodyPr rtlCol="0" anchor="ctr"/>
+          <a:lstStyle/>
+          <a:p>
+            <a:pPr algn="ctr"/>
+          </a:p>
+        </p:txBody>
+      </p:sp>
+      <p:pic>
+        <p:nvPicPr>
+          <p:cNvPr id="19" name="zone-presenter-top" descr="image.jpg"/>
+          <p:cNvPicPr>
+            <a:picLocks noChangeAspect="1"/>
+          </p:cNvPicPr>
+          <p:nvPr/>
+        </p:nvPicPr>
+        <p:blipFill>
+          <a:blip r:embed="rId4"/>
+          <a:stretch>
+            <a:fillRect/>
+          </a:stretch>
+        </p:blipFill>
+        <p:spPr>
+          <a:xfrm>
+            <a:off x="9956800" y="4622800"/>
+            <a:ext cx="1854200" cy="1854200"/>
+          </a:xfrm>
+          <a:prstGeom prst="ellipse">
+            <a:avLst/>
+          </a:prstGeom>
+        </p:spPr>
+      </p:pic>
     </p:spTree>
   </p:cSld>
   <p:clrMapOvr>
